--- a/deliverables/실버_금융가드_AI_기술설명서.pptx
+++ b/deliverables/실버_금융가드_AI_기술설명서.pptx
@@ -2,24 +2,24 @@
 <file path=ppt/presentation.xml><?xml version="1.0" encoding="utf-8"?>
 <p:presentation xmlns:p="http://schemas.openxmlformats.org/presentationml/2006/main">
   <p:sldMasterIdLst>
-    <p:sldMasterId xmlns:r="http://schemas.openxmlformats.org/officeDocument/2006/relationships" id="2147483648" r:id="R298fe249cdf642c4"/>
+    <p:sldMasterId xmlns:r="http://schemas.openxmlformats.org/officeDocument/2006/relationships" id="2147483648" r:id="R81707d33383d4583"/>
   </p:sldMasterIdLst>
   <p:notesMasterIdLst>
-    <p:notesMasterId xmlns:r="http://schemas.openxmlformats.org/officeDocument/2006/relationships" r:id="R3b0c0d6ed9d444ad"/>
+    <p:notesMasterId xmlns:r="http://schemas.openxmlformats.org/officeDocument/2006/relationships" r:id="R281d79f2bc0d46a3"/>
   </p:notesMasterIdLst>
   <p:sldIdLst>
-    <p:sldId xmlns:r="http://schemas.openxmlformats.org/officeDocument/2006/relationships" id="256" r:id="R4173092826ce45ab"/>
-    <p:sldId xmlns:r="http://schemas.openxmlformats.org/officeDocument/2006/relationships" id="257" r:id="Rdfd45e69d763438a"/>
-    <p:sldId xmlns:r="http://schemas.openxmlformats.org/officeDocument/2006/relationships" id="258" r:id="Rb111c55adac84bd6"/>
-    <p:sldId xmlns:r="http://schemas.openxmlformats.org/officeDocument/2006/relationships" id="259" r:id="Re84cf6693a874fb6"/>
-    <p:sldId xmlns:r="http://schemas.openxmlformats.org/officeDocument/2006/relationships" id="260" r:id="Ra99eeb0aac654899"/>
-    <p:sldId xmlns:r="http://schemas.openxmlformats.org/officeDocument/2006/relationships" id="261" r:id="R737f663a052e4c9b"/>
-    <p:sldId xmlns:r="http://schemas.openxmlformats.org/officeDocument/2006/relationships" id="262" r:id="R00869394c9784de3"/>
-    <p:sldId xmlns:r="http://schemas.openxmlformats.org/officeDocument/2006/relationships" id="263" r:id="Rb25c36b712cd4388"/>
-    <p:sldId xmlns:r="http://schemas.openxmlformats.org/officeDocument/2006/relationships" id="264" r:id="R7d902d08b49c411c"/>
-    <p:sldId xmlns:r="http://schemas.openxmlformats.org/officeDocument/2006/relationships" id="265" r:id="R5b177d9d998e4f91"/>
-    <p:sldId xmlns:r="http://schemas.openxmlformats.org/officeDocument/2006/relationships" id="266" r:id="R66cd05d2f85d453c"/>
-    <p:sldId xmlns:r="http://schemas.openxmlformats.org/officeDocument/2006/relationships" id="267" r:id="Rc11c1d0ecdd64259"/>
+    <p:sldId xmlns:r="http://schemas.openxmlformats.org/officeDocument/2006/relationships" id="256" r:id="R1d702d444ea94b90"/>
+    <p:sldId xmlns:r="http://schemas.openxmlformats.org/officeDocument/2006/relationships" id="257" r:id="Rbeb0f6aba68c4949"/>
+    <p:sldId xmlns:r="http://schemas.openxmlformats.org/officeDocument/2006/relationships" id="258" r:id="R894a10561d604f18"/>
+    <p:sldId xmlns:r="http://schemas.openxmlformats.org/officeDocument/2006/relationships" id="259" r:id="R70df56c428634484"/>
+    <p:sldId xmlns:r="http://schemas.openxmlformats.org/officeDocument/2006/relationships" id="260" r:id="R8c2ed7c1e08b4de8"/>
+    <p:sldId xmlns:r="http://schemas.openxmlformats.org/officeDocument/2006/relationships" id="261" r:id="R9f28c0a2abe1464b"/>
+    <p:sldId xmlns:r="http://schemas.openxmlformats.org/officeDocument/2006/relationships" id="262" r:id="R782edc36fcc943fa"/>
+    <p:sldId xmlns:r="http://schemas.openxmlformats.org/officeDocument/2006/relationships" id="263" r:id="R845d9b7b9357423c"/>
+    <p:sldId xmlns:r="http://schemas.openxmlformats.org/officeDocument/2006/relationships" id="264" r:id="R15d61eff21c84d22"/>
+    <p:sldId xmlns:r="http://schemas.openxmlformats.org/officeDocument/2006/relationships" id="265" r:id="R29d59230b2e245cd"/>
+    <p:sldId xmlns:r="http://schemas.openxmlformats.org/officeDocument/2006/relationships" id="266" r:id="R7b41a6c9de404827"/>
+    <p:sldId xmlns:r="http://schemas.openxmlformats.org/officeDocument/2006/relationships" id="267" r:id="R1022800eca764aa0"/>
   </p:sldIdLst>
   <p:sldSz cx="12192000" cy="6858000"/>
   <p:notesSz cx="6858000" cy="9144000"/>
@@ -533,12 +533,17 @@
           </a:p>
           <a:p xmlns:a="http://schemas.openxmlformats.org/drawingml/2006/main">
             <a:r>
-              <a:t>- 프로젝트 내부 평가표: backend/app/data/evaluation/risk_detection_report.json</a:t>
-            </a:r>
-          </a:p>
-          <a:p xmlns:a="http://schemas.openxmlformats.org/drawingml/2006/main">
-            <a:r>
-              <a:t>- 프로젝트 자동 테스트 및 npm audit 실행 결과(2026-08-01)</a:t>
+              <a:t>평가 보고서: backend/app/data/evaluation/risk_detection_report.json.</a:t>
+            </a:r>
+          </a:p>
+          <a:p xmlns:a="http://schemas.openxmlformats.org/drawingml/2006/main">
+            <a:r>
+              <a:t>자동 테스트 및 프론트엔드 빌드 결과: repository test scripts (2026-08-02).</a:t>
+            </a:r>
+          </a:p>
+          <a:p xmlns:a="http://schemas.openxmlformats.org/drawingml/2006/main">
+            <a:r>
+              <a:t>[/Sources]</a:t>
             </a:r>
           </a:p>
         </p:txBody>
@@ -613,12 +618,12 @@
           </a:p>
           <a:p xmlns:a="http://schemas.openxmlformats.org/drawingml/2006/main">
             <a:r>
-              <a:t>- GitHub 저장소: https://github.com/kkssyy1215/Silver_Finance_Guard_AI</a:t>
-            </a:r>
-          </a:p>
-          <a:p xmlns:a="http://schemas.openxmlformats.org/drawingml/2006/main">
-            <a:r>
-              <a:t>- Render 공개 배포: https://silver-finance-guard-ai.onrender.com</a:t>
+              <a:t>개발 로드맵 및 실행 구성: README.md, Dockerfile, render.yaml.</a:t>
+            </a:r>
+          </a:p>
+          <a:p xmlns:a="http://schemas.openxmlformats.org/drawingml/2006/main">
+            <a:r>
+              <a:t>[/Sources]</a:t>
             </a:r>
           </a:p>
         </p:txBody>
@@ -693,12 +698,12 @@
           </a:p>
           <a:p xmlns:a="http://schemas.openxmlformats.org/drawingml/2006/main">
             <a:r>
-              <a:t>- 제출용 프로토타입: https://silver-finance-guard-ai.onrender.com</a:t>
-            </a:r>
-          </a:p>
-          <a:p xmlns:a="http://schemas.openxmlformats.org/drawingml/2006/main">
-            <a:r>
-              <a:t>- 소스 코드: https://github.com/kkssyy1215/Silver_Finance_Guard_AI</a:t>
+              <a:t>프로젝트 자체 기술 설명 및 제출 자료 요약.</a:t>
+            </a:r>
+          </a:p>
+          <a:p xmlns:a="http://schemas.openxmlformats.org/drawingml/2006/main">
+            <a:r>
+              <a:t>[/Sources]</a:t>
             </a:r>
           </a:p>
         </p:txBody>
@@ -853,7 +858,17 @@
           </a:p>
           <a:p xmlns:a="http://schemas.openxmlformats.org/drawingml/2006/main">
             <a:r>
-              <a:t>- 프로젝트 기능 명세 및 구현 코드: https://github.com/kkssyy1215/Silver_Finance_Guard_AI</a:t>
+              <a:t>프로젝트 기능 명세 및 구현 코드: Silver Finance Guard AI repository.</a:t>
+            </a:r>
+          </a:p>
+          <a:p xmlns:a="http://schemas.openxmlformats.org/drawingml/2006/main">
+            <a:r>
+              <a:t>차별화 문구는 프로젝트 기능 범위를 요약한 자체 설명입니다.</a:t>
+            </a:r>
+          </a:p>
+          <a:p xmlns:a="http://schemas.openxmlformats.org/drawingml/2006/main">
+            <a:r>
+              <a:t>[/Sources]</a:t>
             </a:r>
           </a:p>
         </p:txBody>
@@ -1003,12 +1018,17 @@
           </a:p>
           <a:p xmlns:a="http://schemas.openxmlformats.org/drawingml/2006/main">
             <a:r>
-              <a:t>- 실버 금융가드 AI 프로토타입 화면: https://silver-finance-guard-ai.onrender.com</a:t>
-            </a:r>
-          </a:p>
-          <a:p xmlns:a="http://schemas.openxmlformats.org/drawingml/2006/main">
-            <a:r>
-              <a:t>- 공정거래위원회 은행 표준약관 3종(2024-09-27)</a:t>
+              <a:t>실버 금융가드 AI 로컬 실행 화면 캡처 (PC, 2026-08-02).</a:t>
+            </a:r>
+          </a:p>
+          <a:p xmlns:a="http://schemas.openxmlformats.org/drawingml/2006/main">
+            <a:r>
+              <a:t>공식 데이터 출처 및 사용 조건: backend/app/data/official/official_dataset_registry.json.</a:t>
+            </a:r>
+          </a:p>
+          <a:p xmlns:a="http://schemas.openxmlformats.org/drawingml/2006/main">
+            <a:r>
+              <a:t>[/Sources]</a:t>
             </a:r>
           </a:p>
         </p:txBody>
@@ -1083,17 +1103,17 @@
           </a:p>
           <a:p xmlns:a="http://schemas.openxmlformats.org/drawingml/2006/main">
             <a:r>
-              <a:t>- 예금보험공사 착오송금 반환지원제도 FAQ(2024-07-29)</a:t>
-            </a:r>
-          </a:p>
-          <a:p xmlns:a="http://schemas.openxmlformats.org/drawingml/2006/main">
-            <a:r>
-              <a:t>- 경찰청·금융위원회 보이스피싱 대응 안내</a:t>
-            </a:r>
-          </a:p>
-          <a:p xmlns:a="http://schemas.openxmlformats.org/drawingml/2006/main">
-            <a:r>
-              <a:t>- 실버 금융가드 AI 프로토타입: https://silver-finance-guard-ai.onrender.com</a:t>
+              <a:t>실버 금융가드 AI 로컬 실행 화면 캡처 (PC, 2026-08-02).</a:t>
+            </a:r>
+          </a:p>
+          <a:p xmlns:a="http://schemas.openxmlformats.org/drawingml/2006/main">
+            <a:r>
+              <a:t>사고 대응 근거: 예금보험공사 착오송금 반환지원 FAQ 및 경찰청 보이스피싱 통계/안내 데이터.</a:t>
+            </a:r>
+          </a:p>
+          <a:p xmlns:a="http://schemas.openxmlformats.org/drawingml/2006/main">
+            <a:r>
+              <a:t>[/Sources]</a:t>
             </a:r>
           </a:p>
         </p:txBody>
@@ -1168,22 +1188,37 @@
           </a:p>
           <a:p xmlns:a="http://schemas.openxmlformats.org/drawingml/2006/main">
             <a:r>
-              <a:t>- 공공데이터포털 이용허락범위 제한 없음 데이터</a:t>
-            </a:r>
-          </a:p>
-          <a:p xmlns:a="http://schemas.openxmlformats.org/drawingml/2006/main">
-            <a:r>
-              <a:t>- 금융위원회 금융용어사전</a:t>
-            </a:r>
-          </a:p>
-          <a:p xmlns:a="http://schemas.openxmlformats.org/drawingml/2006/main">
-            <a:r>
-              <a:t>- 소비자24 상담 사례</a:t>
-            </a:r>
-          </a:p>
-          <a:p xmlns:a="http://schemas.openxmlformats.org/drawingml/2006/main">
-            <a:r>
-              <a:t>- 한국언론진흥재단 뉴스 빅데이터 메타데이터</a:t>
+              <a:t>- https://www.data.go.kr/data/15160317/fileData.do (금융위원회 금융용어사전)</a:t>
+            </a:r>
+          </a:p>
+          <a:p xmlns:a="http://schemas.openxmlformats.org/drawingml/2006/main">
+            <a:r>
+              <a:t>- https://www.data.go.kr/data/15098335/fileData.do (예금보험공사 착오송금 반환지원 FAQ)</a:t>
+            </a:r>
+          </a:p>
+          <a:p xmlns:a="http://schemas.openxmlformats.org/drawingml/2006/main">
+            <a:r>
+              <a:t>- https://www.data.go.kr/data/15063815/fileData.do (경찰청 보이스피싱 현황)</a:t>
+            </a:r>
+          </a:p>
+          <a:p xmlns:a="http://schemas.openxmlformats.org/drawingml/2006/main">
+            <a:r>
+              <a:t>- https://www.data.go.kr/data/15157710/fileData.do (경찰청 지역별 보이스피싱 현황)</a:t>
+            </a:r>
+          </a:p>
+          <a:p xmlns:a="http://schemas.openxmlformats.org/drawingml/2006/main">
+            <a:r>
+              <a:t>- https://www.data.go.kr/data/15021794/fileData.do (우체국금융개발원 금융사기 예방 정보)</a:t>
+            </a:r>
+          </a:p>
+          <a:p xmlns:a="http://schemas.openxmlformats.org/drawingml/2006/main">
+            <a:r>
+              <a:t>- backend/app/data/official/official_dataset_registry.json (12 runtime datasets; license unrestricted)</a:t>
+            </a:r>
+          </a:p>
+          <a:p xmlns:a="http://schemas.openxmlformats.org/drawingml/2006/main">
+            <a:r>
+              <a:t>[/Sources]</a:t>
             </a:r>
           </a:p>
         </p:txBody>
@@ -1338,12 +1373,17 @@
           </a:p>
           <a:p xmlns:a="http://schemas.openxmlformats.org/drawingml/2006/main">
             <a:r>
-              <a:t>- 실버 금융가드 AI 고대비 프로토타입: https://silver-finance-guard-ai.onrender.com</a:t>
-            </a:r>
-          </a:p>
-          <a:p xmlns:a="http://schemas.openxmlformats.org/drawingml/2006/main">
-            <a:r>
-              <a:t>- 웹 접근성 원칙을 참고한 프로젝트 자체 UX 설계</a:t>
+              <a:t>실버 금융가드 AI 로컬 실행 화면 캡처 (390px 모바일 뷰포트, 2026-08-02).</a:t>
+            </a:r>
+          </a:p>
+          <a:p xmlns:a="http://schemas.openxmlformats.org/drawingml/2006/main">
+            <a:r>
+              <a:t>반응형 화면 및 접근성 기능은 프로젝트 구현 범위입니다.</a:t>
+            </a:r>
+          </a:p>
+          <a:p xmlns:a="http://schemas.openxmlformats.org/drawingml/2006/main">
+            <a:r>
+              <a:t>[/Sources]</a:t>
             </a:r>
           </a:p>
         </p:txBody>
@@ -1411,7 +1451,7 @@
   </p:cSld>
   <p:clrMap bg1="lt1" tx1="dk1" bg2="lt2" tx2="dk2" accent1="accent1" accent2="accent2" accent3="accent3" accent4="accent4" accent5="accent5" accent6="accent6" hlink="hlink" folHlink="folHlink"/>
   <p:sldLayoutIdLst>
-    <p:sldLayoutId xmlns:r="http://schemas.openxmlformats.org/officeDocument/2006/relationships" id="2147483649" r:id="Rb3685dccdcb743c1"/>
+    <p:sldLayoutId xmlns:r="http://schemas.openxmlformats.org/officeDocument/2006/relationships" id="2147483649" r:id="Rb48b16d6e3c64682"/>
   </p:sldLayoutIdLst>
   <p:txStyles>
     <p:titleStyle>
@@ -1990,13 +2030,14 @@
           <a:lstStyle xmlns:a="http://schemas.openxmlformats.org/drawingml/2006/main"/>
           <a:p xmlns:a="http://schemas.openxmlformats.org/drawingml/2006/main">
             <a:pPr algn="l">
+              <a:buNone/>
               <a:defRPr sz="1350" b="1">
                 <a:solidFill>
                   <a:srgbClr val="0B6B57"/>
                 </a:solidFill>
-                <a:latin typeface="Nanum Gothic"/>
-                <a:ea typeface="Nanum Gothic"/>
-                <a:cs typeface="Nanum Gothic"/>
+                <a:latin typeface="NanumGothic"/>
+                <a:ea typeface="NanumGothic"/>
+                <a:cs typeface="NanumGothic"/>
               </a:defRPr>
             </a:pPr>
             <a:r>
@@ -2004,9 +2045,9 @@
                 <a:solidFill>
                   <a:srgbClr val="0B6B57"/>
                 </a:solidFill>
-                <a:latin typeface="Nanum Gothic"/>
-                <a:ea typeface="Nanum Gothic"/>
-                <a:cs typeface="Nanum Gothic"/>
+                <a:latin typeface="NanumGothic"/>
+                <a:ea typeface="NanumGothic"/>
+                <a:cs typeface="NanumGothic"/>
               </a:rPr>
               <a:t>KB AI CHALLENGE · 기술설명서</a:t>
             </a:r>
@@ -2046,13 +2087,14 @@
           <a:lstStyle xmlns:a="http://schemas.openxmlformats.org/drawingml/2006/main"/>
           <a:p xmlns:a="http://schemas.openxmlformats.org/drawingml/2006/main">
             <a:pPr algn="l">
+              <a:buNone/>
               <a:defRPr sz="5550" b="1">
                 <a:solidFill>
                   <a:srgbClr val="111820"/>
                 </a:solidFill>
-                <a:latin typeface="Nanum Gothic"/>
-                <a:ea typeface="Nanum Gothic"/>
-                <a:cs typeface="Nanum Gothic"/>
+                <a:latin typeface="NanumGothic"/>
+                <a:ea typeface="NanumGothic"/>
+                <a:cs typeface="NanumGothic"/>
               </a:defRPr>
             </a:pPr>
             <a:r>
@@ -2060,9 +2102,9 @@
                 <a:solidFill>
                   <a:srgbClr val="111820"/>
                 </a:solidFill>
-                <a:latin typeface="Nanum Gothic"/>
-                <a:ea typeface="Nanum Gothic"/>
-                <a:cs typeface="Nanum Gothic"/>
+                <a:latin typeface="NanumGothic"/>
+                <a:ea typeface="NanumGothic"/>
+                <a:cs typeface="NanumGothic"/>
               </a:rPr>
               <a:t>실버 금융가드 AI</a:t>
             </a:r>
@@ -2102,13 +2144,14 @@
           <a:lstStyle xmlns:a="http://schemas.openxmlformats.org/drawingml/2006/main"/>
           <a:p xmlns:a="http://schemas.openxmlformats.org/drawingml/2006/main">
             <a:pPr algn="l">
+              <a:buNone/>
               <a:defRPr sz="2625" b="0">
                 <a:solidFill>
                   <a:srgbClr val="111820"/>
                 </a:solidFill>
-                <a:latin typeface="Nanum Gothic"/>
-                <a:ea typeface="Nanum Gothic"/>
-                <a:cs typeface="Nanum Gothic"/>
+                <a:latin typeface="NanumGothic"/>
+                <a:ea typeface="NanumGothic"/>
+                <a:cs typeface="NanumGothic"/>
               </a:defRPr>
             </a:pPr>
             <a:r>
@@ -2116,22 +2159,23 @@
                 <a:solidFill>
                   <a:srgbClr val="111820"/>
                 </a:solidFill>
-                <a:latin typeface="Nanum Gothic"/>
-                <a:ea typeface="Nanum Gothic"/>
-                <a:cs typeface="Nanum Gothic"/>
+                <a:latin typeface="NanumGothic"/>
+                <a:ea typeface="NanumGothic"/>
+                <a:cs typeface="NanumGothic"/>
               </a:rPr>
               <a:t>가입 전 위험은 미리 찾고,</a:t>
             </a:r>
           </a:p>
           <a:p xmlns:a="http://schemas.openxmlformats.org/drawingml/2006/main">
             <a:pPr algn="l">
+              <a:buNone/>
               <a:defRPr sz="2625" b="0">
                 <a:solidFill>
                   <a:srgbClr val="111820"/>
                 </a:solidFill>
-                <a:latin typeface="Nanum Gothic"/>
-                <a:ea typeface="Nanum Gothic"/>
-                <a:cs typeface="Nanum Gothic"/>
+                <a:latin typeface="NanumGothic"/>
+                <a:ea typeface="NanumGothic"/>
+                <a:cs typeface="NanumGothic"/>
               </a:defRPr>
             </a:pPr>
             <a:r>
@@ -2139,9 +2183,9 @@
                 <a:solidFill>
                   <a:srgbClr val="111820"/>
                 </a:solidFill>
-                <a:latin typeface="Nanum Gothic"/>
-                <a:ea typeface="Nanum Gothic"/>
-                <a:cs typeface="Nanum Gothic"/>
+                <a:latin typeface="NanumGothic"/>
+                <a:ea typeface="NanumGothic"/>
+                <a:cs typeface="NanumGothic"/>
               </a:rPr>
               <a:t>금융사고는 골든타임 안에 대응합니다.</a:t>
             </a:r>
@@ -2178,6 +2222,11 @@
             <a:prstDash val="solid"/>
           </a:ln>
         </p:spPr>
+        <p:txBody>
+          <a:bodyPr xmlns:a="http://schemas.openxmlformats.org/drawingml/2006/main"/>
+          <a:lstStyle xmlns:a="http://schemas.openxmlformats.org/drawingml/2006/main"/>
+          <a:p xmlns:a="http://schemas.openxmlformats.org/drawingml/2006/main"/>
+        </p:txBody>
       </p:sp>
       <p:sp>
         <p:nvSpPr>
@@ -2212,13 +2261,14 @@
           <a:lstStyle xmlns:a="http://schemas.openxmlformats.org/drawingml/2006/main"/>
           <a:p xmlns:a="http://schemas.openxmlformats.org/drawingml/2006/main">
             <a:pPr algn="ctr">
+              <a:buNone/>
               <a:defRPr sz="2250" b="1">
                 <a:solidFill>
                   <a:srgbClr val="FFFFFF"/>
                 </a:solidFill>
-                <a:latin typeface="Nanum Gothic"/>
-                <a:ea typeface="Nanum Gothic"/>
-                <a:cs typeface="Nanum Gothic"/>
+                <a:latin typeface="NanumGothic"/>
+                <a:ea typeface="NanumGothic"/>
+                <a:cs typeface="NanumGothic"/>
               </a:defRPr>
             </a:pPr>
             <a:r>
@@ -2226,22 +2276,23 @@
                 <a:solidFill>
                   <a:srgbClr val="FFFFFF"/>
                 </a:solidFill>
-                <a:latin typeface="Nanum Gothic"/>
-                <a:ea typeface="Nanum Gothic"/>
-                <a:cs typeface="Nanum Gothic"/>
+                <a:latin typeface="NanumGothic"/>
+                <a:ea typeface="NanumGothic"/>
+                <a:cs typeface="NanumGothic"/>
               </a:rPr>
               <a:t>PREVENT</a:t>
             </a:r>
           </a:p>
           <a:p xmlns:a="http://schemas.openxmlformats.org/drawingml/2006/main">
             <a:pPr algn="ctr">
+              <a:buNone/>
               <a:defRPr sz="2250" b="1">
                 <a:solidFill>
                   <a:srgbClr val="FFFFFF"/>
                 </a:solidFill>
-                <a:latin typeface="Nanum Gothic"/>
-                <a:ea typeface="Nanum Gothic"/>
-                <a:cs typeface="Nanum Gothic"/>
+                <a:latin typeface="NanumGothic"/>
+                <a:ea typeface="NanumGothic"/>
+                <a:cs typeface="NanumGothic"/>
               </a:defRPr>
             </a:pPr>
             <a:r>
@@ -2249,22 +2300,23 @@
                 <a:solidFill>
                   <a:srgbClr val="FFFFFF"/>
                 </a:solidFill>
-                <a:latin typeface="Nanum Gothic"/>
-                <a:ea typeface="Nanum Gothic"/>
-                <a:cs typeface="Nanum Gothic"/>
+                <a:latin typeface="NanumGothic"/>
+                <a:ea typeface="NanumGothic"/>
+                <a:cs typeface="NanumGothic"/>
               </a:rPr>
               <a:t>RESPOND</a:t>
             </a:r>
           </a:p>
           <a:p xmlns:a="http://schemas.openxmlformats.org/drawingml/2006/main">
             <a:pPr algn="ctr">
+              <a:buNone/>
               <a:defRPr sz="2250" b="1">
                 <a:solidFill>
                   <a:srgbClr val="FFFFFF"/>
                 </a:solidFill>
-                <a:latin typeface="Nanum Gothic"/>
-                <a:ea typeface="Nanum Gothic"/>
-                <a:cs typeface="Nanum Gothic"/>
+                <a:latin typeface="NanumGothic"/>
+                <a:ea typeface="NanumGothic"/>
+                <a:cs typeface="NanumGothic"/>
               </a:defRPr>
             </a:pPr>
             <a:r>
@@ -2272,9 +2324,9 @@
                 <a:solidFill>
                   <a:srgbClr val="FFFFFF"/>
                 </a:solidFill>
-                <a:latin typeface="Nanum Gothic"/>
-                <a:ea typeface="Nanum Gothic"/>
-                <a:cs typeface="Nanum Gothic"/>
+                <a:latin typeface="NanumGothic"/>
+                <a:ea typeface="NanumGothic"/>
+                <a:cs typeface="NanumGothic"/>
               </a:rPr>
               <a:t>PROTECT</a:t>
             </a:r>
@@ -2314,13 +2366,14 @@
           <a:lstStyle xmlns:a="http://schemas.openxmlformats.org/drawingml/2006/main"/>
           <a:p xmlns:a="http://schemas.openxmlformats.org/drawingml/2006/main">
             <a:pPr algn="l">
+              <a:buNone/>
               <a:defRPr sz="1200" b="0">
                 <a:solidFill>
                   <a:srgbClr val="58636F"/>
                 </a:solidFill>
-                <a:latin typeface="Nanum Gothic"/>
-                <a:ea typeface="Nanum Gothic"/>
-                <a:cs typeface="Nanum Gothic"/>
+                <a:latin typeface="NanumGothic"/>
+                <a:ea typeface="NanumGothic"/>
+                <a:cs typeface="NanumGothic"/>
               </a:defRPr>
             </a:pPr>
             <a:r>
@@ -2328,11 +2381,11 @@
                 <a:solidFill>
                   <a:srgbClr val="58636F"/>
                 </a:solidFill>
-                <a:latin typeface="Nanum Gothic"/>
-                <a:ea typeface="Nanum Gothic"/>
-                <a:cs typeface="Nanum Gothic"/>
-              </a:rPr>
-              <a:t>2026.08.01</a:t>
+                <a:latin typeface="NanumGothic"/>
+                <a:ea typeface="NanumGothic"/>
+                <a:cs typeface="NanumGothic"/>
+              </a:rPr>
+              <a:t>2026.08.02</a:t>
             </a:r>
           </a:p>
         </p:txBody>
@@ -2392,13 +2445,14 @@
           <a:lstStyle xmlns:a="http://schemas.openxmlformats.org/drawingml/2006/main"/>
           <a:p xmlns:a="http://schemas.openxmlformats.org/drawingml/2006/main">
             <a:pPr algn="l">
+              <a:buNone/>
               <a:defRPr sz="1125" b="1">
                 <a:solidFill>
                   <a:srgbClr val="0B6B57"/>
                 </a:solidFill>
-                <a:latin typeface="Nanum Gothic"/>
-                <a:ea typeface="Nanum Gothic"/>
-                <a:cs typeface="Nanum Gothic"/>
+                <a:latin typeface="NanumGothic"/>
+                <a:ea typeface="NanumGothic"/>
+                <a:cs typeface="NanumGothic"/>
               </a:defRPr>
             </a:pPr>
             <a:r>
@@ -2406,9 +2460,9 @@
                 <a:solidFill>
                   <a:srgbClr val="0B6B57"/>
                 </a:solidFill>
-                <a:latin typeface="Nanum Gothic"/>
-                <a:ea typeface="Nanum Gothic"/>
-                <a:cs typeface="Nanum Gothic"/>
+                <a:latin typeface="NanumGothic"/>
+                <a:ea typeface="NanumGothic"/>
+                <a:cs typeface="NanumGothic"/>
               </a:rPr>
               <a:t>기술적 완성도와 검증</a:t>
             </a:r>
@@ -2448,13 +2502,14 @@
           <a:lstStyle xmlns:a="http://schemas.openxmlformats.org/drawingml/2006/main"/>
           <a:p xmlns:a="http://schemas.openxmlformats.org/drawingml/2006/main">
             <a:pPr algn="l">
+              <a:buNone/>
               <a:defRPr sz="3525" b="1">
                 <a:solidFill>
                   <a:srgbClr val="111820"/>
                 </a:solidFill>
-                <a:latin typeface="Nanum Gothic"/>
-                <a:ea typeface="Nanum Gothic"/>
-                <a:cs typeface="Nanum Gothic"/>
+                <a:latin typeface="NanumGothic"/>
+                <a:ea typeface="NanumGothic"/>
+                <a:cs typeface="NanumGothic"/>
               </a:defRPr>
             </a:pPr>
             <a:r>
@@ -2462,18 +2517,18 @@
                 <a:solidFill>
                   <a:srgbClr val="111820"/>
                 </a:solidFill>
-                <a:latin typeface="Nanum Gothic"/>
-                <a:ea typeface="Nanum Gothic"/>
-                <a:cs typeface="Nanum Gothic"/>
-              </a:rPr>
-              <a:t>정상 문장을 함께 넣어 오탐까지 확인했습니다</a:t>
+                <a:latin typeface="NanumGothic"/>
+                <a:ea typeface="NanumGothic"/>
+                <a:cs typeface="NanumGothic"/>
+              </a:rPr>
+              <a:t>정확도만 보지 않고, 오탐과 실행 안정성까지 확인했습니다</a:t>
             </a:r>
           </a:p>
         </p:txBody>
       </p:sp>
       <p:cxnSp>
         <p:nvCxnSpPr>
-          <p:cNvPr id="18" name="rule-10"/>
+          <p:cNvPr id="30" name="rule-10"/>
           <p:cNvCxnSpPr/>
           <p:nvPr/>
         </p:nvCxnSpPr>
@@ -2526,13 +2581,14 @@
           <a:lstStyle xmlns:a="http://schemas.openxmlformats.org/drawingml/2006/main"/>
           <a:p xmlns:a="http://schemas.openxmlformats.org/drawingml/2006/main">
             <a:pPr algn="r">
+              <a:buNone/>
               <a:defRPr sz="975" b="0">
                 <a:solidFill>
                   <a:srgbClr val="58636F"/>
                 </a:solidFill>
-                <a:latin typeface="Nanum Gothic"/>
-                <a:ea typeface="Nanum Gothic"/>
-                <a:cs typeface="Nanum Gothic"/>
+                <a:latin typeface="NanumGothic"/>
+                <a:ea typeface="NanumGothic"/>
+                <a:cs typeface="NanumGothic"/>
               </a:defRPr>
             </a:pPr>
             <a:r>
@@ -2540,9 +2596,9 @@
                 <a:solidFill>
                   <a:srgbClr val="58636F"/>
                 </a:solidFill>
-                <a:latin typeface="Nanum Gothic"/>
-                <a:ea typeface="Nanum Gothic"/>
-                <a:cs typeface="Nanum Gothic"/>
+                <a:latin typeface="NanumGothic"/>
+                <a:ea typeface="NanumGothic"/>
+                <a:cs typeface="NanumGothic"/>
               </a:rPr>
               <a:t>10</a:t>
             </a:r>
@@ -2582,13 +2638,14 @@
           <a:lstStyle xmlns:a="http://schemas.openxmlformats.org/drawingml/2006/main"/>
           <a:p xmlns:a="http://schemas.openxmlformats.org/drawingml/2006/main">
             <a:pPr algn="l">
+              <a:buNone/>
               <a:defRPr sz="1800" b="0">
                 <a:solidFill>
                   <a:srgbClr val="58636F"/>
                 </a:solidFill>
-                <a:latin typeface="Nanum Gothic"/>
-                <a:ea typeface="Nanum Gothic"/>
-                <a:cs typeface="Nanum Gothic"/>
+                <a:latin typeface="NanumGothic"/>
+                <a:ea typeface="NanumGothic"/>
+                <a:cs typeface="NanumGothic"/>
               </a:defRPr>
             </a:pPr>
             <a:r>
@@ -2596,11 +2653,11 @@
                 <a:solidFill>
                   <a:srgbClr val="58636F"/>
                 </a:solidFill>
-                <a:latin typeface="Nanum Gothic"/>
-                <a:ea typeface="Nanum Gothic"/>
-                <a:cs typeface="Nanum Gothic"/>
-              </a:rPr>
-              <a:t>위험 문장만 맞히는 데 그치지 않고, 위험하지 않은 문장을 잘못 경고하지 않는지도 같은 평가표에서 측정했습니다.</a:t>
+                <a:latin typeface="NanumGothic"/>
+                <a:ea typeface="NanumGothic"/>
+                <a:cs typeface="NanumGothic"/>
+              </a:rPr>
+              <a:t>위험 문장과 정상 문장을 같은 평가표에 넣고, 자동 테스트·정적 검사·프로덕션 빌드까지 반복 검증했습니다.</a:t>
             </a:r>
           </a:p>
         </p:txBody>
@@ -2635,6 +2692,11 @@
             <a:prstDash val="solid"/>
           </a:ln>
         </p:spPr>
+        <p:txBody>
+          <a:bodyPr xmlns:a="http://schemas.openxmlformats.org/drawingml/2006/main"/>
+          <a:lstStyle xmlns:a="http://schemas.openxmlformats.org/drawingml/2006/main"/>
+          <a:p xmlns:a="http://schemas.openxmlformats.org/drawingml/2006/main"/>
+        </p:txBody>
       </p:sp>
       <p:sp>
         <p:nvSpPr>
@@ -2669,13 +2731,14 @@
           <a:lstStyle xmlns:a="http://schemas.openxmlformats.org/drawingml/2006/main"/>
           <a:p xmlns:a="http://schemas.openxmlformats.org/drawingml/2006/main">
             <a:pPr algn="l">
+              <a:buNone/>
               <a:defRPr sz="4950" b="1">
                 <a:solidFill>
                   <a:srgbClr val="1B4A73"/>
                 </a:solidFill>
-                <a:latin typeface="Nanum Gothic"/>
-                <a:ea typeface="Nanum Gothic"/>
-                <a:cs typeface="Nanum Gothic"/>
+                <a:latin typeface="NanumGothic"/>
+                <a:ea typeface="NanumGothic"/>
+                <a:cs typeface="NanumGothic"/>
               </a:defRPr>
             </a:pPr>
             <a:r>
@@ -2683,9 +2746,9 @@
                 <a:solidFill>
                   <a:srgbClr val="1B4A73"/>
                 </a:solidFill>
-                <a:latin typeface="Nanum Gothic"/>
-                <a:ea typeface="Nanum Gothic"/>
-                <a:cs typeface="Nanum Gothic"/>
+                <a:latin typeface="NanumGothic"/>
+                <a:ea typeface="NanumGothic"/>
+                <a:cs typeface="NanumGothic"/>
               </a:rPr>
               <a:t>40</a:t>
             </a:r>
@@ -2725,13 +2788,14 @@
           <a:lstStyle xmlns:a="http://schemas.openxmlformats.org/drawingml/2006/main"/>
           <a:p xmlns:a="http://schemas.openxmlformats.org/drawingml/2006/main">
             <a:pPr algn="l">
+              <a:buNone/>
               <a:defRPr sz="1800" b="1">
                 <a:solidFill>
                   <a:srgbClr val="111820"/>
                 </a:solidFill>
-                <a:latin typeface="Nanum Gothic"/>
-                <a:ea typeface="Nanum Gothic"/>
-                <a:cs typeface="Nanum Gothic"/>
+                <a:latin typeface="NanumGothic"/>
+                <a:ea typeface="NanumGothic"/>
+                <a:cs typeface="NanumGothic"/>
               </a:defRPr>
             </a:pPr>
             <a:r>
@@ -2739,9 +2803,9 @@
                 <a:solidFill>
                   <a:srgbClr val="111820"/>
                 </a:solidFill>
-                <a:latin typeface="Nanum Gothic"/>
-                <a:ea typeface="Nanum Gothic"/>
-                <a:cs typeface="Nanum Gothic"/>
+                <a:latin typeface="NanumGothic"/>
+                <a:ea typeface="NanumGothic"/>
+                <a:cs typeface="NanumGothic"/>
               </a:rPr>
               <a:t>내부 평가 문장</a:t>
             </a:r>
@@ -2778,6 +2842,11 @@
             <a:prstDash val="solid"/>
           </a:ln>
         </p:spPr>
+        <p:txBody>
+          <a:bodyPr xmlns:a="http://schemas.openxmlformats.org/drawingml/2006/main"/>
+          <a:lstStyle xmlns:a="http://schemas.openxmlformats.org/drawingml/2006/main"/>
+          <a:p xmlns:a="http://schemas.openxmlformats.org/drawingml/2006/main"/>
+        </p:txBody>
       </p:sp>
       <p:sp>
         <p:nvSpPr>
@@ -2812,13 +2881,14 @@
           <a:lstStyle xmlns:a="http://schemas.openxmlformats.org/drawingml/2006/main"/>
           <a:p xmlns:a="http://schemas.openxmlformats.org/drawingml/2006/main">
             <a:pPr algn="l">
+              <a:buNone/>
               <a:defRPr sz="4950" b="1">
                 <a:solidFill>
                   <a:srgbClr val="0B6B57"/>
                 </a:solidFill>
-                <a:latin typeface="Nanum Gothic"/>
-                <a:ea typeface="Nanum Gothic"/>
-                <a:cs typeface="Nanum Gothic"/>
+                <a:latin typeface="NanumGothic"/>
+                <a:ea typeface="NanumGothic"/>
+                <a:cs typeface="NanumGothic"/>
               </a:defRPr>
             </a:pPr>
             <a:r>
@@ -2826,9 +2896,9 @@
                 <a:solidFill>
                   <a:srgbClr val="0B6B57"/>
                 </a:solidFill>
-                <a:latin typeface="Nanum Gothic"/>
-                <a:ea typeface="Nanum Gothic"/>
-                <a:cs typeface="Nanum Gothic"/>
+                <a:latin typeface="NanumGothic"/>
+                <a:ea typeface="NanumGothic"/>
+                <a:cs typeface="NanumGothic"/>
               </a:rPr>
               <a:t>100%</a:t>
             </a:r>
@@ -2868,13 +2938,14 @@
           <a:lstStyle xmlns:a="http://schemas.openxmlformats.org/drawingml/2006/main"/>
           <a:p xmlns:a="http://schemas.openxmlformats.org/drawingml/2006/main">
             <a:pPr algn="l">
+              <a:buNone/>
               <a:defRPr sz="1800" b="1">
                 <a:solidFill>
                   <a:srgbClr val="111820"/>
                 </a:solidFill>
-                <a:latin typeface="Nanum Gothic"/>
-                <a:ea typeface="Nanum Gothic"/>
-                <a:cs typeface="Nanum Gothic"/>
+                <a:latin typeface="NanumGothic"/>
+                <a:ea typeface="NanumGothic"/>
+                <a:cs typeface="NanumGothic"/>
               </a:defRPr>
             </a:pPr>
             <a:r>
@@ -2882,9 +2953,9 @@
                 <a:solidFill>
                   <a:srgbClr val="111820"/>
                 </a:solidFill>
-                <a:latin typeface="Nanum Gothic"/>
-                <a:ea typeface="Nanum Gothic"/>
-                <a:cs typeface="Nanum Gothic"/>
+                <a:latin typeface="NanumGothic"/>
+                <a:ea typeface="NanumGothic"/>
+                <a:cs typeface="NanumGothic"/>
               </a:rPr>
               <a:t>위험 문장 탐지율</a:t>
             </a:r>
@@ -2921,6 +2992,11 @@
             <a:prstDash val="solid"/>
           </a:ln>
         </p:spPr>
+        <p:txBody>
+          <a:bodyPr xmlns:a="http://schemas.openxmlformats.org/drawingml/2006/main"/>
+          <a:lstStyle xmlns:a="http://schemas.openxmlformats.org/drawingml/2006/main"/>
+          <a:p xmlns:a="http://schemas.openxmlformats.org/drawingml/2006/main"/>
+        </p:txBody>
       </p:sp>
       <p:sp>
         <p:nvSpPr>
@@ -2955,13 +3031,14 @@
           <a:lstStyle xmlns:a="http://schemas.openxmlformats.org/drawingml/2006/main"/>
           <a:p xmlns:a="http://schemas.openxmlformats.org/drawingml/2006/main">
             <a:pPr algn="l">
+              <a:buNone/>
               <a:defRPr sz="4950" b="1">
                 <a:solidFill>
                   <a:srgbClr val="B53225"/>
                 </a:solidFill>
-                <a:latin typeface="Nanum Gothic"/>
-                <a:ea typeface="Nanum Gothic"/>
-                <a:cs typeface="Nanum Gothic"/>
+                <a:latin typeface="NanumGothic"/>
+                <a:ea typeface="NanumGothic"/>
+                <a:cs typeface="NanumGothic"/>
               </a:defRPr>
             </a:pPr>
             <a:r>
@@ -2969,9 +3046,9 @@
                 <a:solidFill>
                   <a:srgbClr val="B53225"/>
                 </a:solidFill>
-                <a:latin typeface="Nanum Gothic"/>
-                <a:ea typeface="Nanum Gothic"/>
-                <a:cs typeface="Nanum Gothic"/>
+                <a:latin typeface="NanumGothic"/>
+                <a:ea typeface="NanumGothic"/>
+                <a:cs typeface="NanumGothic"/>
               </a:rPr>
               <a:t>0%</a:t>
             </a:r>
@@ -3011,13 +3088,14 @@
           <a:lstStyle xmlns:a="http://schemas.openxmlformats.org/drawingml/2006/main"/>
           <a:p xmlns:a="http://schemas.openxmlformats.org/drawingml/2006/main">
             <a:pPr algn="l">
+              <a:buNone/>
               <a:defRPr sz="1800" b="1">
                 <a:solidFill>
                   <a:srgbClr val="111820"/>
                 </a:solidFill>
-                <a:latin typeface="Nanum Gothic"/>
-                <a:ea typeface="Nanum Gothic"/>
-                <a:cs typeface="Nanum Gothic"/>
+                <a:latin typeface="NanumGothic"/>
+                <a:ea typeface="NanumGothic"/>
+                <a:cs typeface="NanumGothic"/>
               </a:defRPr>
             </a:pPr>
             <a:r>
@@ -3025,9 +3103,9 @@
                 <a:solidFill>
                   <a:srgbClr val="111820"/>
                 </a:solidFill>
-                <a:latin typeface="Nanum Gothic"/>
-                <a:ea typeface="Nanum Gothic"/>
-                <a:cs typeface="Nanum Gothic"/>
+                <a:latin typeface="NanumGothic"/>
+                <a:ea typeface="NanumGothic"/>
+                <a:cs typeface="NanumGothic"/>
               </a:rPr>
               <a:t>정상 문장 오탐률</a:t>
             </a:r>
@@ -3067,13 +3145,14 @@
           <a:lstStyle xmlns:a="http://schemas.openxmlformats.org/drawingml/2006/main"/>
           <a:p xmlns:a="http://schemas.openxmlformats.org/drawingml/2006/main">
             <a:pPr algn="ctr">
+              <a:buNone/>
               <a:defRPr sz="1650" b="1">
                 <a:solidFill>
                   <a:srgbClr val="111820"/>
                 </a:solidFill>
-                <a:latin typeface="Nanum Gothic"/>
-                <a:ea typeface="Nanum Gothic"/>
-                <a:cs typeface="Nanum Gothic"/>
+                <a:latin typeface="NanumGothic"/>
+                <a:ea typeface="NanumGothic"/>
+                <a:cs typeface="NanumGothic"/>
               </a:defRPr>
             </a:pPr>
             <a:r>
@@ -3081,11 +3160,11 @@
                 <a:solidFill>
                   <a:srgbClr val="111820"/>
                 </a:solidFill>
-                <a:latin typeface="Nanum Gothic"/>
-                <a:ea typeface="Nanum Gothic"/>
-                <a:cs typeface="Nanum Gothic"/>
-              </a:rPr>
-              <a:t>자동 테스트 21개 통과  ·  TypeScript 검사 통과  ·  정식 빌드 통과  ·  높은 등급 취약점 0개</a:t>
+                <a:latin typeface="NanumGothic"/>
+                <a:ea typeface="NanumGothic"/>
+                <a:cs typeface="NanumGothic"/>
+              </a:rPr>
+              <a:t>자동 테스트 22개 통과  ·  TypeScript 검사 통과  ·  정식 빌드 통과  ·  높은 등급 취약점 0개</a:t>
             </a:r>
           </a:p>
         </p:txBody>
@@ -3145,13 +3224,14 @@
           <a:lstStyle xmlns:a="http://schemas.openxmlformats.org/drawingml/2006/main"/>
           <a:p xmlns:a="http://schemas.openxmlformats.org/drawingml/2006/main">
             <a:pPr algn="l">
+              <a:buNone/>
               <a:defRPr sz="1125" b="1">
                 <a:solidFill>
                   <a:srgbClr val="0B6B57"/>
                 </a:solidFill>
-                <a:latin typeface="Nanum Gothic"/>
-                <a:ea typeface="Nanum Gothic"/>
-                <a:cs typeface="Nanum Gothic"/>
+                <a:latin typeface="NanumGothic"/>
+                <a:ea typeface="NanumGothic"/>
+                <a:cs typeface="NanumGothic"/>
               </a:defRPr>
             </a:pPr>
             <a:r>
@@ -3159,9 +3239,9 @@
                 <a:solidFill>
                   <a:srgbClr val="0B6B57"/>
                 </a:solidFill>
-                <a:latin typeface="Nanum Gothic"/>
-                <a:ea typeface="Nanum Gothic"/>
-                <a:cs typeface="Nanum Gothic"/>
+                <a:latin typeface="NanumGothic"/>
+                <a:ea typeface="NanumGothic"/>
+                <a:cs typeface="NanumGothic"/>
               </a:rPr>
               <a:t>개발 계획의 구체성과 실현 가능성</a:t>
             </a:r>
@@ -3201,13 +3281,14 @@
           <a:lstStyle xmlns:a="http://schemas.openxmlformats.org/drawingml/2006/main"/>
           <a:p xmlns:a="http://schemas.openxmlformats.org/drawingml/2006/main">
             <a:pPr algn="l">
+              <a:buNone/>
               <a:defRPr sz="3525" b="1">
                 <a:solidFill>
                   <a:srgbClr val="111820"/>
                 </a:solidFill>
-                <a:latin typeface="Nanum Gothic"/>
-                <a:ea typeface="Nanum Gothic"/>
-                <a:cs typeface="Nanum Gothic"/>
+                <a:latin typeface="NanumGothic"/>
+                <a:ea typeface="NanumGothic"/>
+                <a:cs typeface="NanumGothic"/>
               </a:defRPr>
             </a:pPr>
             <a:r>
@@ -3215,9 +3296,9 @@
                 <a:solidFill>
                   <a:srgbClr val="111820"/>
                 </a:solidFill>
-                <a:latin typeface="Nanum Gothic"/>
-                <a:ea typeface="Nanum Gothic"/>
-                <a:cs typeface="Nanum Gothic"/>
+                <a:latin typeface="NanumGothic"/>
+                <a:ea typeface="NanumGothic"/>
+                <a:cs typeface="NanumGothic"/>
               </a:rPr>
               <a:t>설계부터 배포까지 일반 개발 절차로 완성했습니다</a:t>
             </a:r>
@@ -3226,7 +3307,7 @@
       </p:sp>
       <p:cxnSp>
         <p:nvCxnSpPr>
-          <p:cNvPr id="30" name="rule-11"/>
+          <p:cNvPr id="50" name="rule-11"/>
           <p:cNvCxnSpPr/>
           <p:nvPr/>
         </p:nvCxnSpPr>
@@ -3279,13 +3360,14 @@
           <a:lstStyle xmlns:a="http://schemas.openxmlformats.org/drawingml/2006/main"/>
           <a:p xmlns:a="http://schemas.openxmlformats.org/drawingml/2006/main">
             <a:pPr algn="r">
+              <a:buNone/>
               <a:defRPr sz="975" b="0">
                 <a:solidFill>
                   <a:srgbClr val="58636F"/>
                 </a:solidFill>
-                <a:latin typeface="Nanum Gothic"/>
-                <a:ea typeface="Nanum Gothic"/>
-                <a:cs typeface="Nanum Gothic"/>
+                <a:latin typeface="NanumGothic"/>
+                <a:ea typeface="NanumGothic"/>
+                <a:cs typeface="NanumGothic"/>
               </a:defRPr>
             </a:pPr>
             <a:r>
@@ -3293,9 +3375,9 @@
                 <a:solidFill>
                   <a:srgbClr val="58636F"/>
                 </a:solidFill>
-                <a:latin typeface="Nanum Gothic"/>
-                <a:ea typeface="Nanum Gothic"/>
-                <a:cs typeface="Nanum Gothic"/>
+                <a:latin typeface="NanumGothic"/>
+                <a:ea typeface="NanumGothic"/>
+                <a:cs typeface="NanumGothic"/>
               </a:rPr>
               <a:t>11</a:t>
             </a:r>
@@ -3304,7 +3386,7 @@
       </p:sp>
       <p:cxnSp>
         <p:nvCxnSpPr>
-          <p:cNvPr id="32" name="roadmap-line"/>
+          <p:cNvPr id="52" name="roadmap-line"/>
           <p:cNvCxnSpPr/>
           <p:nvPr/>
         </p:nvCxnSpPr>
@@ -3354,6 +3436,11 @@
             <a:prstDash val="solid"/>
           </a:ln>
         </p:spPr>
+        <p:txBody>
+          <a:bodyPr xmlns:a="http://schemas.openxmlformats.org/drawingml/2006/main"/>
+          <a:lstStyle xmlns:a="http://schemas.openxmlformats.org/drawingml/2006/main"/>
+          <a:p xmlns:a="http://schemas.openxmlformats.org/drawingml/2006/main"/>
+        </p:txBody>
       </p:sp>
       <p:sp>
         <p:nvSpPr>
@@ -3388,13 +3475,14 @@
           <a:lstStyle xmlns:a="http://schemas.openxmlformats.org/drawingml/2006/main"/>
           <a:p xmlns:a="http://schemas.openxmlformats.org/drawingml/2006/main">
             <a:pPr algn="l">
+              <a:buNone/>
               <a:defRPr sz="3150" b="1">
                 <a:solidFill>
                   <a:srgbClr val="1B4A73"/>
                 </a:solidFill>
-                <a:latin typeface="Nanum Gothic"/>
-                <a:ea typeface="Nanum Gothic"/>
-                <a:cs typeface="Nanum Gothic"/>
+                <a:latin typeface="NanumGothic"/>
+                <a:ea typeface="NanumGothic"/>
+                <a:cs typeface="NanumGothic"/>
               </a:defRPr>
             </a:pPr>
             <a:r>
@@ -3402,9 +3490,9 @@
                 <a:solidFill>
                   <a:srgbClr val="1B4A73"/>
                 </a:solidFill>
-                <a:latin typeface="Nanum Gothic"/>
-                <a:ea typeface="Nanum Gothic"/>
-                <a:cs typeface="Nanum Gothic"/>
+                <a:latin typeface="NanumGothic"/>
+                <a:ea typeface="NanumGothic"/>
+                <a:cs typeface="NanumGothic"/>
               </a:rPr>
               <a:t>01</a:t>
             </a:r>
@@ -3444,13 +3532,14 @@
           <a:lstStyle xmlns:a="http://schemas.openxmlformats.org/drawingml/2006/main"/>
           <a:p xmlns:a="http://schemas.openxmlformats.org/drawingml/2006/main">
             <a:pPr algn="l">
+              <a:buNone/>
               <a:defRPr sz="1725" b="1">
                 <a:solidFill>
                   <a:srgbClr val="111820"/>
                 </a:solidFill>
-                <a:latin typeface="Nanum Gothic"/>
-                <a:ea typeface="Nanum Gothic"/>
-                <a:cs typeface="Nanum Gothic"/>
+                <a:latin typeface="NanumGothic"/>
+                <a:ea typeface="NanumGothic"/>
+                <a:cs typeface="NanumGothic"/>
               </a:defRPr>
             </a:pPr>
             <a:r>
@@ -3458,9 +3547,9 @@
                 <a:solidFill>
                   <a:srgbClr val="111820"/>
                 </a:solidFill>
-                <a:latin typeface="Nanum Gothic"/>
-                <a:ea typeface="Nanum Gothic"/>
-                <a:cs typeface="Nanum Gothic"/>
+                <a:latin typeface="NanumGothic"/>
+                <a:ea typeface="NanumGothic"/>
+                <a:cs typeface="NanumGothic"/>
               </a:rPr>
               <a:t>문제·UX 설계</a:t>
             </a:r>
@@ -3500,13 +3589,14 @@
           <a:lstStyle xmlns:a="http://schemas.openxmlformats.org/drawingml/2006/main"/>
           <a:p xmlns:a="http://schemas.openxmlformats.org/drawingml/2006/main">
             <a:pPr algn="l">
+              <a:buNone/>
               <a:defRPr sz="1500" b="0">
                 <a:solidFill>
                   <a:srgbClr val="58636F"/>
                 </a:solidFill>
-                <a:latin typeface="Nanum Gothic"/>
-                <a:ea typeface="Nanum Gothic"/>
-                <a:cs typeface="Nanum Gothic"/>
+                <a:latin typeface="NanumGothic"/>
+                <a:ea typeface="NanumGothic"/>
+                <a:cs typeface="NanumGothic"/>
               </a:defRPr>
             </a:pPr>
             <a:r>
@@ -3514,22 +3604,23 @@
                 <a:solidFill>
                   <a:srgbClr val="58636F"/>
                 </a:solidFill>
-                <a:latin typeface="Nanum Gothic"/>
-                <a:ea typeface="Nanum Gothic"/>
-                <a:cs typeface="Nanum Gothic"/>
+                <a:latin typeface="NanumGothic"/>
+                <a:ea typeface="NanumGothic"/>
+                <a:cs typeface="NanumGothic"/>
               </a:rPr>
               <a:t>시나리오·명세</a:t>
             </a:r>
           </a:p>
           <a:p xmlns:a="http://schemas.openxmlformats.org/drawingml/2006/main">
             <a:pPr algn="l">
+              <a:buNone/>
               <a:defRPr sz="1500" b="0">
                 <a:solidFill>
                   <a:srgbClr val="58636F"/>
                 </a:solidFill>
-                <a:latin typeface="Nanum Gothic"/>
-                <a:ea typeface="Nanum Gothic"/>
-                <a:cs typeface="Nanum Gothic"/>
+                <a:latin typeface="NanumGothic"/>
+                <a:ea typeface="NanumGothic"/>
+                <a:cs typeface="NanumGothic"/>
               </a:defRPr>
             </a:pPr>
             <a:r>
@@ -3537,9 +3628,9 @@
                 <a:solidFill>
                   <a:srgbClr val="58636F"/>
                 </a:solidFill>
-                <a:latin typeface="Nanum Gothic"/>
-                <a:ea typeface="Nanum Gothic"/>
-                <a:cs typeface="Nanum Gothic"/>
+                <a:latin typeface="NanumGothic"/>
+                <a:ea typeface="NanumGothic"/>
+                <a:cs typeface="NanumGothic"/>
               </a:rPr>
               <a:t>API·ERD</a:t>
             </a:r>
@@ -3576,6 +3667,11 @@
             <a:prstDash val="solid"/>
           </a:ln>
         </p:spPr>
+        <p:txBody>
+          <a:bodyPr xmlns:a="http://schemas.openxmlformats.org/drawingml/2006/main"/>
+          <a:lstStyle xmlns:a="http://schemas.openxmlformats.org/drawingml/2006/main"/>
+          <a:p xmlns:a="http://schemas.openxmlformats.org/drawingml/2006/main"/>
+        </p:txBody>
       </p:sp>
       <p:sp>
         <p:nvSpPr>
@@ -3610,13 +3706,14 @@
           <a:lstStyle xmlns:a="http://schemas.openxmlformats.org/drawingml/2006/main"/>
           <a:p xmlns:a="http://schemas.openxmlformats.org/drawingml/2006/main">
             <a:pPr algn="l">
+              <a:buNone/>
               <a:defRPr sz="3150" b="1">
                 <a:solidFill>
                   <a:srgbClr val="1B4A73"/>
                 </a:solidFill>
-                <a:latin typeface="Nanum Gothic"/>
-                <a:ea typeface="Nanum Gothic"/>
-                <a:cs typeface="Nanum Gothic"/>
+                <a:latin typeface="NanumGothic"/>
+                <a:ea typeface="NanumGothic"/>
+                <a:cs typeface="NanumGothic"/>
               </a:defRPr>
             </a:pPr>
             <a:r>
@@ -3624,9 +3721,9 @@
                 <a:solidFill>
                   <a:srgbClr val="1B4A73"/>
                 </a:solidFill>
-                <a:latin typeface="Nanum Gothic"/>
-                <a:ea typeface="Nanum Gothic"/>
-                <a:cs typeface="Nanum Gothic"/>
+                <a:latin typeface="NanumGothic"/>
+                <a:ea typeface="NanumGothic"/>
+                <a:cs typeface="NanumGothic"/>
               </a:rPr>
               <a:t>02</a:t>
             </a:r>
@@ -3666,13 +3763,14 @@
           <a:lstStyle xmlns:a="http://schemas.openxmlformats.org/drawingml/2006/main"/>
           <a:p xmlns:a="http://schemas.openxmlformats.org/drawingml/2006/main">
             <a:pPr algn="l">
+              <a:buNone/>
               <a:defRPr sz="1725" b="1">
                 <a:solidFill>
                   <a:srgbClr val="111820"/>
                 </a:solidFill>
-                <a:latin typeface="Nanum Gothic"/>
-                <a:ea typeface="Nanum Gothic"/>
-                <a:cs typeface="Nanum Gothic"/>
+                <a:latin typeface="NanumGothic"/>
+                <a:ea typeface="NanumGothic"/>
+                <a:cs typeface="NanumGothic"/>
               </a:defRPr>
             </a:pPr>
             <a:r>
@@ -3680,9 +3778,9 @@
                 <a:solidFill>
                   <a:srgbClr val="111820"/>
                 </a:solidFill>
-                <a:latin typeface="Nanum Gothic"/>
-                <a:ea typeface="Nanum Gothic"/>
-                <a:cs typeface="Nanum Gothic"/>
+                <a:latin typeface="NanumGothic"/>
+                <a:ea typeface="NanumGothic"/>
+                <a:cs typeface="NanumGothic"/>
               </a:rPr>
               <a:t>공식 데이터</a:t>
             </a:r>
@@ -3722,13 +3820,14 @@
           <a:lstStyle xmlns:a="http://schemas.openxmlformats.org/drawingml/2006/main"/>
           <a:p xmlns:a="http://schemas.openxmlformats.org/drawingml/2006/main">
             <a:pPr algn="l">
+              <a:buNone/>
               <a:defRPr sz="1500" b="0">
                 <a:solidFill>
                   <a:srgbClr val="58636F"/>
                 </a:solidFill>
-                <a:latin typeface="Nanum Gothic"/>
-                <a:ea typeface="Nanum Gothic"/>
-                <a:cs typeface="Nanum Gothic"/>
+                <a:latin typeface="NanumGothic"/>
+                <a:ea typeface="NanumGothic"/>
+                <a:cs typeface="NanumGothic"/>
               </a:defRPr>
             </a:pPr>
             <a:r>
@@ -3736,22 +3835,23 @@
                 <a:solidFill>
                   <a:srgbClr val="58636F"/>
                 </a:solidFill>
-                <a:latin typeface="Nanum Gothic"/>
-                <a:ea typeface="Nanum Gothic"/>
-                <a:cs typeface="Nanum Gothic"/>
+                <a:latin typeface="NanumGothic"/>
+                <a:ea typeface="NanumGothic"/>
+                <a:cs typeface="NanumGothic"/>
               </a:rPr>
               <a:t>수집·정제</a:t>
             </a:r>
           </a:p>
           <a:p xmlns:a="http://schemas.openxmlformats.org/drawingml/2006/main">
             <a:pPr algn="l">
+              <a:buNone/>
               <a:defRPr sz="1500" b="0">
                 <a:solidFill>
                   <a:srgbClr val="58636F"/>
                 </a:solidFill>
-                <a:latin typeface="Nanum Gothic"/>
-                <a:ea typeface="Nanum Gothic"/>
-                <a:cs typeface="Nanum Gothic"/>
+                <a:latin typeface="NanumGothic"/>
+                <a:ea typeface="NanumGothic"/>
+                <a:cs typeface="NanumGothic"/>
               </a:defRPr>
             </a:pPr>
             <a:r>
@@ -3759,9 +3859,9 @@
                 <a:solidFill>
                   <a:srgbClr val="58636F"/>
                 </a:solidFill>
-                <a:latin typeface="Nanum Gothic"/>
-                <a:ea typeface="Nanum Gothic"/>
-                <a:cs typeface="Nanum Gothic"/>
+                <a:latin typeface="NanumGothic"/>
+                <a:ea typeface="NanumGothic"/>
+                <a:cs typeface="NanumGothic"/>
               </a:rPr>
               <a:t>출처 레지스트리</a:t>
             </a:r>
@@ -3798,6 +3898,11 @@
             <a:prstDash val="solid"/>
           </a:ln>
         </p:spPr>
+        <p:txBody>
+          <a:bodyPr xmlns:a="http://schemas.openxmlformats.org/drawingml/2006/main"/>
+          <a:lstStyle xmlns:a="http://schemas.openxmlformats.org/drawingml/2006/main"/>
+          <a:p xmlns:a="http://schemas.openxmlformats.org/drawingml/2006/main"/>
+        </p:txBody>
       </p:sp>
       <p:sp>
         <p:nvSpPr>
@@ -3832,13 +3937,14 @@
           <a:lstStyle xmlns:a="http://schemas.openxmlformats.org/drawingml/2006/main"/>
           <a:p xmlns:a="http://schemas.openxmlformats.org/drawingml/2006/main">
             <a:pPr algn="l">
+              <a:buNone/>
               <a:defRPr sz="3150" b="1">
                 <a:solidFill>
                   <a:srgbClr val="1B4A73"/>
                 </a:solidFill>
-                <a:latin typeface="Nanum Gothic"/>
-                <a:ea typeface="Nanum Gothic"/>
-                <a:cs typeface="Nanum Gothic"/>
+                <a:latin typeface="NanumGothic"/>
+                <a:ea typeface="NanumGothic"/>
+                <a:cs typeface="NanumGothic"/>
               </a:defRPr>
             </a:pPr>
             <a:r>
@@ -3846,9 +3952,9 @@
                 <a:solidFill>
                   <a:srgbClr val="1B4A73"/>
                 </a:solidFill>
-                <a:latin typeface="Nanum Gothic"/>
-                <a:ea typeface="Nanum Gothic"/>
-                <a:cs typeface="Nanum Gothic"/>
+                <a:latin typeface="NanumGothic"/>
+                <a:ea typeface="NanumGothic"/>
+                <a:cs typeface="NanumGothic"/>
               </a:rPr>
               <a:t>03</a:t>
             </a:r>
@@ -3888,13 +3994,14 @@
           <a:lstStyle xmlns:a="http://schemas.openxmlformats.org/drawingml/2006/main"/>
           <a:p xmlns:a="http://schemas.openxmlformats.org/drawingml/2006/main">
             <a:pPr algn="l">
+              <a:buNone/>
               <a:defRPr sz="1725" b="1">
                 <a:solidFill>
                   <a:srgbClr val="111820"/>
                 </a:solidFill>
-                <a:latin typeface="Nanum Gothic"/>
-                <a:ea typeface="Nanum Gothic"/>
-                <a:cs typeface="Nanum Gothic"/>
+                <a:latin typeface="NanumGothic"/>
+                <a:ea typeface="NanumGothic"/>
+                <a:cs typeface="NanumGothic"/>
               </a:defRPr>
             </a:pPr>
             <a:r>
@@ -3902,9 +4009,9 @@
                 <a:solidFill>
                   <a:srgbClr val="111820"/>
                 </a:solidFill>
-                <a:latin typeface="Nanum Gothic"/>
-                <a:ea typeface="Nanum Gothic"/>
-                <a:cs typeface="Nanum Gothic"/>
+                <a:latin typeface="NanumGothic"/>
+                <a:ea typeface="NanumGothic"/>
+                <a:cs typeface="NanumGothic"/>
               </a:rPr>
               <a:t>핵심 엔진</a:t>
             </a:r>
@@ -3944,13 +4051,14 @@
           <a:lstStyle xmlns:a="http://schemas.openxmlformats.org/drawingml/2006/main"/>
           <a:p xmlns:a="http://schemas.openxmlformats.org/drawingml/2006/main">
             <a:pPr algn="l">
+              <a:buNone/>
               <a:defRPr sz="1500" b="0">
                 <a:solidFill>
                   <a:srgbClr val="58636F"/>
                 </a:solidFill>
-                <a:latin typeface="Nanum Gothic"/>
-                <a:ea typeface="Nanum Gothic"/>
-                <a:cs typeface="Nanum Gothic"/>
+                <a:latin typeface="NanumGothic"/>
+                <a:ea typeface="NanumGothic"/>
+                <a:cs typeface="NanumGothic"/>
               </a:defRPr>
             </a:pPr>
             <a:r>
@@ -3958,22 +4066,23 @@
                 <a:solidFill>
                   <a:srgbClr val="58636F"/>
                 </a:solidFill>
-                <a:latin typeface="Nanum Gothic"/>
-                <a:ea typeface="Nanum Gothic"/>
-                <a:cs typeface="Nanum Gothic"/>
+                <a:latin typeface="NanumGothic"/>
+                <a:ea typeface="NanumGothic"/>
+                <a:cs typeface="NanumGothic"/>
               </a:rPr>
               <a:t>위험 탐지</a:t>
             </a:r>
           </a:p>
           <a:p xmlns:a="http://schemas.openxmlformats.org/drawingml/2006/main">
             <a:pPr algn="l">
+              <a:buNone/>
               <a:defRPr sz="1500" b="0">
                 <a:solidFill>
                   <a:srgbClr val="58636F"/>
                 </a:solidFill>
-                <a:latin typeface="Nanum Gothic"/>
-                <a:ea typeface="Nanum Gothic"/>
-                <a:cs typeface="Nanum Gothic"/>
+                <a:latin typeface="NanumGothic"/>
+                <a:ea typeface="NanumGothic"/>
+                <a:cs typeface="NanumGothic"/>
               </a:defRPr>
             </a:pPr>
             <a:r>
@@ -3981,9 +4090,9 @@
                 <a:solidFill>
                   <a:srgbClr val="58636F"/>
                 </a:solidFill>
-                <a:latin typeface="Nanum Gothic"/>
-                <a:ea typeface="Nanum Gothic"/>
-                <a:cs typeface="Nanum Gothic"/>
+                <a:latin typeface="NanumGothic"/>
+                <a:ea typeface="NanumGothic"/>
+                <a:cs typeface="NanumGothic"/>
               </a:rPr>
               <a:t>사고 대응</a:t>
             </a:r>
@@ -4020,6 +4129,11 @@
             <a:prstDash val="solid"/>
           </a:ln>
         </p:spPr>
+        <p:txBody>
+          <a:bodyPr xmlns:a="http://schemas.openxmlformats.org/drawingml/2006/main"/>
+          <a:lstStyle xmlns:a="http://schemas.openxmlformats.org/drawingml/2006/main"/>
+          <a:p xmlns:a="http://schemas.openxmlformats.org/drawingml/2006/main"/>
+        </p:txBody>
       </p:sp>
       <p:sp>
         <p:nvSpPr>
@@ -4054,13 +4168,14 @@
           <a:lstStyle xmlns:a="http://schemas.openxmlformats.org/drawingml/2006/main"/>
           <a:p xmlns:a="http://schemas.openxmlformats.org/drawingml/2006/main">
             <a:pPr algn="l">
+              <a:buNone/>
               <a:defRPr sz="3150" b="1">
                 <a:solidFill>
                   <a:srgbClr val="1B4A73"/>
                 </a:solidFill>
-                <a:latin typeface="Nanum Gothic"/>
-                <a:ea typeface="Nanum Gothic"/>
-                <a:cs typeface="Nanum Gothic"/>
+                <a:latin typeface="NanumGothic"/>
+                <a:ea typeface="NanumGothic"/>
+                <a:cs typeface="NanumGothic"/>
               </a:defRPr>
             </a:pPr>
             <a:r>
@@ -4068,9 +4183,9 @@
                 <a:solidFill>
                   <a:srgbClr val="1B4A73"/>
                 </a:solidFill>
-                <a:latin typeface="Nanum Gothic"/>
-                <a:ea typeface="Nanum Gothic"/>
-                <a:cs typeface="Nanum Gothic"/>
+                <a:latin typeface="NanumGothic"/>
+                <a:ea typeface="NanumGothic"/>
+                <a:cs typeface="NanumGothic"/>
               </a:rPr>
               <a:t>04</a:t>
             </a:r>
@@ -4110,13 +4225,14 @@
           <a:lstStyle xmlns:a="http://schemas.openxmlformats.org/drawingml/2006/main"/>
           <a:p xmlns:a="http://schemas.openxmlformats.org/drawingml/2006/main">
             <a:pPr algn="l">
+              <a:buNone/>
               <a:defRPr sz="1725" b="1">
                 <a:solidFill>
                   <a:srgbClr val="111820"/>
                 </a:solidFill>
-                <a:latin typeface="Nanum Gothic"/>
-                <a:ea typeface="Nanum Gothic"/>
-                <a:cs typeface="Nanum Gothic"/>
+                <a:latin typeface="NanumGothic"/>
+                <a:ea typeface="NanumGothic"/>
+                <a:cs typeface="NanumGothic"/>
               </a:defRPr>
             </a:pPr>
             <a:r>
@@ -4124,9 +4240,9 @@
                 <a:solidFill>
                   <a:srgbClr val="111820"/>
                 </a:solidFill>
-                <a:latin typeface="Nanum Gothic"/>
-                <a:ea typeface="Nanum Gothic"/>
-                <a:cs typeface="Nanum Gothic"/>
+                <a:latin typeface="NanumGothic"/>
+                <a:ea typeface="NanumGothic"/>
+                <a:cs typeface="NanumGothic"/>
               </a:rPr>
               <a:t>고령층 UX</a:t>
             </a:r>
@@ -4166,13 +4282,14 @@
           <a:lstStyle xmlns:a="http://schemas.openxmlformats.org/drawingml/2006/main"/>
           <a:p xmlns:a="http://schemas.openxmlformats.org/drawingml/2006/main">
             <a:pPr algn="l">
+              <a:buNone/>
               <a:defRPr sz="1500" b="0">
                 <a:solidFill>
                   <a:srgbClr val="58636F"/>
                 </a:solidFill>
-                <a:latin typeface="Nanum Gothic"/>
-                <a:ea typeface="Nanum Gothic"/>
-                <a:cs typeface="Nanum Gothic"/>
+                <a:latin typeface="NanumGothic"/>
+                <a:ea typeface="NanumGothic"/>
+                <a:cs typeface="NanumGothic"/>
               </a:defRPr>
             </a:pPr>
             <a:r>
@@ -4180,22 +4297,23 @@
                 <a:solidFill>
                   <a:srgbClr val="58636F"/>
                 </a:solidFill>
-                <a:latin typeface="Nanum Gothic"/>
-                <a:ea typeface="Nanum Gothic"/>
-                <a:cs typeface="Nanum Gothic"/>
+                <a:latin typeface="NanumGothic"/>
+                <a:ea typeface="NanumGothic"/>
+                <a:cs typeface="NanumGothic"/>
               </a:rPr>
               <a:t>접근성·보호자</a:t>
             </a:r>
           </a:p>
           <a:p xmlns:a="http://schemas.openxmlformats.org/drawingml/2006/main">
             <a:pPr algn="l">
+              <a:buNone/>
               <a:defRPr sz="1500" b="0">
                 <a:solidFill>
                   <a:srgbClr val="58636F"/>
                 </a:solidFill>
-                <a:latin typeface="Nanum Gothic"/>
-                <a:ea typeface="Nanum Gothic"/>
-                <a:cs typeface="Nanum Gothic"/>
+                <a:latin typeface="NanumGothic"/>
+                <a:ea typeface="NanumGothic"/>
+                <a:cs typeface="NanumGothic"/>
               </a:defRPr>
             </a:pPr>
             <a:r>
@@ -4203,9 +4321,9 @@
                 <a:solidFill>
                   <a:srgbClr val="58636F"/>
                 </a:solidFill>
-                <a:latin typeface="Nanum Gothic"/>
-                <a:ea typeface="Nanum Gothic"/>
-                <a:cs typeface="Nanum Gothic"/>
+                <a:latin typeface="NanumGothic"/>
+                <a:ea typeface="NanumGothic"/>
+                <a:cs typeface="NanumGothic"/>
               </a:rPr>
               <a:t>개인정보</a:t>
             </a:r>
@@ -4242,6 +4360,11 @@
             <a:prstDash val="solid"/>
           </a:ln>
         </p:spPr>
+        <p:txBody>
+          <a:bodyPr xmlns:a="http://schemas.openxmlformats.org/drawingml/2006/main"/>
+          <a:lstStyle xmlns:a="http://schemas.openxmlformats.org/drawingml/2006/main"/>
+          <a:p xmlns:a="http://schemas.openxmlformats.org/drawingml/2006/main"/>
+        </p:txBody>
       </p:sp>
       <p:sp>
         <p:nvSpPr>
@@ -4276,13 +4399,14 @@
           <a:lstStyle xmlns:a="http://schemas.openxmlformats.org/drawingml/2006/main"/>
           <a:p xmlns:a="http://schemas.openxmlformats.org/drawingml/2006/main">
             <a:pPr algn="l">
+              <a:buNone/>
               <a:defRPr sz="3150" b="1">
                 <a:solidFill>
                   <a:srgbClr val="B53225"/>
                 </a:solidFill>
-                <a:latin typeface="Nanum Gothic"/>
-                <a:ea typeface="Nanum Gothic"/>
-                <a:cs typeface="Nanum Gothic"/>
+                <a:latin typeface="NanumGothic"/>
+                <a:ea typeface="NanumGothic"/>
+                <a:cs typeface="NanumGothic"/>
               </a:defRPr>
             </a:pPr>
             <a:r>
@@ -4290,9 +4414,9 @@
                 <a:solidFill>
                   <a:srgbClr val="B53225"/>
                 </a:solidFill>
-                <a:latin typeface="Nanum Gothic"/>
-                <a:ea typeface="Nanum Gothic"/>
-                <a:cs typeface="Nanum Gothic"/>
+                <a:latin typeface="NanumGothic"/>
+                <a:ea typeface="NanumGothic"/>
+                <a:cs typeface="NanumGothic"/>
               </a:rPr>
               <a:t>05</a:t>
             </a:r>
@@ -4332,13 +4456,14 @@
           <a:lstStyle xmlns:a="http://schemas.openxmlformats.org/drawingml/2006/main"/>
           <a:p xmlns:a="http://schemas.openxmlformats.org/drawingml/2006/main">
             <a:pPr algn="l">
+              <a:buNone/>
               <a:defRPr sz="1725" b="1">
                 <a:solidFill>
                   <a:srgbClr val="111820"/>
                 </a:solidFill>
-                <a:latin typeface="Nanum Gothic"/>
-                <a:ea typeface="Nanum Gothic"/>
-                <a:cs typeface="Nanum Gothic"/>
+                <a:latin typeface="NanumGothic"/>
+                <a:ea typeface="NanumGothic"/>
+                <a:cs typeface="NanumGothic"/>
               </a:defRPr>
             </a:pPr>
             <a:r>
@@ -4346,9 +4471,9 @@
                 <a:solidFill>
                   <a:srgbClr val="111820"/>
                 </a:solidFill>
-                <a:latin typeface="Nanum Gothic"/>
-                <a:ea typeface="Nanum Gothic"/>
-                <a:cs typeface="Nanum Gothic"/>
+                <a:latin typeface="NanumGothic"/>
+                <a:ea typeface="NanumGothic"/>
+                <a:cs typeface="NanumGothic"/>
               </a:rPr>
               <a:t>검증·배포</a:t>
             </a:r>
@@ -4388,13 +4513,14 @@
           <a:lstStyle xmlns:a="http://schemas.openxmlformats.org/drawingml/2006/main"/>
           <a:p xmlns:a="http://schemas.openxmlformats.org/drawingml/2006/main">
             <a:pPr algn="l">
+              <a:buNone/>
               <a:defRPr sz="1500" b="0">
                 <a:solidFill>
                   <a:srgbClr val="58636F"/>
                 </a:solidFill>
-                <a:latin typeface="Nanum Gothic"/>
-                <a:ea typeface="Nanum Gothic"/>
-                <a:cs typeface="Nanum Gothic"/>
+                <a:latin typeface="NanumGothic"/>
+                <a:ea typeface="NanumGothic"/>
+                <a:cs typeface="NanumGothic"/>
               </a:defRPr>
             </a:pPr>
             <a:r>
@@ -4402,22 +4528,23 @@
                 <a:solidFill>
                   <a:srgbClr val="58636F"/>
                 </a:solidFill>
-                <a:latin typeface="Nanum Gothic"/>
-                <a:ea typeface="Nanum Gothic"/>
-                <a:cs typeface="Nanum Gothic"/>
-              </a:rPr>
-              <a:t>테스트·Docker</a:t>
-            </a:r>
-          </a:p>
-          <a:p xmlns:a="http://schemas.openxmlformats.org/drawingml/2006/main">
-            <a:pPr algn="l">
+                <a:latin typeface="NanumGothic"/>
+                <a:ea typeface="NanumGothic"/>
+                <a:cs typeface="NanumGothic"/>
+              </a:rPr>
+              <a:t>테스트·보안</a:t>
+            </a:r>
+          </a:p>
+          <a:p xmlns:a="http://schemas.openxmlformats.org/drawingml/2006/main">
+            <a:pPr algn="l">
+              <a:buNone/>
               <a:defRPr sz="1500" b="0">
                 <a:solidFill>
                   <a:srgbClr val="58636F"/>
                 </a:solidFill>
-                <a:latin typeface="Nanum Gothic"/>
-                <a:ea typeface="Nanum Gothic"/>
-                <a:cs typeface="Nanum Gothic"/>
+                <a:latin typeface="NanumGothic"/>
+                <a:ea typeface="NanumGothic"/>
+                <a:cs typeface="NanumGothic"/>
               </a:defRPr>
             </a:pPr>
             <a:r>
@@ -4425,11 +4552,11 @@
                 <a:solidFill>
                   <a:srgbClr val="58636F"/>
                 </a:solidFill>
-                <a:latin typeface="Nanum Gothic"/>
-                <a:ea typeface="Nanum Gothic"/>
-                <a:cs typeface="Nanum Gothic"/>
-              </a:rPr>
-              <a:t>공개 URL</a:t>
+                <a:latin typeface="NanumGothic"/>
+                <a:ea typeface="NanumGothic"/>
+                <a:cs typeface="NanumGothic"/>
+              </a:rPr>
+              <a:t>Docker 배포</a:t>
             </a:r>
           </a:p>
         </p:txBody>
@@ -4466,6 +4593,11 @@
             <a:prstDash val="solid"/>
           </a:ln>
         </p:spPr>
+        <p:txBody>
+          <a:bodyPr xmlns:a="http://schemas.openxmlformats.org/drawingml/2006/main"/>
+          <a:lstStyle xmlns:a="http://schemas.openxmlformats.org/drawingml/2006/main"/>
+          <a:p xmlns:a="http://schemas.openxmlformats.org/drawingml/2006/main"/>
+        </p:txBody>
       </p:sp>
       <p:sp>
         <p:nvSpPr>
@@ -4500,13 +4632,14 @@
           <a:lstStyle xmlns:a="http://schemas.openxmlformats.org/drawingml/2006/main"/>
           <a:p xmlns:a="http://schemas.openxmlformats.org/drawingml/2006/main">
             <a:pPr algn="ctr">
+              <a:buNone/>
               <a:defRPr sz="1650" b="1">
                 <a:solidFill>
                   <a:srgbClr val="1B4A73"/>
                 </a:solidFill>
-                <a:latin typeface="Nanum Gothic"/>
-                <a:ea typeface="Nanum Gothic"/>
-                <a:cs typeface="Nanum Gothic"/>
+                <a:latin typeface="NanumGothic"/>
+                <a:ea typeface="NanumGothic"/>
+                <a:cs typeface="NanumGothic"/>
               </a:defRPr>
             </a:pPr>
             <a:r>
@@ -4514,11 +4647,11 @@
                 <a:solidFill>
                   <a:srgbClr val="1B4A73"/>
                 </a:solidFill>
-                <a:latin typeface="Nanum Gothic"/>
-                <a:ea typeface="Nanum Gothic"/>
-                <a:cs typeface="Nanum Gothic"/>
-              </a:rPr>
-              <a:t>제출용 프로토타입 배포 완료  ·  https://silver-finance-guard-ai.onrender.com</a:t>
+                <a:latin typeface="NanumGothic"/>
+                <a:ea typeface="NanumGothic"/>
+                <a:cs typeface="NanumGothic"/>
+              </a:rPr>
+              <a:t>제출용 프로토타입 실행 확인  ·  Docker 기반 배포 구성 완료</a:t>
             </a:r>
           </a:p>
         </p:txBody>
@@ -4585,13 +4718,14 @@
           <a:lstStyle xmlns:a="http://schemas.openxmlformats.org/drawingml/2006/main"/>
           <a:p xmlns:a="http://schemas.openxmlformats.org/drawingml/2006/main">
             <a:pPr algn="l">
+              <a:buNone/>
               <a:defRPr sz="1350" b="1">
                 <a:solidFill>
                   <a:srgbClr val="0B6B57"/>
                 </a:solidFill>
-                <a:latin typeface="Nanum Gothic"/>
-                <a:ea typeface="Nanum Gothic"/>
-                <a:cs typeface="Nanum Gothic"/>
+                <a:latin typeface="NanumGothic"/>
+                <a:ea typeface="NanumGothic"/>
+                <a:cs typeface="NanumGothic"/>
               </a:defRPr>
             </a:pPr>
             <a:r>
@@ -4599,9 +4733,9 @@
                 <a:solidFill>
                   <a:srgbClr val="0B6B57"/>
                 </a:solidFill>
-                <a:latin typeface="Nanum Gothic"/>
-                <a:ea typeface="Nanum Gothic"/>
-                <a:cs typeface="Nanum Gothic"/>
+                <a:latin typeface="NanumGothic"/>
+                <a:ea typeface="NanumGothic"/>
+                <a:cs typeface="NanumGothic"/>
               </a:rPr>
               <a:t>실버 금융가드 AI</a:t>
             </a:r>
@@ -4641,13 +4775,14 @@
           <a:lstStyle xmlns:a="http://schemas.openxmlformats.org/drawingml/2006/main"/>
           <a:p xmlns:a="http://schemas.openxmlformats.org/drawingml/2006/main">
             <a:pPr algn="l">
+              <a:buNone/>
               <a:defRPr sz="4650" b="1">
                 <a:solidFill>
                   <a:srgbClr val="111820"/>
                 </a:solidFill>
-                <a:latin typeface="Nanum Gothic"/>
-                <a:ea typeface="Nanum Gothic"/>
-                <a:cs typeface="Nanum Gothic"/>
+                <a:latin typeface="NanumGothic"/>
+                <a:ea typeface="NanumGothic"/>
+                <a:cs typeface="NanumGothic"/>
               </a:defRPr>
             </a:pPr>
             <a:r>
@@ -4655,22 +4790,23 @@
                 <a:solidFill>
                   <a:srgbClr val="111820"/>
                 </a:solidFill>
-                <a:latin typeface="Nanum Gothic"/>
-                <a:ea typeface="Nanum Gothic"/>
-                <a:cs typeface="Nanum Gothic"/>
-              </a:rPr>
-              <a:t>이해를 행동으로 바꾸는</a:t>
-            </a:r>
-          </a:p>
-          <a:p xmlns:a="http://schemas.openxmlformats.org/drawingml/2006/main">
-            <a:pPr algn="l">
+                <a:latin typeface="NanumGothic"/>
+                <a:ea typeface="NanumGothic"/>
+                <a:cs typeface="NanumGothic"/>
+              </a:rPr>
+              <a:t>알아듣기 어려운 금융을</a:t>
+            </a:r>
+          </a:p>
+          <a:p xmlns:a="http://schemas.openxmlformats.org/drawingml/2006/main">
+            <a:pPr algn="l">
+              <a:buNone/>
               <a:defRPr sz="4650" b="1">
                 <a:solidFill>
                   <a:srgbClr val="111820"/>
                 </a:solidFill>
-                <a:latin typeface="Nanum Gothic"/>
-                <a:ea typeface="Nanum Gothic"/>
-                <a:cs typeface="Nanum Gothic"/>
+                <a:latin typeface="NanumGothic"/>
+                <a:ea typeface="NanumGothic"/>
+                <a:cs typeface="NanumGothic"/>
               </a:defRPr>
             </a:pPr>
             <a:r>
@@ -4678,11 +4814,11 @@
                 <a:solidFill>
                   <a:srgbClr val="111820"/>
                 </a:solidFill>
-                <a:latin typeface="Nanum Gothic"/>
-                <a:ea typeface="Nanum Gothic"/>
-                <a:cs typeface="Nanum Gothic"/>
-              </a:rPr>
-              <a:t>금융소비자 보호 에이전트</a:t>
+                <a:latin typeface="NanumGothic"/>
+                <a:ea typeface="NanumGothic"/>
+                <a:cs typeface="NanumGothic"/>
+              </a:rPr>
+              <a:t>바로 행동할 수 있는 보호로</a:t>
             </a:r>
           </a:p>
         </p:txBody>
@@ -4720,13 +4856,14 @@
           <a:lstStyle xmlns:a="http://schemas.openxmlformats.org/drawingml/2006/main"/>
           <a:p xmlns:a="http://schemas.openxmlformats.org/drawingml/2006/main">
             <a:pPr algn="l">
+              <a:buNone/>
               <a:defRPr sz="1875" b="0">
                 <a:solidFill>
                   <a:srgbClr val="58636F"/>
                 </a:solidFill>
-                <a:latin typeface="Nanum Gothic"/>
-                <a:ea typeface="Nanum Gothic"/>
-                <a:cs typeface="Nanum Gothic"/>
+                <a:latin typeface="NanumGothic"/>
+                <a:ea typeface="NanumGothic"/>
+                <a:cs typeface="NanumGothic"/>
               </a:defRPr>
             </a:pPr>
             <a:r>
@@ -4734,11 +4871,11 @@
                 <a:solidFill>
                   <a:srgbClr val="58636F"/>
                 </a:solidFill>
-                <a:latin typeface="Nanum Gothic"/>
-                <a:ea typeface="Nanum Gothic"/>
-                <a:cs typeface="Nanum Gothic"/>
-              </a:rPr>
-              <a:t>약관 위험 탐지 · 골든타임 대응 · 쉬운 금융용어 · 민원서 작성 · 보호자 공유</a:t>
+                <a:latin typeface="NanumGothic"/>
+                <a:ea typeface="NanumGothic"/>
+                <a:cs typeface="NanumGothic"/>
+              </a:rPr>
+              <a:t>사전 경고 · 골든타임 대응 · 공식 근거 · PC·모바일 접근성 · 보호자 연결</a:t>
             </a:r>
           </a:p>
         </p:txBody>
@@ -4773,6 +4910,11 @@
             <a:prstDash val="solid"/>
           </a:ln>
         </p:spPr>
+        <p:txBody>
+          <a:bodyPr xmlns:a="http://schemas.openxmlformats.org/drawingml/2006/main"/>
+          <a:lstStyle xmlns:a="http://schemas.openxmlformats.org/drawingml/2006/main"/>
+          <a:p xmlns:a="http://schemas.openxmlformats.org/drawingml/2006/main"/>
+        </p:txBody>
       </p:sp>
       <p:sp>
         <p:nvSpPr>
@@ -4807,13 +4949,14 @@
           <a:lstStyle xmlns:a="http://schemas.openxmlformats.org/drawingml/2006/main"/>
           <a:p xmlns:a="http://schemas.openxmlformats.org/drawingml/2006/main">
             <a:pPr algn="ctr">
+              <a:buNone/>
               <a:defRPr sz="1875" b="1">
                 <a:solidFill>
                   <a:srgbClr val="FFFFFF"/>
                 </a:solidFill>
-                <a:latin typeface="Nanum Gothic"/>
-                <a:ea typeface="Nanum Gothic"/>
-                <a:cs typeface="Nanum Gothic"/>
+                <a:latin typeface="NanumGothic"/>
+                <a:ea typeface="NanumGothic"/>
+                <a:cs typeface="NanumGothic"/>
               </a:defRPr>
             </a:pPr>
             <a:r>
@@ -4821,11 +4964,11 @@
                 <a:solidFill>
                   <a:srgbClr val="FFFFFF"/>
                 </a:solidFill>
-                <a:latin typeface="Nanum Gothic"/>
-                <a:ea typeface="Nanum Gothic"/>
-                <a:cs typeface="Nanum Gothic"/>
-              </a:rPr>
-              <a:t>https://silver-finance-guard-ai.onrender.com</a:t>
+                <a:latin typeface="NanumGothic"/>
+                <a:ea typeface="NanumGothic"/>
+                <a:cs typeface="NanumGothic"/>
+              </a:rPr>
+              <a:t>실행 환경: PC · 모바일 웹 브라우저</a:t>
             </a:r>
           </a:p>
         </p:txBody>
@@ -4863,13 +5006,14 @@
           <a:lstStyle xmlns:a="http://schemas.openxmlformats.org/drawingml/2006/main"/>
           <a:p xmlns:a="http://schemas.openxmlformats.org/drawingml/2006/main">
             <a:pPr algn="r">
+              <a:buNone/>
               <a:defRPr sz="1125" b="0">
                 <a:solidFill>
                   <a:srgbClr val="58636F"/>
                 </a:solidFill>
-                <a:latin typeface="Nanum Gothic"/>
-                <a:ea typeface="Nanum Gothic"/>
-                <a:cs typeface="Nanum Gothic"/>
+                <a:latin typeface="NanumGothic"/>
+                <a:ea typeface="NanumGothic"/>
+                <a:cs typeface="NanumGothic"/>
               </a:defRPr>
             </a:pPr>
             <a:r>
@@ -4877,11 +5021,11 @@
                 <a:solidFill>
                   <a:srgbClr val="58636F"/>
                 </a:solidFill>
-                <a:latin typeface="Nanum Gothic"/>
-                <a:ea typeface="Nanum Gothic"/>
-                <a:cs typeface="Nanum Gothic"/>
-              </a:rPr>
-              <a:t>GitHub · kkssyy1215/Silver_Finance_Guard_AI</a:t>
+                <a:latin typeface="NanumGothic"/>
+                <a:ea typeface="NanumGothic"/>
+                <a:cs typeface="NanumGothic"/>
+              </a:rPr>
+              <a:t>제출 자료: 기술설명서 · 프로토타입 · 소스 코드</a:t>
             </a:r>
           </a:p>
         </p:txBody>
@@ -4941,13 +5085,14 @@
           <a:lstStyle xmlns:a="http://schemas.openxmlformats.org/drawingml/2006/main"/>
           <a:p xmlns:a="http://schemas.openxmlformats.org/drawingml/2006/main">
             <a:pPr algn="l">
+              <a:buNone/>
               <a:defRPr sz="1125" b="1">
                 <a:solidFill>
                   <a:srgbClr val="0B6B57"/>
                 </a:solidFill>
-                <a:latin typeface="Nanum Gothic"/>
-                <a:ea typeface="Nanum Gothic"/>
-                <a:cs typeface="Nanum Gothic"/>
+                <a:latin typeface="NanumGothic"/>
+                <a:ea typeface="NanumGothic"/>
+                <a:cs typeface="NanumGothic"/>
               </a:defRPr>
             </a:pPr>
             <a:r>
@@ -4955,9 +5100,9 @@
                 <a:solidFill>
                   <a:srgbClr val="0B6B57"/>
                 </a:solidFill>
-                <a:latin typeface="Nanum Gothic"/>
-                <a:ea typeface="Nanum Gothic"/>
-                <a:cs typeface="Nanum Gothic"/>
+                <a:latin typeface="NanumGothic"/>
+                <a:ea typeface="NanumGothic"/>
+                <a:cs typeface="NanumGothic"/>
               </a:rPr>
               <a:t>문제 정의와 필요성</a:t>
             </a:r>
@@ -4997,13 +5142,14 @@
           <a:lstStyle xmlns:a="http://schemas.openxmlformats.org/drawingml/2006/main"/>
           <a:p xmlns:a="http://schemas.openxmlformats.org/drawingml/2006/main">
             <a:pPr algn="l">
+              <a:buNone/>
               <a:defRPr sz="3525" b="1">
                 <a:solidFill>
                   <a:srgbClr val="111820"/>
                 </a:solidFill>
-                <a:latin typeface="Nanum Gothic"/>
-                <a:ea typeface="Nanum Gothic"/>
-                <a:cs typeface="Nanum Gothic"/>
+                <a:latin typeface="NanumGothic"/>
+                <a:ea typeface="NanumGothic"/>
+                <a:cs typeface="NanumGothic"/>
               </a:defRPr>
             </a:pPr>
             <a:r>
@@ -5011,9 +5157,9 @@
                 <a:solidFill>
                   <a:srgbClr val="111820"/>
                 </a:solidFill>
-                <a:latin typeface="Nanum Gothic"/>
-                <a:ea typeface="Nanum Gothic"/>
-                <a:cs typeface="Nanum Gothic"/>
+                <a:latin typeface="NanumGothic"/>
+                <a:ea typeface="NanumGothic"/>
+                <a:cs typeface="NanumGothic"/>
               </a:rPr>
               <a:t>금융 피해는 이해하지 못한 순간부터 시작됩니다</a:t>
             </a:r>
@@ -5022,7 +5168,7 @@
       </p:sp>
       <p:cxnSp>
         <p:nvCxnSpPr>
-          <p:cNvPr id="17" name="rule-2"/>
+          <p:cNvPr id="29" name="rule-2"/>
           <p:cNvCxnSpPr/>
           <p:nvPr/>
         </p:nvCxnSpPr>
@@ -5075,13 +5221,14 @@
           <a:lstStyle xmlns:a="http://schemas.openxmlformats.org/drawingml/2006/main"/>
           <a:p xmlns:a="http://schemas.openxmlformats.org/drawingml/2006/main">
             <a:pPr algn="r">
+              <a:buNone/>
               <a:defRPr sz="975" b="0">
                 <a:solidFill>
                   <a:srgbClr val="58636F"/>
                 </a:solidFill>
-                <a:latin typeface="Nanum Gothic"/>
-                <a:ea typeface="Nanum Gothic"/>
-                <a:cs typeface="Nanum Gothic"/>
+                <a:latin typeface="NanumGothic"/>
+                <a:ea typeface="NanumGothic"/>
+                <a:cs typeface="NanumGothic"/>
               </a:defRPr>
             </a:pPr>
             <a:r>
@@ -5089,9 +5236,9 @@
                 <a:solidFill>
                   <a:srgbClr val="58636F"/>
                 </a:solidFill>
-                <a:latin typeface="Nanum Gothic"/>
-                <a:ea typeface="Nanum Gothic"/>
-                <a:cs typeface="Nanum Gothic"/>
+                <a:latin typeface="NanumGothic"/>
+                <a:ea typeface="NanumGothic"/>
+                <a:cs typeface="NanumGothic"/>
               </a:rPr>
               <a:t>02</a:t>
             </a:r>
@@ -5131,13 +5278,14 @@
           <a:lstStyle xmlns:a="http://schemas.openxmlformats.org/drawingml/2006/main"/>
           <a:p xmlns:a="http://schemas.openxmlformats.org/drawingml/2006/main">
             <a:pPr algn="l">
+              <a:buNone/>
               <a:defRPr sz="3750" b="1">
                 <a:solidFill>
                   <a:srgbClr val="1B4A73"/>
                 </a:solidFill>
-                <a:latin typeface="Nanum Gothic"/>
-                <a:ea typeface="Nanum Gothic"/>
-                <a:cs typeface="Nanum Gothic"/>
+                <a:latin typeface="NanumGothic"/>
+                <a:ea typeface="NanumGothic"/>
+                <a:cs typeface="NanumGothic"/>
               </a:defRPr>
             </a:pPr>
             <a:r>
@@ -5145,9 +5293,9 @@
                 <a:solidFill>
                   <a:srgbClr val="1B4A73"/>
                 </a:solidFill>
-                <a:latin typeface="Nanum Gothic"/>
-                <a:ea typeface="Nanum Gothic"/>
-                <a:cs typeface="Nanum Gothic"/>
+                <a:latin typeface="NanumGothic"/>
+                <a:ea typeface="NanumGothic"/>
+                <a:cs typeface="NanumGothic"/>
               </a:rPr>
               <a:t>01</a:t>
             </a:r>
@@ -5187,13 +5335,14 @@
           <a:lstStyle xmlns:a="http://schemas.openxmlformats.org/drawingml/2006/main"/>
           <a:p xmlns:a="http://schemas.openxmlformats.org/drawingml/2006/main">
             <a:pPr algn="l">
+              <a:buNone/>
               <a:defRPr sz="2025" b="1">
                 <a:solidFill>
                   <a:srgbClr val="111820"/>
                 </a:solidFill>
-                <a:latin typeface="Nanum Gothic"/>
-                <a:ea typeface="Nanum Gothic"/>
-                <a:cs typeface="Nanum Gothic"/>
+                <a:latin typeface="NanumGothic"/>
+                <a:ea typeface="NanumGothic"/>
+                <a:cs typeface="NanumGothic"/>
               </a:defRPr>
             </a:pPr>
             <a:r>
@@ -5201,9 +5350,9 @@
                 <a:solidFill>
                   <a:srgbClr val="111820"/>
                 </a:solidFill>
-                <a:latin typeface="Nanum Gothic"/>
-                <a:ea typeface="Nanum Gothic"/>
-                <a:cs typeface="Nanum Gothic"/>
+                <a:latin typeface="NanumGothic"/>
+                <a:ea typeface="NanumGothic"/>
+                <a:cs typeface="NanumGothic"/>
               </a:rPr>
               <a:t>가입 전</a:t>
             </a:r>
@@ -5243,13 +5392,14 @@
           <a:lstStyle xmlns:a="http://schemas.openxmlformats.org/drawingml/2006/main"/>
           <a:p xmlns:a="http://schemas.openxmlformats.org/drawingml/2006/main">
             <a:pPr algn="l">
+              <a:buNone/>
               <a:defRPr sz="1725" b="0">
                 <a:solidFill>
                   <a:srgbClr val="58636F"/>
                 </a:solidFill>
-                <a:latin typeface="Nanum Gothic"/>
-                <a:ea typeface="Nanum Gothic"/>
-                <a:cs typeface="Nanum Gothic"/>
+                <a:latin typeface="NanumGothic"/>
+                <a:ea typeface="NanumGothic"/>
+                <a:cs typeface="NanumGothic"/>
               </a:defRPr>
             </a:pPr>
             <a:r>
@@ -5257,22 +5407,23 @@
                 <a:solidFill>
                   <a:srgbClr val="58636F"/>
                 </a:solidFill>
-                <a:latin typeface="Nanum Gothic"/>
-                <a:ea typeface="Nanum Gothic"/>
-                <a:cs typeface="Nanum Gothic"/>
+                <a:latin typeface="NanumGothic"/>
+                <a:ea typeface="NanumGothic"/>
+                <a:cs typeface="NanumGothic"/>
               </a:rPr>
               <a:t>긴 약관과 어려운 용어 때문에</a:t>
             </a:r>
           </a:p>
           <a:p xmlns:a="http://schemas.openxmlformats.org/drawingml/2006/main">
             <a:pPr algn="l">
+              <a:buNone/>
               <a:defRPr sz="1725" b="0">
                 <a:solidFill>
                   <a:srgbClr val="58636F"/>
                 </a:solidFill>
-                <a:latin typeface="Nanum Gothic"/>
-                <a:ea typeface="Nanum Gothic"/>
-                <a:cs typeface="Nanum Gothic"/>
+                <a:latin typeface="NanumGothic"/>
+                <a:ea typeface="NanumGothic"/>
+                <a:cs typeface="NanumGothic"/>
               </a:defRPr>
             </a:pPr>
             <a:r>
@@ -5280,9 +5431,9 @@
                 <a:solidFill>
                   <a:srgbClr val="58636F"/>
                 </a:solidFill>
-                <a:latin typeface="Nanum Gothic"/>
-                <a:ea typeface="Nanum Gothic"/>
-                <a:cs typeface="Nanum Gothic"/>
+                <a:latin typeface="NanumGothic"/>
+                <a:ea typeface="NanumGothic"/>
+                <a:cs typeface="NanumGothic"/>
               </a:rPr>
               <a:t>불리한 조건을 놓칩니다.</a:t>
             </a:r>
@@ -5322,13 +5473,14 @@
           <a:lstStyle xmlns:a="http://schemas.openxmlformats.org/drawingml/2006/main"/>
           <a:p xmlns:a="http://schemas.openxmlformats.org/drawingml/2006/main">
             <a:pPr algn="l">
+              <a:buNone/>
               <a:defRPr sz="3750" b="1">
                 <a:solidFill>
                   <a:srgbClr val="1B4A73"/>
                 </a:solidFill>
-                <a:latin typeface="Nanum Gothic"/>
-                <a:ea typeface="Nanum Gothic"/>
-                <a:cs typeface="Nanum Gothic"/>
+                <a:latin typeface="NanumGothic"/>
+                <a:ea typeface="NanumGothic"/>
+                <a:cs typeface="NanumGothic"/>
               </a:defRPr>
             </a:pPr>
             <a:r>
@@ -5336,9 +5488,9 @@
                 <a:solidFill>
                   <a:srgbClr val="1B4A73"/>
                 </a:solidFill>
-                <a:latin typeface="Nanum Gothic"/>
-                <a:ea typeface="Nanum Gothic"/>
-                <a:cs typeface="Nanum Gothic"/>
+                <a:latin typeface="NanumGothic"/>
+                <a:ea typeface="NanumGothic"/>
+                <a:cs typeface="NanumGothic"/>
               </a:rPr>
               <a:t>02</a:t>
             </a:r>
@@ -5378,13 +5530,14 @@
           <a:lstStyle xmlns:a="http://schemas.openxmlformats.org/drawingml/2006/main"/>
           <a:p xmlns:a="http://schemas.openxmlformats.org/drawingml/2006/main">
             <a:pPr algn="l">
+              <a:buNone/>
               <a:defRPr sz="2025" b="1">
                 <a:solidFill>
                   <a:srgbClr val="111820"/>
                 </a:solidFill>
-                <a:latin typeface="Nanum Gothic"/>
-                <a:ea typeface="Nanum Gothic"/>
-                <a:cs typeface="Nanum Gothic"/>
+                <a:latin typeface="NanumGothic"/>
+                <a:ea typeface="NanumGothic"/>
+                <a:cs typeface="NanumGothic"/>
               </a:defRPr>
             </a:pPr>
             <a:r>
@@ -5392,9 +5545,9 @@
                 <a:solidFill>
                   <a:srgbClr val="111820"/>
                 </a:solidFill>
-                <a:latin typeface="Nanum Gothic"/>
-                <a:ea typeface="Nanum Gothic"/>
-                <a:cs typeface="Nanum Gothic"/>
+                <a:latin typeface="NanumGothic"/>
+                <a:ea typeface="NanumGothic"/>
+                <a:cs typeface="NanumGothic"/>
               </a:rPr>
               <a:t>상담 중</a:t>
             </a:r>
@@ -5434,13 +5587,14 @@
           <a:lstStyle xmlns:a="http://schemas.openxmlformats.org/drawingml/2006/main"/>
           <a:p xmlns:a="http://schemas.openxmlformats.org/drawingml/2006/main">
             <a:pPr algn="l">
+              <a:buNone/>
               <a:defRPr sz="1725" b="0">
                 <a:solidFill>
                   <a:srgbClr val="58636F"/>
                 </a:solidFill>
-                <a:latin typeface="Nanum Gothic"/>
-                <a:ea typeface="Nanum Gothic"/>
-                <a:cs typeface="Nanum Gothic"/>
+                <a:latin typeface="NanumGothic"/>
+                <a:ea typeface="NanumGothic"/>
+                <a:cs typeface="NanumGothic"/>
               </a:defRPr>
             </a:pPr>
             <a:r>
@@ -5448,22 +5602,23 @@
                 <a:solidFill>
                   <a:srgbClr val="58636F"/>
                 </a:solidFill>
-                <a:latin typeface="Nanum Gothic"/>
-                <a:ea typeface="Nanum Gothic"/>
-                <a:cs typeface="Nanum Gothic"/>
+                <a:latin typeface="NanumGothic"/>
+                <a:ea typeface="NanumGothic"/>
+                <a:cs typeface="NanumGothic"/>
               </a:rPr>
               <a:t>설명 누락과 과장 표현을</a:t>
             </a:r>
           </a:p>
           <a:p xmlns:a="http://schemas.openxmlformats.org/drawingml/2006/main">
             <a:pPr algn="l">
+              <a:buNone/>
               <a:defRPr sz="1725" b="0">
                 <a:solidFill>
                   <a:srgbClr val="58636F"/>
                 </a:solidFill>
-                <a:latin typeface="Nanum Gothic"/>
-                <a:ea typeface="Nanum Gothic"/>
-                <a:cs typeface="Nanum Gothic"/>
+                <a:latin typeface="NanumGothic"/>
+                <a:ea typeface="NanumGothic"/>
+                <a:cs typeface="NanumGothic"/>
               </a:defRPr>
             </a:pPr>
             <a:r>
@@ -5471,9 +5626,9 @@
                 <a:solidFill>
                   <a:srgbClr val="58636F"/>
                 </a:solidFill>
-                <a:latin typeface="Nanum Gothic"/>
-                <a:ea typeface="Nanum Gothic"/>
-                <a:cs typeface="Nanum Gothic"/>
+                <a:latin typeface="NanumGothic"/>
+                <a:ea typeface="NanumGothic"/>
+                <a:cs typeface="NanumGothic"/>
               </a:rPr>
               <a:t>그 자리에서 판단하기 어렵습니다.</a:t>
             </a:r>
@@ -5513,13 +5668,14 @@
           <a:lstStyle xmlns:a="http://schemas.openxmlformats.org/drawingml/2006/main"/>
           <a:p xmlns:a="http://schemas.openxmlformats.org/drawingml/2006/main">
             <a:pPr algn="l">
+              <a:buNone/>
               <a:defRPr sz="3750" b="1">
                 <a:solidFill>
                   <a:srgbClr val="B53225"/>
                 </a:solidFill>
-                <a:latin typeface="Nanum Gothic"/>
-                <a:ea typeface="Nanum Gothic"/>
-                <a:cs typeface="Nanum Gothic"/>
+                <a:latin typeface="NanumGothic"/>
+                <a:ea typeface="NanumGothic"/>
+                <a:cs typeface="NanumGothic"/>
               </a:defRPr>
             </a:pPr>
             <a:r>
@@ -5527,9 +5683,9 @@
                 <a:solidFill>
                   <a:srgbClr val="B53225"/>
                 </a:solidFill>
-                <a:latin typeface="Nanum Gothic"/>
-                <a:ea typeface="Nanum Gothic"/>
-                <a:cs typeface="Nanum Gothic"/>
+                <a:latin typeface="NanumGothic"/>
+                <a:ea typeface="NanumGothic"/>
+                <a:cs typeface="NanumGothic"/>
               </a:rPr>
               <a:t>03</a:t>
             </a:r>
@@ -5569,13 +5725,14 @@
           <a:lstStyle xmlns:a="http://schemas.openxmlformats.org/drawingml/2006/main"/>
           <a:p xmlns:a="http://schemas.openxmlformats.org/drawingml/2006/main">
             <a:pPr algn="l">
+              <a:buNone/>
               <a:defRPr sz="2025" b="1">
                 <a:solidFill>
                   <a:srgbClr val="111820"/>
                 </a:solidFill>
-                <a:latin typeface="Nanum Gothic"/>
-                <a:ea typeface="Nanum Gothic"/>
-                <a:cs typeface="Nanum Gothic"/>
+                <a:latin typeface="NanumGothic"/>
+                <a:ea typeface="NanumGothic"/>
+                <a:cs typeface="NanumGothic"/>
               </a:defRPr>
             </a:pPr>
             <a:r>
@@ -5583,9 +5740,9 @@
                 <a:solidFill>
                   <a:srgbClr val="111820"/>
                 </a:solidFill>
-                <a:latin typeface="Nanum Gothic"/>
-                <a:ea typeface="Nanum Gothic"/>
-                <a:cs typeface="Nanum Gothic"/>
+                <a:latin typeface="NanumGothic"/>
+                <a:ea typeface="NanumGothic"/>
+                <a:cs typeface="NanumGothic"/>
               </a:rPr>
               <a:t>사고 직후</a:t>
             </a:r>
@@ -5625,13 +5782,14 @@
           <a:lstStyle xmlns:a="http://schemas.openxmlformats.org/drawingml/2006/main"/>
           <a:p xmlns:a="http://schemas.openxmlformats.org/drawingml/2006/main">
             <a:pPr algn="l">
+              <a:buNone/>
               <a:defRPr sz="1725" b="0">
                 <a:solidFill>
                   <a:srgbClr val="58636F"/>
                 </a:solidFill>
-                <a:latin typeface="Nanum Gothic"/>
-                <a:ea typeface="Nanum Gothic"/>
-                <a:cs typeface="Nanum Gothic"/>
+                <a:latin typeface="NanumGothic"/>
+                <a:ea typeface="NanumGothic"/>
+                <a:cs typeface="NanumGothic"/>
               </a:defRPr>
             </a:pPr>
             <a:r>
@@ -5639,22 +5797,23 @@
                 <a:solidFill>
                   <a:srgbClr val="58636F"/>
                 </a:solidFill>
-                <a:latin typeface="Nanum Gothic"/>
-                <a:ea typeface="Nanum Gothic"/>
-                <a:cs typeface="Nanum Gothic"/>
+                <a:latin typeface="NanumGothic"/>
+                <a:ea typeface="NanumGothic"/>
+                <a:cs typeface="NanumGothic"/>
               </a:rPr>
               <a:t>당황한 상태에서 신고 순서와</a:t>
             </a:r>
           </a:p>
           <a:p xmlns:a="http://schemas.openxmlformats.org/drawingml/2006/main">
             <a:pPr algn="l">
+              <a:buNone/>
               <a:defRPr sz="1725" b="0">
                 <a:solidFill>
                   <a:srgbClr val="58636F"/>
                 </a:solidFill>
-                <a:latin typeface="Nanum Gothic"/>
-                <a:ea typeface="Nanum Gothic"/>
-                <a:cs typeface="Nanum Gothic"/>
+                <a:latin typeface="NanumGothic"/>
+                <a:ea typeface="NanumGothic"/>
+                <a:cs typeface="NanumGothic"/>
               </a:defRPr>
             </a:pPr>
             <a:r>
@@ -5662,9 +5821,9 @@
                 <a:solidFill>
                   <a:srgbClr val="58636F"/>
                 </a:solidFill>
-                <a:latin typeface="Nanum Gothic"/>
-                <a:ea typeface="Nanum Gothic"/>
-                <a:cs typeface="Nanum Gothic"/>
+                <a:latin typeface="NanumGothic"/>
+                <a:ea typeface="NanumGothic"/>
+                <a:cs typeface="NanumGothic"/>
               </a:rPr>
               <a:t>필요 서류를 찾느라 시간을 잃습니다.</a:t>
             </a:r>
@@ -5704,13 +5863,14 @@
           <a:lstStyle xmlns:a="http://schemas.openxmlformats.org/drawingml/2006/main"/>
           <a:p xmlns:a="http://schemas.openxmlformats.org/drawingml/2006/main">
             <a:pPr algn="l">
+              <a:buNone/>
               <a:defRPr sz="2025" b="1">
                 <a:solidFill>
                   <a:srgbClr val="0B6B57"/>
                 </a:solidFill>
-                <a:latin typeface="Nanum Gothic"/>
-                <a:ea typeface="Nanum Gothic"/>
-                <a:cs typeface="Nanum Gothic"/>
+                <a:latin typeface="NanumGothic"/>
+                <a:ea typeface="NanumGothic"/>
+                <a:cs typeface="NanumGothic"/>
               </a:defRPr>
             </a:pPr>
             <a:r>
@@ -5718,9 +5878,9 @@
                 <a:solidFill>
                   <a:srgbClr val="0B6B57"/>
                 </a:solidFill>
-                <a:latin typeface="Nanum Gothic"/>
-                <a:ea typeface="Nanum Gothic"/>
-                <a:cs typeface="Nanum Gothic"/>
+                <a:latin typeface="NanumGothic"/>
+                <a:ea typeface="NanumGothic"/>
+                <a:cs typeface="NanumGothic"/>
               </a:rPr>
               <a:t>고령층에게 필요한 것은 더 많은 정보가 아니라, 지금 이해하고 바로 행동할 수 있는 안내입니다.</a:t>
             </a:r>
@@ -5782,13 +5942,14 @@
           <a:lstStyle xmlns:a="http://schemas.openxmlformats.org/drawingml/2006/main"/>
           <a:p xmlns:a="http://schemas.openxmlformats.org/drawingml/2006/main">
             <a:pPr algn="l">
+              <a:buNone/>
               <a:defRPr sz="1125" b="1">
                 <a:solidFill>
                   <a:srgbClr val="0B6B57"/>
                 </a:solidFill>
-                <a:latin typeface="Nanum Gothic"/>
-                <a:ea typeface="Nanum Gothic"/>
-                <a:cs typeface="Nanum Gothic"/>
+                <a:latin typeface="NanumGothic"/>
+                <a:ea typeface="NanumGothic"/>
+                <a:cs typeface="NanumGothic"/>
               </a:defRPr>
             </a:pPr>
             <a:r>
@@ -5796,11 +5957,11 @@
                 <a:solidFill>
                   <a:srgbClr val="0B6B57"/>
                 </a:solidFill>
-                <a:latin typeface="Nanum Gothic"/>
-                <a:ea typeface="Nanum Gothic"/>
-                <a:cs typeface="Nanum Gothic"/>
-              </a:rPr>
-              <a:t>아이디어의 창의성 및 효과</a:t>
+                <a:latin typeface="NanumGothic"/>
+                <a:ea typeface="NanumGothic"/>
+                <a:cs typeface="NanumGothic"/>
+              </a:rPr>
+              <a:t>서비스 차별화 포인트</a:t>
             </a:r>
           </a:p>
         </p:txBody>
@@ -5838,13 +5999,14 @@
           <a:lstStyle xmlns:a="http://schemas.openxmlformats.org/drawingml/2006/main"/>
           <a:p xmlns:a="http://schemas.openxmlformats.org/drawingml/2006/main">
             <a:pPr algn="l">
+              <a:buNone/>
               <a:defRPr sz="3525" b="1">
                 <a:solidFill>
                   <a:srgbClr val="111820"/>
                 </a:solidFill>
-                <a:latin typeface="Nanum Gothic"/>
-                <a:ea typeface="Nanum Gothic"/>
-                <a:cs typeface="Nanum Gothic"/>
+                <a:latin typeface="NanumGothic"/>
+                <a:ea typeface="NanumGothic"/>
+                <a:cs typeface="NanumGothic"/>
               </a:defRPr>
             </a:pPr>
             <a:r>
@@ -5852,18 +6014,18 @@
                 <a:solidFill>
                   <a:srgbClr val="111820"/>
                 </a:solidFill>
-                <a:latin typeface="Nanum Gothic"/>
-                <a:ea typeface="Nanum Gothic"/>
-                <a:cs typeface="Nanum Gothic"/>
-              </a:rPr>
-              <a:t>예방과 대응을 한 흐름으로 연결했습니다</a:t>
+                <a:latin typeface="NanumGothic"/>
+                <a:ea typeface="NanumGothic"/>
+                <a:cs typeface="NanumGothic"/>
+              </a:rPr>
+              <a:t>피해 전 경고부터 피해 후 실행까지, 한 번에</a:t>
             </a:r>
           </a:p>
         </p:txBody>
       </p:sp>
       <p:cxnSp>
         <p:nvCxnSpPr>
-          <p:cNvPr id="16" name="rule-3"/>
+          <p:cNvPr id="60" name="rule-3"/>
           <p:cNvCxnSpPr/>
           <p:nvPr/>
         </p:nvCxnSpPr>
@@ -5916,13 +6078,14 @@
           <a:lstStyle xmlns:a="http://schemas.openxmlformats.org/drawingml/2006/main"/>
           <a:p xmlns:a="http://schemas.openxmlformats.org/drawingml/2006/main">
             <a:pPr algn="r">
+              <a:buNone/>
               <a:defRPr sz="975" b="0">
                 <a:solidFill>
                   <a:srgbClr val="58636F"/>
                 </a:solidFill>
-                <a:latin typeface="Nanum Gothic"/>
-                <a:ea typeface="Nanum Gothic"/>
-                <a:cs typeface="Nanum Gothic"/>
+                <a:latin typeface="NanumGothic"/>
+                <a:ea typeface="NanumGothic"/>
+                <a:cs typeface="NanumGothic"/>
               </a:defRPr>
             </a:pPr>
             <a:r>
@@ -5930,9 +6093,9 @@
                 <a:solidFill>
                   <a:srgbClr val="58636F"/>
                 </a:solidFill>
-                <a:latin typeface="Nanum Gothic"/>
-                <a:ea typeface="Nanum Gothic"/>
-                <a:cs typeface="Nanum Gothic"/>
+                <a:latin typeface="NanumGothic"/>
+                <a:ea typeface="NanumGothic"/>
+                <a:cs typeface="NanumGothic"/>
               </a:rPr>
               <a:t>03</a:t>
             </a:r>
@@ -5971,6 +6134,11 @@
             <a:prstDash val="solid"/>
           </a:ln>
         </p:spPr>
+        <p:txBody>
+          <a:bodyPr xmlns:a="http://schemas.openxmlformats.org/drawingml/2006/main"/>
+          <a:lstStyle xmlns:a="http://schemas.openxmlformats.org/drawingml/2006/main"/>
+          <a:p xmlns:a="http://schemas.openxmlformats.org/drawingml/2006/main"/>
+        </p:txBody>
       </p:sp>
       <p:sp>
         <p:nvSpPr>
@@ -6004,6 +6172,11 @@
             <a:prstDash val="solid"/>
           </a:ln>
         </p:spPr>
+        <p:txBody>
+          <a:bodyPr xmlns:a="http://schemas.openxmlformats.org/drawingml/2006/main"/>
+          <a:lstStyle xmlns:a="http://schemas.openxmlformats.org/drawingml/2006/main"/>
+          <a:p xmlns:a="http://schemas.openxmlformats.org/drawingml/2006/main"/>
+        </p:txBody>
       </p:sp>
       <p:sp>
         <p:nvSpPr>
@@ -6038,13 +6211,14 @@
           <a:lstStyle xmlns:a="http://schemas.openxmlformats.org/drawingml/2006/main"/>
           <a:p xmlns:a="http://schemas.openxmlformats.org/drawingml/2006/main">
             <a:pPr algn="l">
+              <a:buNone/>
               <a:defRPr sz="2475" b="1">
                 <a:solidFill>
                   <a:srgbClr val="1B4A73"/>
                 </a:solidFill>
-                <a:latin typeface="Nanum Gothic"/>
-                <a:ea typeface="Nanum Gothic"/>
-                <a:cs typeface="Nanum Gothic"/>
+                <a:latin typeface="NanumGothic"/>
+                <a:ea typeface="NanumGothic"/>
+                <a:cs typeface="NanumGothic"/>
               </a:defRPr>
             </a:pPr>
             <a:r>
@@ -6052,9 +6226,9 @@
                 <a:solidFill>
                   <a:srgbClr val="1B4A73"/>
                 </a:solidFill>
-                <a:latin typeface="Nanum Gothic"/>
-                <a:ea typeface="Nanum Gothic"/>
-                <a:cs typeface="Nanum Gothic"/>
+                <a:latin typeface="NanumGothic"/>
+                <a:ea typeface="NanumGothic"/>
+                <a:cs typeface="NanumGothic"/>
               </a:rPr>
               <a:t>가입 전 예방</a:t>
             </a:r>
@@ -6094,13 +6268,14 @@
           <a:lstStyle xmlns:a="http://schemas.openxmlformats.org/drawingml/2006/main"/>
           <a:p xmlns:a="http://schemas.openxmlformats.org/drawingml/2006/main">
             <a:pPr algn="l">
+              <a:buNone/>
               <a:defRPr sz="1950" b="0">
                 <a:solidFill>
                   <a:srgbClr val="111820"/>
                 </a:solidFill>
-                <a:latin typeface="Nanum Gothic"/>
-                <a:ea typeface="Nanum Gothic"/>
-                <a:cs typeface="Nanum Gothic"/>
+                <a:latin typeface="NanumGothic"/>
+                <a:ea typeface="NanumGothic"/>
+                <a:cs typeface="NanumGothic"/>
               </a:defRPr>
             </a:pPr>
             <a:r>
@@ -6108,22 +6283,23 @@
                 <a:solidFill>
                   <a:srgbClr val="111820"/>
                 </a:solidFill>
-                <a:latin typeface="Nanum Gothic"/>
-                <a:ea typeface="Nanum Gothic"/>
-                <a:cs typeface="Nanum Gothic"/>
-              </a:rPr>
-              <a:t>약관·문자·상담 내용을 읽고</a:t>
-            </a:r>
-          </a:p>
-          <a:p xmlns:a="http://schemas.openxmlformats.org/drawingml/2006/main">
-            <a:pPr algn="l">
+                <a:latin typeface="NanumGothic"/>
+                <a:ea typeface="NanumGothic"/>
+                <a:cs typeface="NanumGothic"/>
+              </a:rPr>
+              <a:t>문자·약관·상담을 넣으면</a:t>
+            </a:r>
+          </a:p>
+          <a:p xmlns:a="http://schemas.openxmlformats.org/drawingml/2006/main">
+            <a:pPr algn="l">
+              <a:buNone/>
               <a:defRPr sz="1950" b="0">
                 <a:solidFill>
                   <a:srgbClr val="111820"/>
                 </a:solidFill>
-                <a:latin typeface="Nanum Gothic"/>
-                <a:ea typeface="Nanum Gothic"/>
-                <a:cs typeface="Nanum Gothic"/>
+                <a:latin typeface="NanumGothic"/>
+                <a:ea typeface="NanumGothic"/>
+                <a:cs typeface="NanumGothic"/>
               </a:defRPr>
             </a:pPr>
             <a:r>
@@ -6131,22 +6307,23 @@
                 <a:solidFill>
                   <a:srgbClr val="111820"/>
                 </a:solidFill>
-                <a:latin typeface="Nanum Gothic"/>
-                <a:ea typeface="Nanum Gothic"/>
-                <a:cs typeface="Nanum Gothic"/>
-              </a:rPr>
-              <a:t>위험 표현, 이유, 확인 질문을</a:t>
-            </a:r>
-          </a:p>
-          <a:p xmlns:a="http://schemas.openxmlformats.org/drawingml/2006/main">
-            <a:pPr algn="l">
+                <a:latin typeface="NanumGothic"/>
+                <a:ea typeface="NanumGothic"/>
+                <a:cs typeface="NanumGothic"/>
+              </a:rPr>
+              <a:t>위험 단어, 쉬운 설명, 확인 질문으로</a:t>
+            </a:r>
+          </a:p>
+          <a:p xmlns:a="http://schemas.openxmlformats.org/drawingml/2006/main">
+            <a:pPr algn="l">
+              <a:buNone/>
               <a:defRPr sz="1950" b="0">
                 <a:solidFill>
                   <a:srgbClr val="111820"/>
                 </a:solidFill>
-                <a:latin typeface="Nanum Gothic"/>
-                <a:ea typeface="Nanum Gothic"/>
-                <a:cs typeface="Nanum Gothic"/>
+                <a:latin typeface="NanumGothic"/>
+                <a:ea typeface="NanumGothic"/>
+                <a:cs typeface="NanumGothic"/>
               </a:defRPr>
             </a:pPr>
             <a:r>
@@ -6154,11 +6331,11 @@
                 <a:solidFill>
                   <a:srgbClr val="111820"/>
                 </a:solidFill>
-                <a:latin typeface="Nanum Gothic"/>
-                <a:ea typeface="Nanum Gothic"/>
-                <a:cs typeface="Nanum Gothic"/>
-              </a:rPr>
-              <a:t>한 화면에서 보여줍니다.</a:t>
+                <a:latin typeface="NanumGothic"/>
+                <a:ea typeface="NanumGothic"/>
+                <a:cs typeface="NanumGothic"/>
+              </a:rPr>
+              <a:t>가입 전 멈춰 볼 이유를 보여줍니다.</a:t>
             </a:r>
           </a:p>
         </p:txBody>
@@ -6196,13 +6373,14 @@
           <a:lstStyle xmlns:a="http://schemas.openxmlformats.org/drawingml/2006/main"/>
           <a:p xmlns:a="http://schemas.openxmlformats.org/drawingml/2006/main">
             <a:pPr algn="l">
+              <a:buNone/>
               <a:defRPr sz="2475" b="1">
                 <a:solidFill>
                   <a:srgbClr val="B53225"/>
                 </a:solidFill>
-                <a:latin typeface="Nanum Gothic"/>
-                <a:ea typeface="Nanum Gothic"/>
-                <a:cs typeface="Nanum Gothic"/>
+                <a:latin typeface="NanumGothic"/>
+                <a:ea typeface="NanumGothic"/>
+                <a:cs typeface="NanumGothic"/>
               </a:defRPr>
             </a:pPr>
             <a:r>
@@ -6210,9 +6388,9 @@
                 <a:solidFill>
                   <a:srgbClr val="B53225"/>
                 </a:solidFill>
-                <a:latin typeface="Nanum Gothic"/>
-                <a:ea typeface="Nanum Gothic"/>
-                <a:cs typeface="Nanum Gothic"/>
+                <a:latin typeface="NanumGothic"/>
+                <a:ea typeface="NanumGothic"/>
+                <a:cs typeface="NanumGothic"/>
               </a:rPr>
               <a:t>사고 후 대응</a:t>
             </a:r>
@@ -6252,13 +6430,14 @@
           <a:lstStyle xmlns:a="http://schemas.openxmlformats.org/drawingml/2006/main"/>
           <a:p xmlns:a="http://schemas.openxmlformats.org/drawingml/2006/main">
             <a:pPr algn="l">
+              <a:buNone/>
               <a:defRPr sz="1950" b="0">
                 <a:solidFill>
                   <a:srgbClr val="111820"/>
                 </a:solidFill>
-                <a:latin typeface="Nanum Gothic"/>
-                <a:ea typeface="Nanum Gothic"/>
-                <a:cs typeface="Nanum Gothic"/>
+                <a:latin typeface="NanumGothic"/>
+                <a:ea typeface="NanumGothic"/>
+                <a:cs typeface="NanumGothic"/>
               </a:defRPr>
             </a:pPr>
             <a:r>
@@ -6266,22 +6445,23 @@
                 <a:solidFill>
                   <a:srgbClr val="111820"/>
                 </a:solidFill>
-                <a:latin typeface="Nanum Gothic"/>
-                <a:ea typeface="Nanum Gothic"/>
-                <a:cs typeface="Nanum Gothic"/>
-              </a:rPr>
-              <a:t>착오송금·보이스피싱 상황을 분류하고</a:t>
-            </a:r>
-          </a:p>
-          <a:p xmlns:a="http://schemas.openxmlformats.org/drawingml/2006/main">
-            <a:pPr algn="l">
+                <a:latin typeface="NanumGothic"/>
+                <a:ea typeface="NanumGothic"/>
+                <a:cs typeface="NanumGothic"/>
+              </a:rPr>
+              <a:t>피해 유형을 나눈 뒤</a:t>
+            </a:r>
+          </a:p>
+          <a:p xmlns:a="http://schemas.openxmlformats.org/drawingml/2006/main">
+            <a:pPr algn="l">
+              <a:buNone/>
               <a:defRPr sz="1950" b="0">
                 <a:solidFill>
                   <a:srgbClr val="111820"/>
                 </a:solidFill>
-                <a:latin typeface="Nanum Gothic"/>
-                <a:ea typeface="Nanum Gothic"/>
-                <a:cs typeface="Nanum Gothic"/>
+                <a:latin typeface="NanumGothic"/>
+                <a:ea typeface="NanumGothic"/>
+                <a:cs typeface="NanumGothic"/>
               </a:defRPr>
             </a:pPr>
             <a:r>
@@ -6289,22 +6469,23 @@
                 <a:solidFill>
                   <a:srgbClr val="111820"/>
                 </a:solidFill>
-                <a:latin typeface="Nanum Gothic"/>
-                <a:ea typeface="Nanum Gothic"/>
-                <a:cs typeface="Nanum Gothic"/>
-              </a:rPr>
-              <a:t>전화, 행동 순서, 증빙, 민원 초안을</a:t>
-            </a:r>
-          </a:p>
-          <a:p xmlns:a="http://schemas.openxmlformats.org/drawingml/2006/main">
-            <a:pPr algn="l">
+                <a:latin typeface="NanumGothic"/>
+                <a:ea typeface="NanumGothic"/>
+                <a:cs typeface="NanumGothic"/>
+              </a:rPr>
+              <a:t>전화, 증빙, 민원 초안을</a:t>
+            </a:r>
+          </a:p>
+          <a:p xmlns:a="http://schemas.openxmlformats.org/drawingml/2006/main">
+            <a:pPr algn="l">
+              <a:buNone/>
               <a:defRPr sz="1950" b="0">
                 <a:solidFill>
                   <a:srgbClr val="111820"/>
                 </a:solidFill>
-                <a:latin typeface="Nanum Gothic"/>
-                <a:ea typeface="Nanum Gothic"/>
-                <a:cs typeface="Nanum Gothic"/>
+                <a:latin typeface="NanumGothic"/>
+                <a:ea typeface="NanumGothic"/>
+                <a:cs typeface="NanumGothic"/>
               </a:defRPr>
             </a:pPr>
             <a:r>
@@ -6312,18 +6493,18 @@
                 <a:solidFill>
                   <a:srgbClr val="111820"/>
                 </a:solidFill>
-                <a:latin typeface="Nanum Gothic"/>
-                <a:ea typeface="Nanum Gothic"/>
-                <a:cs typeface="Nanum Gothic"/>
-              </a:rPr>
-              <a:t>골든타임 기준으로 안내합니다.</a:t>
+                <a:latin typeface="NanumGothic"/>
+                <a:ea typeface="NanumGothic"/>
+                <a:cs typeface="NanumGothic"/>
+              </a:rPr>
+              <a:t>시간 순서대로 바로 연결합니다.</a:t>
             </a:r>
           </a:p>
         </p:txBody>
       </p:sp>
       <p:cxnSp>
         <p:nvCxnSpPr>
-          <p:cNvPr id="24" name="thesis-bridge"/>
+          <p:cNvPr id="68" name="thesis-bridge"/>
           <p:cNvCxnSpPr/>
           <p:nvPr/>
         </p:nvCxnSpPr>
@@ -6376,13 +6557,14 @@
           <a:lstStyle xmlns:a="http://schemas.openxmlformats.org/drawingml/2006/main"/>
           <a:p xmlns:a="http://schemas.openxmlformats.org/drawingml/2006/main">
             <a:pPr algn="ctr">
+              <a:buNone/>
               <a:defRPr sz="1500" b="1">
                 <a:solidFill>
                   <a:srgbClr val="0B6B57"/>
                 </a:solidFill>
-                <a:latin typeface="Nanum Gothic"/>
-                <a:ea typeface="Nanum Gothic"/>
-                <a:cs typeface="Nanum Gothic"/>
+                <a:latin typeface="NanumGothic"/>
+                <a:ea typeface="NanumGothic"/>
+                <a:cs typeface="NanumGothic"/>
               </a:defRPr>
             </a:pPr>
             <a:r>
@@ -6390,9 +6572,9 @@
                 <a:solidFill>
                   <a:srgbClr val="0B6B57"/>
                 </a:solidFill>
-                <a:latin typeface="Nanum Gothic"/>
-                <a:ea typeface="Nanum Gothic"/>
-                <a:cs typeface="Nanum Gothic"/>
+                <a:latin typeface="NanumGothic"/>
+                <a:ea typeface="NanumGothic"/>
+                <a:cs typeface="NanumGothic"/>
               </a:rPr>
               <a:t>보호자 공유</a:t>
             </a:r>
@@ -6432,13 +6614,14 @@
           <a:lstStyle xmlns:a="http://schemas.openxmlformats.org/drawingml/2006/main"/>
           <a:p xmlns:a="http://schemas.openxmlformats.org/drawingml/2006/main">
             <a:pPr algn="l">
+              <a:buNone/>
               <a:defRPr sz="1800" b="1">
                 <a:solidFill>
                   <a:srgbClr val="111820"/>
                 </a:solidFill>
-                <a:latin typeface="Nanum Gothic"/>
-                <a:ea typeface="Nanum Gothic"/>
-                <a:cs typeface="Nanum Gothic"/>
+                <a:latin typeface="NanumGothic"/>
+                <a:ea typeface="NanumGothic"/>
+                <a:cs typeface="NanumGothic"/>
               </a:defRPr>
             </a:pPr>
             <a:r>
@@ -6446,11 +6629,11 @@
                 <a:solidFill>
                   <a:srgbClr val="111820"/>
                 </a:solidFill>
-                <a:latin typeface="Nanum Gothic"/>
-                <a:ea typeface="Nanum Gothic"/>
-                <a:cs typeface="Nanum Gothic"/>
-              </a:rPr>
-              <a:t>차별점: 피해 이후의 민원 도우미에 머물지 않고, 가입 전 경고부터 사고 후 권리구제까지 이어집니다.</a:t>
+                <a:latin typeface="NanumGothic"/>
+                <a:ea typeface="NanumGothic"/>
+                <a:cs typeface="NanumGothic"/>
+              </a:rPr>
+              <a:t>차별점: 판단만 하는 챗봇이 아니라, 고령층이 바로 전화하고 확인하고 기록하게 만드는 실행형 보호 에이전트입니다.</a:t>
             </a:r>
           </a:p>
         </p:txBody>
@@ -6510,13 +6693,14 @@
           <a:lstStyle xmlns:a="http://schemas.openxmlformats.org/drawingml/2006/main"/>
           <a:p xmlns:a="http://schemas.openxmlformats.org/drawingml/2006/main">
             <a:pPr algn="l">
+              <a:buNone/>
               <a:defRPr sz="1125" b="1">
                 <a:solidFill>
                   <a:srgbClr val="0B6B57"/>
                 </a:solidFill>
-                <a:latin typeface="Nanum Gothic"/>
-                <a:ea typeface="Nanum Gothic"/>
-                <a:cs typeface="Nanum Gothic"/>
+                <a:latin typeface="NanumGothic"/>
+                <a:ea typeface="NanumGothic"/>
+                <a:cs typeface="NanumGothic"/>
               </a:defRPr>
             </a:pPr>
             <a:r>
@@ -6524,9 +6708,9 @@
                 <a:solidFill>
                   <a:srgbClr val="0B6B57"/>
                 </a:solidFill>
-                <a:latin typeface="Nanum Gothic"/>
-                <a:ea typeface="Nanum Gothic"/>
-                <a:cs typeface="Nanum Gothic"/>
+                <a:latin typeface="NanumGothic"/>
+                <a:ea typeface="NanumGothic"/>
+                <a:cs typeface="NanumGothic"/>
               </a:rPr>
               <a:t>사용 흐름</a:t>
             </a:r>
@@ -6566,13 +6750,14 @@
           <a:lstStyle xmlns:a="http://schemas.openxmlformats.org/drawingml/2006/main"/>
           <a:p xmlns:a="http://schemas.openxmlformats.org/drawingml/2006/main">
             <a:pPr algn="l">
+              <a:buNone/>
               <a:defRPr sz="3525" b="1">
                 <a:solidFill>
                   <a:srgbClr val="111820"/>
                 </a:solidFill>
-                <a:latin typeface="Nanum Gothic"/>
-                <a:ea typeface="Nanum Gothic"/>
-                <a:cs typeface="Nanum Gothic"/>
+                <a:latin typeface="NanumGothic"/>
+                <a:ea typeface="NanumGothic"/>
+                <a:cs typeface="NanumGothic"/>
               </a:defRPr>
             </a:pPr>
             <a:r>
@@ -6580,9 +6765,9 @@
                 <a:solidFill>
                   <a:srgbClr val="111820"/>
                 </a:solidFill>
-                <a:latin typeface="Nanum Gothic"/>
-                <a:ea typeface="Nanum Gothic"/>
-                <a:cs typeface="Nanum Gothic"/>
+                <a:latin typeface="NanumGothic"/>
+                <a:ea typeface="NanumGothic"/>
+                <a:cs typeface="NanumGothic"/>
               </a:rPr>
               <a:t>어르신은 세 단계만 따라가면 됩니다</a:t>
             </a:r>
@@ -6591,7 +6776,7 @@
       </p:sp>
       <p:cxnSp>
         <p:nvCxnSpPr>
-          <p:cNvPr id="18" name="rule-4"/>
+          <p:cNvPr id="38" name="rule-4"/>
           <p:cNvCxnSpPr/>
           <p:nvPr/>
         </p:nvCxnSpPr>
@@ -6644,13 +6829,14 @@
           <a:lstStyle xmlns:a="http://schemas.openxmlformats.org/drawingml/2006/main"/>
           <a:p xmlns:a="http://schemas.openxmlformats.org/drawingml/2006/main">
             <a:pPr algn="r">
+              <a:buNone/>
               <a:defRPr sz="975" b="0">
                 <a:solidFill>
                   <a:srgbClr val="58636F"/>
                 </a:solidFill>
-                <a:latin typeface="Nanum Gothic"/>
-                <a:ea typeface="Nanum Gothic"/>
-                <a:cs typeface="Nanum Gothic"/>
+                <a:latin typeface="NanumGothic"/>
+                <a:ea typeface="NanumGothic"/>
+                <a:cs typeface="NanumGothic"/>
               </a:defRPr>
             </a:pPr>
             <a:r>
@@ -6658,9 +6844,9 @@
                 <a:solidFill>
                   <a:srgbClr val="58636F"/>
                 </a:solidFill>
-                <a:latin typeface="Nanum Gothic"/>
-                <a:ea typeface="Nanum Gothic"/>
-                <a:cs typeface="Nanum Gothic"/>
+                <a:latin typeface="NanumGothic"/>
+                <a:ea typeface="NanumGothic"/>
+                <a:cs typeface="NanumGothic"/>
               </a:rPr>
               <a:t>04</a:t>
             </a:r>
@@ -6669,7 +6855,7 @@
       </p:sp>
       <p:cxnSp>
         <p:nvCxnSpPr>
-          <p:cNvPr id="20" name="journey-line"/>
+          <p:cNvPr id="40" name="journey-line"/>
           <p:cNvCxnSpPr/>
           <p:nvPr/>
         </p:nvCxnSpPr>
@@ -6719,6 +6905,11 @@
             <a:prstDash val="solid"/>
           </a:ln>
         </p:spPr>
+        <p:txBody>
+          <a:bodyPr xmlns:a="http://schemas.openxmlformats.org/drawingml/2006/main"/>
+          <a:lstStyle xmlns:a="http://schemas.openxmlformats.org/drawingml/2006/main"/>
+          <a:p xmlns:a="http://schemas.openxmlformats.org/drawingml/2006/main"/>
+        </p:txBody>
       </p:sp>
       <p:sp>
         <p:nvSpPr>
@@ -6753,13 +6944,14 @@
           <a:lstStyle xmlns:a="http://schemas.openxmlformats.org/drawingml/2006/main"/>
           <a:p xmlns:a="http://schemas.openxmlformats.org/drawingml/2006/main">
             <a:pPr algn="l">
+              <a:buNone/>
               <a:defRPr sz="2325" b="1">
                 <a:solidFill>
                   <a:srgbClr val="111820"/>
                 </a:solidFill>
-                <a:latin typeface="Nanum Gothic"/>
-                <a:ea typeface="Nanum Gothic"/>
-                <a:cs typeface="Nanum Gothic"/>
+                <a:latin typeface="NanumGothic"/>
+                <a:ea typeface="NanumGothic"/>
+                <a:cs typeface="NanumGothic"/>
               </a:defRPr>
             </a:pPr>
             <a:r>
@@ -6767,9 +6959,9 @@
                 <a:solidFill>
                   <a:srgbClr val="111820"/>
                 </a:solidFill>
-                <a:latin typeface="Nanum Gothic"/>
-                <a:ea typeface="Nanum Gothic"/>
-                <a:cs typeface="Nanum Gothic"/>
+                <a:latin typeface="NanumGothic"/>
+                <a:ea typeface="NanumGothic"/>
+                <a:cs typeface="NanumGothic"/>
               </a:rPr>
               <a:t>1. 넣기</a:t>
             </a:r>
@@ -6809,13 +7001,14 @@
           <a:lstStyle xmlns:a="http://schemas.openxmlformats.org/drawingml/2006/main"/>
           <a:p xmlns:a="http://schemas.openxmlformats.org/drawingml/2006/main">
             <a:pPr algn="l">
+              <a:buNone/>
               <a:defRPr sz="1800" b="0">
                 <a:solidFill>
                   <a:srgbClr val="58636F"/>
                 </a:solidFill>
-                <a:latin typeface="Nanum Gothic"/>
-                <a:ea typeface="Nanum Gothic"/>
-                <a:cs typeface="Nanum Gothic"/>
+                <a:latin typeface="NanumGothic"/>
+                <a:ea typeface="NanumGothic"/>
+                <a:cs typeface="NanumGothic"/>
               </a:defRPr>
             </a:pPr>
             <a:r>
@@ -6823,9 +7016,9 @@
                 <a:solidFill>
                   <a:srgbClr val="58636F"/>
                 </a:solidFill>
-                <a:latin typeface="Nanum Gothic"/>
-                <a:ea typeface="Nanum Gothic"/>
-                <a:cs typeface="Nanum Gothic"/>
+                <a:latin typeface="NanumGothic"/>
+                <a:ea typeface="NanumGothic"/>
+                <a:cs typeface="NanumGothic"/>
               </a:rPr>
               <a:t>사진·PDF·문자·음성</a:t>
             </a:r>
@@ -6862,6 +7055,11 @@
             <a:prstDash val="solid"/>
           </a:ln>
         </p:spPr>
+        <p:txBody>
+          <a:bodyPr xmlns:a="http://schemas.openxmlformats.org/drawingml/2006/main"/>
+          <a:lstStyle xmlns:a="http://schemas.openxmlformats.org/drawingml/2006/main"/>
+          <a:p xmlns:a="http://schemas.openxmlformats.org/drawingml/2006/main"/>
+        </p:txBody>
       </p:sp>
       <p:sp>
         <p:nvSpPr>
@@ -6896,13 +7094,14 @@
           <a:lstStyle xmlns:a="http://schemas.openxmlformats.org/drawingml/2006/main"/>
           <a:p xmlns:a="http://schemas.openxmlformats.org/drawingml/2006/main">
             <a:pPr algn="l">
+              <a:buNone/>
               <a:defRPr sz="2325" b="1">
                 <a:solidFill>
                   <a:srgbClr val="111820"/>
                 </a:solidFill>
-                <a:latin typeface="Nanum Gothic"/>
-                <a:ea typeface="Nanum Gothic"/>
-                <a:cs typeface="Nanum Gothic"/>
+                <a:latin typeface="NanumGothic"/>
+                <a:ea typeface="NanumGothic"/>
+                <a:cs typeface="NanumGothic"/>
               </a:defRPr>
             </a:pPr>
             <a:r>
@@ -6910,9 +7109,9 @@
                 <a:solidFill>
                   <a:srgbClr val="111820"/>
                 </a:solidFill>
-                <a:latin typeface="Nanum Gothic"/>
-                <a:ea typeface="Nanum Gothic"/>
-                <a:cs typeface="Nanum Gothic"/>
+                <a:latin typeface="NanumGothic"/>
+                <a:ea typeface="NanumGothic"/>
+                <a:cs typeface="NanumGothic"/>
               </a:rPr>
               <a:t>2. 이해하기</a:t>
             </a:r>
@@ -6952,13 +7151,14 @@
           <a:lstStyle xmlns:a="http://schemas.openxmlformats.org/drawingml/2006/main"/>
           <a:p xmlns:a="http://schemas.openxmlformats.org/drawingml/2006/main">
             <a:pPr algn="l">
+              <a:buNone/>
               <a:defRPr sz="1800" b="0">
                 <a:solidFill>
                   <a:srgbClr val="58636F"/>
                 </a:solidFill>
-                <a:latin typeface="Nanum Gothic"/>
-                <a:ea typeface="Nanum Gothic"/>
-                <a:cs typeface="Nanum Gothic"/>
+                <a:latin typeface="NanumGothic"/>
+                <a:ea typeface="NanumGothic"/>
+                <a:cs typeface="NanumGothic"/>
               </a:defRPr>
             </a:pPr>
             <a:r>
@@ -6966,9 +7166,9 @@
                 <a:solidFill>
                   <a:srgbClr val="58636F"/>
                 </a:solidFill>
-                <a:latin typeface="Nanum Gothic"/>
-                <a:ea typeface="Nanum Gothic"/>
-                <a:cs typeface="Nanum Gothic"/>
+                <a:latin typeface="NanumGothic"/>
+                <a:ea typeface="NanumGothic"/>
+                <a:cs typeface="NanumGothic"/>
               </a:rPr>
               <a:t>쉬운 말·위험 이유·질문</a:t>
             </a:r>
@@ -7005,6 +7205,11 @@
             <a:prstDash val="solid"/>
           </a:ln>
         </p:spPr>
+        <p:txBody>
+          <a:bodyPr xmlns:a="http://schemas.openxmlformats.org/drawingml/2006/main"/>
+          <a:lstStyle xmlns:a="http://schemas.openxmlformats.org/drawingml/2006/main"/>
+          <a:p xmlns:a="http://schemas.openxmlformats.org/drawingml/2006/main"/>
+        </p:txBody>
       </p:sp>
       <p:sp>
         <p:nvSpPr>
@@ -7039,13 +7244,14 @@
           <a:lstStyle xmlns:a="http://schemas.openxmlformats.org/drawingml/2006/main"/>
           <a:p xmlns:a="http://schemas.openxmlformats.org/drawingml/2006/main">
             <a:pPr algn="l">
+              <a:buNone/>
               <a:defRPr sz="2325" b="1">
                 <a:solidFill>
                   <a:srgbClr val="111820"/>
                 </a:solidFill>
-                <a:latin typeface="Nanum Gothic"/>
-                <a:ea typeface="Nanum Gothic"/>
-                <a:cs typeface="Nanum Gothic"/>
+                <a:latin typeface="NanumGothic"/>
+                <a:ea typeface="NanumGothic"/>
+                <a:cs typeface="NanumGothic"/>
               </a:defRPr>
             </a:pPr>
             <a:r>
@@ -7053,9 +7259,9 @@
                 <a:solidFill>
                   <a:srgbClr val="111820"/>
                 </a:solidFill>
-                <a:latin typeface="Nanum Gothic"/>
-                <a:ea typeface="Nanum Gothic"/>
-                <a:cs typeface="Nanum Gothic"/>
+                <a:latin typeface="NanumGothic"/>
+                <a:ea typeface="NanumGothic"/>
+                <a:cs typeface="NanumGothic"/>
               </a:rPr>
               <a:t>3. 행동하기</a:t>
             </a:r>
@@ -7095,13 +7301,14 @@
           <a:lstStyle xmlns:a="http://schemas.openxmlformats.org/drawingml/2006/main"/>
           <a:p xmlns:a="http://schemas.openxmlformats.org/drawingml/2006/main">
             <a:pPr algn="l">
+              <a:buNone/>
               <a:defRPr sz="1800" b="0">
                 <a:solidFill>
                   <a:srgbClr val="58636F"/>
                 </a:solidFill>
-                <a:latin typeface="Nanum Gothic"/>
-                <a:ea typeface="Nanum Gothic"/>
-                <a:cs typeface="Nanum Gothic"/>
+                <a:latin typeface="NanumGothic"/>
+                <a:ea typeface="NanumGothic"/>
+                <a:cs typeface="NanumGothic"/>
               </a:defRPr>
             </a:pPr>
             <a:r>
@@ -7109,9 +7316,9 @@
                 <a:solidFill>
                   <a:srgbClr val="58636F"/>
                 </a:solidFill>
-                <a:latin typeface="Nanum Gothic"/>
-                <a:ea typeface="Nanum Gothic"/>
-                <a:cs typeface="Nanum Gothic"/>
+                <a:latin typeface="NanumGothic"/>
+                <a:ea typeface="NanumGothic"/>
+                <a:cs typeface="NanumGothic"/>
               </a:rPr>
               <a:t>전화·서류·민원·공유</a:t>
             </a:r>
@@ -7151,13 +7358,14 @@
           <a:lstStyle xmlns:a="http://schemas.openxmlformats.org/drawingml/2006/main"/>
           <a:p xmlns:a="http://schemas.openxmlformats.org/drawingml/2006/main">
             <a:pPr algn="l">
+              <a:buNone/>
               <a:defRPr sz="1875" b="1">
                 <a:solidFill>
                   <a:srgbClr val="0B6B57"/>
                 </a:solidFill>
-                <a:latin typeface="Nanum Gothic"/>
-                <a:ea typeface="Nanum Gothic"/>
-                <a:cs typeface="Nanum Gothic"/>
+                <a:latin typeface="NanumGothic"/>
+                <a:ea typeface="NanumGothic"/>
+                <a:cs typeface="NanumGothic"/>
               </a:defRPr>
             </a:pPr>
             <a:r>
@@ -7165,9 +7373,9 @@
                 <a:solidFill>
                   <a:srgbClr val="0B6B57"/>
                 </a:solidFill>
-                <a:latin typeface="Nanum Gothic"/>
-                <a:ea typeface="Nanum Gothic"/>
-                <a:cs typeface="Nanum Gothic"/>
+                <a:latin typeface="NanumGothic"/>
+                <a:ea typeface="NanumGothic"/>
+                <a:cs typeface="NanumGothic"/>
               </a:rPr>
               <a:t>분석 결과를 그대로 믿게 하지 않고, 사용자가 원문을 고치고 공식 근거를 확인한 뒤 행동하도록 설계했습니다.</a:t>
             </a:r>
@@ -7229,13 +7437,14 @@
           <a:lstStyle xmlns:a="http://schemas.openxmlformats.org/drawingml/2006/main"/>
           <a:p xmlns:a="http://schemas.openxmlformats.org/drawingml/2006/main">
             <a:pPr algn="l">
+              <a:buNone/>
               <a:defRPr sz="1125" b="1">
                 <a:solidFill>
                   <a:srgbClr val="0B6B57"/>
                 </a:solidFill>
-                <a:latin typeface="Nanum Gothic"/>
-                <a:ea typeface="Nanum Gothic"/>
-                <a:cs typeface="Nanum Gothic"/>
+                <a:latin typeface="NanumGothic"/>
+                <a:ea typeface="NanumGothic"/>
+                <a:cs typeface="NanumGothic"/>
               </a:defRPr>
             </a:pPr>
             <a:r>
@@ -7243,11 +7452,11 @@
                 <a:solidFill>
                   <a:srgbClr val="0B6B57"/>
                 </a:solidFill>
-                <a:latin typeface="Nanum Gothic"/>
-                <a:ea typeface="Nanum Gothic"/>
-                <a:cs typeface="Nanum Gothic"/>
-              </a:rPr>
-              <a:t>핵심 기능 1 · 가입 전 확인</a:t>
+                <a:latin typeface="NanumGothic"/>
+                <a:ea typeface="NanumGothic"/>
+                <a:cs typeface="NanumGothic"/>
+              </a:rPr>
+              <a:t>핵심 기능 1 · 사전 예방</a:t>
             </a:r>
           </a:p>
         </p:txBody>
@@ -7285,13 +7494,14 @@
           <a:lstStyle xmlns:a="http://schemas.openxmlformats.org/drawingml/2006/main"/>
           <a:p xmlns:a="http://schemas.openxmlformats.org/drawingml/2006/main">
             <a:pPr algn="l">
+              <a:buNone/>
               <a:defRPr sz="3525" b="1">
                 <a:solidFill>
                   <a:srgbClr val="111820"/>
                 </a:solidFill>
-                <a:latin typeface="Nanum Gothic"/>
-                <a:ea typeface="Nanum Gothic"/>
-                <a:cs typeface="Nanum Gothic"/>
+                <a:latin typeface="NanumGothic"/>
+                <a:ea typeface="NanumGothic"/>
+                <a:cs typeface="NanumGothic"/>
               </a:defRPr>
             </a:pPr>
             <a:r>
@@ -7299,18 +7509,18 @@
                 <a:solidFill>
                   <a:srgbClr val="111820"/>
                 </a:solidFill>
-                <a:latin typeface="Nanum Gothic"/>
-                <a:ea typeface="Nanum Gothic"/>
-                <a:cs typeface="Nanum Gothic"/>
-              </a:rPr>
-              <a:t>위험 문장과 ‘왜’와 ‘질문’을 함께 보여줍니다</a:t>
+                <a:latin typeface="NanumGothic"/>
+                <a:ea typeface="NanumGothic"/>
+                <a:cs typeface="NanumGothic"/>
+              </a:rPr>
+              <a:t>위험을 단정하지 않고, 확인할 이유와 질문을 줍니다</a:t>
             </a:r>
           </a:p>
         </p:txBody>
       </p:sp>
       <p:cxnSp>
         <p:nvCxnSpPr>
-          <p:cNvPr id="17" name="rule-5"/>
+          <p:cNvPr id="33" name="rule-5"/>
           <p:cNvCxnSpPr/>
           <p:nvPr/>
         </p:nvCxnSpPr>
@@ -7363,13 +7573,14 @@
           <a:lstStyle xmlns:a="http://schemas.openxmlformats.org/drawingml/2006/main"/>
           <a:p xmlns:a="http://schemas.openxmlformats.org/drawingml/2006/main">
             <a:pPr algn="r">
+              <a:buNone/>
               <a:defRPr sz="975" b="0">
                 <a:solidFill>
                   <a:srgbClr val="58636F"/>
                 </a:solidFill>
-                <a:latin typeface="Nanum Gothic"/>
-                <a:ea typeface="Nanum Gothic"/>
-                <a:cs typeface="Nanum Gothic"/>
+                <a:latin typeface="NanumGothic"/>
+                <a:ea typeface="NanumGothic"/>
+                <a:cs typeface="NanumGothic"/>
               </a:defRPr>
             </a:pPr>
             <a:r>
@@ -7377,9 +7588,9 @@
                 <a:solidFill>
                   <a:srgbClr val="58636F"/>
                 </a:solidFill>
-                <a:latin typeface="Nanum Gothic"/>
-                <a:ea typeface="Nanum Gothic"/>
-                <a:cs typeface="Nanum Gothic"/>
+                <a:latin typeface="NanumGothic"/>
+                <a:ea typeface="NanumGothic"/>
+                <a:cs typeface="NanumGothic"/>
               </a:rPr>
               <a:t>05</a:t>
             </a:r>
@@ -7419,13 +7630,14 @@
           <a:lstStyle xmlns:a="http://schemas.openxmlformats.org/drawingml/2006/main"/>
           <a:p xmlns:a="http://schemas.openxmlformats.org/drawingml/2006/main">
             <a:pPr algn="l">
+              <a:buNone/>
               <a:defRPr sz="1800" b="1">
                 <a:solidFill>
                   <a:srgbClr val="0B6B57"/>
                 </a:solidFill>
-                <a:latin typeface="Nanum Gothic"/>
-                <a:ea typeface="Nanum Gothic"/>
-                <a:cs typeface="Nanum Gothic"/>
+                <a:latin typeface="NanumGothic"/>
+                <a:ea typeface="NanumGothic"/>
+                <a:cs typeface="NanumGothic"/>
               </a:defRPr>
             </a:pPr>
             <a:r>
@@ -7433,9 +7645,9 @@
                 <a:solidFill>
                   <a:srgbClr val="0B6B57"/>
                 </a:solidFill>
-                <a:latin typeface="Nanum Gothic"/>
-                <a:ea typeface="Nanum Gothic"/>
-                <a:cs typeface="Nanum Gothic"/>
+                <a:latin typeface="NanumGothic"/>
+                <a:ea typeface="NanumGothic"/>
+                <a:cs typeface="NanumGothic"/>
               </a:rPr>
               <a:t>•</a:t>
             </a:r>
@@ -7475,13 +7687,14 @@
           <a:lstStyle xmlns:a="http://schemas.openxmlformats.org/drawingml/2006/main"/>
           <a:p xmlns:a="http://schemas.openxmlformats.org/drawingml/2006/main">
             <a:pPr algn="l">
+              <a:buNone/>
               <a:defRPr sz="1800" b="0">
                 <a:solidFill>
                   <a:srgbClr val="111820"/>
                 </a:solidFill>
-                <a:latin typeface="Nanum Gothic"/>
-                <a:ea typeface="Nanum Gothic"/>
-                <a:cs typeface="Nanum Gothic"/>
+                <a:latin typeface="NanumGothic"/>
+                <a:ea typeface="NanumGothic"/>
+                <a:cs typeface="NanumGothic"/>
               </a:defRPr>
             </a:pPr>
             <a:r>
@@ -7489,11 +7702,11 @@
                 <a:solidFill>
                   <a:srgbClr val="111820"/>
                 </a:solidFill>
-                <a:latin typeface="Nanum Gothic"/>
-                <a:ea typeface="Nanum Gothic"/>
-                <a:cs typeface="Nanum Gothic"/>
-              </a:rPr>
-              <a:t>감지된 단어를 원문에서 색으로 표시</a:t>
+                <a:latin typeface="NanumGothic"/>
+                <a:ea typeface="NanumGothic"/>
+                <a:cs typeface="NanumGothic"/>
+              </a:rPr>
+              <a:t>위험 단어를 원문에서 바로 찾아 표시</a:t>
             </a:r>
           </a:p>
         </p:txBody>
@@ -7531,13 +7744,14 @@
           <a:lstStyle xmlns:a="http://schemas.openxmlformats.org/drawingml/2006/main"/>
           <a:p xmlns:a="http://schemas.openxmlformats.org/drawingml/2006/main">
             <a:pPr algn="l">
+              <a:buNone/>
               <a:defRPr sz="1800" b="1">
                 <a:solidFill>
                   <a:srgbClr val="0B6B57"/>
                 </a:solidFill>
-                <a:latin typeface="Nanum Gothic"/>
-                <a:ea typeface="Nanum Gothic"/>
-                <a:cs typeface="Nanum Gothic"/>
+                <a:latin typeface="NanumGothic"/>
+                <a:ea typeface="NanumGothic"/>
+                <a:cs typeface="NanumGothic"/>
               </a:defRPr>
             </a:pPr>
             <a:r>
@@ -7545,9 +7759,9 @@
                 <a:solidFill>
                   <a:srgbClr val="0B6B57"/>
                 </a:solidFill>
-                <a:latin typeface="Nanum Gothic"/>
-                <a:ea typeface="Nanum Gothic"/>
-                <a:cs typeface="Nanum Gothic"/>
+                <a:latin typeface="NanumGothic"/>
+                <a:ea typeface="NanumGothic"/>
+                <a:cs typeface="NanumGothic"/>
               </a:rPr>
               <a:t>•</a:t>
             </a:r>
@@ -7587,13 +7801,14 @@
           <a:lstStyle xmlns:a="http://schemas.openxmlformats.org/drawingml/2006/main"/>
           <a:p xmlns:a="http://schemas.openxmlformats.org/drawingml/2006/main">
             <a:pPr algn="l">
+              <a:buNone/>
               <a:defRPr sz="1800" b="0">
                 <a:solidFill>
                   <a:srgbClr val="111820"/>
                 </a:solidFill>
-                <a:latin typeface="Nanum Gothic"/>
-                <a:ea typeface="Nanum Gothic"/>
-                <a:cs typeface="Nanum Gothic"/>
+                <a:latin typeface="NanumGothic"/>
+                <a:ea typeface="NanumGothic"/>
+                <a:cs typeface="NanumGothic"/>
               </a:defRPr>
             </a:pPr>
             <a:r>
@@ -7601,11 +7816,11 @@
                 <a:solidFill>
                   <a:srgbClr val="111820"/>
                 </a:solidFill>
-                <a:latin typeface="Nanum Gothic"/>
-                <a:ea typeface="Nanum Gothic"/>
-                <a:cs typeface="Nanum Gothic"/>
-              </a:rPr>
-              <a:t>위험 확정 대신 ‘주의 후보·확인 필요’로 표현</a:t>
+                <a:latin typeface="NanumGothic"/>
+                <a:ea typeface="NanumGothic"/>
+                <a:cs typeface="NanumGothic"/>
+              </a:rPr>
+              <a:t>결과는 '확인 필요'와 '주의 후보'로 구분</a:t>
             </a:r>
           </a:p>
         </p:txBody>
@@ -7643,13 +7858,14 @@
           <a:lstStyle xmlns:a="http://schemas.openxmlformats.org/drawingml/2006/main"/>
           <a:p xmlns:a="http://schemas.openxmlformats.org/drawingml/2006/main">
             <a:pPr algn="l">
+              <a:buNone/>
               <a:defRPr sz="1800" b="1">
                 <a:solidFill>
                   <a:srgbClr val="0B6B57"/>
                 </a:solidFill>
-                <a:latin typeface="Nanum Gothic"/>
-                <a:ea typeface="Nanum Gothic"/>
-                <a:cs typeface="Nanum Gothic"/>
+                <a:latin typeface="NanumGothic"/>
+                <a:ea typeface="NanumGothic"/>
+                <a:cs typeface="NanumGothic"/>
               </a:defRPr>
             </a:pPr>
             <a:r>
@@ -7657,9 +7873,9 @@
                 <a:solidFill>
                   <a:srgbClr val="0B6B57"/>
                 </a:solidFill>
-                <a:latin typeface="Nanum Gothic"/>
-                <a:ea typeface="Nanum Gothic"/>
-                <a:cs typeface="Nanum Gothic"/>
+                <a:latin typeface="NanumGothic"/>
+                <a:ea typeface="NanumGothic"/>
+                <a:cs typeface="NanumGothic"/>
               </a:rPr>
               <a:t>•</a:t>
             </a:r>
@@ -7699,13 +7915,14 @@
           <a:lstStyle xmlns:a="http://schemas.openxmlformats.org/drawingml/2006/main"/>
           <a:p xmlns:a="http://schemas.openxmlformats.org/drawingml/2006/main">
             <a:pPr algn="l">
+              <a:buNone/>
               <a:defRPr sz="1800" b="0">
                 <a:solidFill>
                   <a:srgbClr val="111820"/>
                 </a:solidFill>
-                <a:latin typeface="Nanum Gothic"/>
-                <a:ea typeface="Nanum Gothic"/>
-                <a:cs typeface="Nanum Gothic"/>
+                <a:latin typeface="NanumGothic"/>
+                <a:ea typeface="NanumGothic"/>
+                <a:cs typeface="NanumGothic"/>
               </a:defRPr>
             </a:pPr>
             <a:r>
@@ -7713,11 +7930,11 @@
                 <a:solidFill>
                   <a:srgbClr val="111820"/>
                 </a:solidFill>
-                <a:latin typeface="Nanum Gothic"/>
-                <a:ea typeface="Nanum Gothic"/>
-                <a:cs typeface="Nanum Gothic"/>
-              </a:rPr>
-              <a:t>쉬운 설명과 직원에게 물어볼 질문 제공</a:t>
+                <a:latin typeface="NanumGothic"/>
+                <a:ea typeface="NanumGothic"/>
+                <a:cs typeface="NanumGothic"/>
+              </a:rPr>
+              <a:t>쉽게 풀고, 직원에게 물을 질문까지 제시</a:t>
             </a:r>
           </a:p>
         </p:txBody>
@@ -7755,13 +7972,14 @@
           <a:lstStyle xmlns:a="http://schemas.openxmlformats.org/drawingml/2006/main"/>
           <a:p xmlns:a="http://schemas.openxmlformats.org/drawingml/2006/main">
             <a:pPr algn="l">
+              <a:buNone/>
               <a:defRPr sz="1800" b="1">
                 <a:solidFill>
                   <a:srgbClr val="0B6B57"/>
                 </a:solidFill>
-                <a:latin typeface="Nanum Gothic"/>
-                <a:ea typeface="Nanum Gothic"/>
-                <a:cs typeface="Nanum Gothic"/>
+                <a:latin typeface="NanumGothic"/>
+                <a:ea typeface="NanumGothic"/>
+                <a:cs typeface="NanumGothic"/>
               </a:defRPr>
             </a:pPr>
             <a:r>
@@ -7769,9 +7987,9 @@
                 <a:solidFill>
                   <a:srgbClr val="0B6B57"/>
                 </a:solidFill>
-                <a:latin typeface="Nanum Gothic"/>
-                <a:ea typeface="Nanum Gothic"/>
-                <a:cs typeface="Nanum Gothic"/>
+                <a:latin typeface="NanumGothic"/>
+                <a:ea typeface="NanumGothic"/>
+                <a:cs typeface="NanumGothic"/>
               </a:rPr>
               <a:t>•</a:t>
             </a:r>
@@ -7811,13 +8029,14 @@
           <a:lstStyle xmlns:a="http://schemas.openxmlformats.org/drawingml/2006/main"/>
           <a:p xmlns:a="http://schemas.openxmlformats.org/drawingml/2006/main">
             <a:pPr algn="l">
+              <a:buNone/>
               <a:defRPr sz="1800" b="0">
                 <a:solidFill>
                   <a:srgbClr val="111820"/>
                 </a:solidFill>
-                <a:latin typeface="Nanum Gothic"/>
-                <a:ea typeface="Nanum Gothic"/>
-                <a:cs typeface="Nanum Gothic"/>
+                <a:latin typeface="NanumGothic"/>
+                <a:ea typeface="NanumGothic"/>
+                <a:cs typeface="NanumGothic"/>
               </a:defRPr>
             </a:pPr>
             <a:r>
@@ -7825,11 +8044,11 @@
                 <a:solidFill>
                   <a:srgbClr val="111820"/>
                 </a:solidFill>
-                <a:latin typeface="Nanum Gothic"/>
-                <a:ea typeface="Nanum Gothic"/>
-                <a:cs typeface="Nanum Gothic"/>
-              </a:rPr>
-              <a:t>출처명·발표일·원문 링크·적용 이유 표시</a:t>
+                <a:latin typeface="NanumGothic"/>
+                <a:ea typeface="NanumGothic"/>
+                <a:cs typeface="NanumGothic"/>
+              </a:rPr>
+              <a:t>공식 출처·발표일·원문 링크로 근거 공개</a:t>
             </a:r>
           </a:p>
         </p:txBody>
@@ -7866,23 +8085,31 @@
             <a:prstDash val="solid"/>
           </a:ln>
         </p:spPr>
+        <p:txBody>
+          <a:bodyPr xmlns:a="http://schemas.openxmlformats.org/drawingml/2006/main"/>
+          <a:lstStyle xmlns:a="http://schemas.openxmlformats.org/drawingml/2006/main"/>
+          <a:p xmlns:a="http://schemas.openxmlformats.org/drawingml/2006/main"/>
+        </p:txBody>
       </p:sp>
       <p:pic>
         <p:nvPicPr>
-          <p:cNvPr id="28" name=""/>
+          <p:cNvPr id="44" name="그림 27"/>
           <p:cNvPicPr>
             <a:picLocks xmlns:a="http://schemas.openxmlformats.org/drawingml/2006/main" noChangeAspect="1"/>
           </p:cNvPicPr>
           <p:nvPr/>
         </p:nvPicPr>
         <p:blipFill>
-          <a:blip xmlns:r="http://schemas.openxmlformats.org/officeDocument/2006/relationships" xmlns:a="http://schemas.openxmlformats.org/drawingml/2006/main" r:embed="R9d127540e1734322"/>
-          <a:stretch xmlns:a="http://schemas.openxmlformats.org/drawingml/2006/main"/>
+          <a:blip xmlns:r="http://schemas.openxmlformats.org/officeDocument/2006/relationships" xmlns:a="http://schemas.openxmlformats.org/drawingml/2006/main" r:embed="R45e16813060849d3"/>
+          <a:srcRect xmlns:a="http://schemas.openxmlformats.org/drawingml/2006/main" l="8920" t="0" r="8920" b="0"/>
+          <a:stretch xmlns:a="http://schemas.openxmlformats.org/drawingml/2006/main">
+            <a:fillRect l="0" t="0" r="0" b="0"/>
+          </a:stretch>
         </p:blipFill>
         <p:spPr>
           <a:xfrm xmlns:a="http://schemas.openxmlformats.org/drawingml/2006/main">
-            <a:off x="7444546" y="1809750"/>
-            <a:ext cx="3113158" cy="4191000"/>
+            <a:off x="6705600" y="2000250"/>
+            <a:ext cx="4591050" cy="3143250"/>
           </a:xfrm>
           <a:prstGeom xmlns:a="http://schemas.openxmlformats.org/drawingml/2006/main" prst="rect">
             <a:avLst/>
@@ -7944,13 +8171,14 @@
           <a:lstStyle xmlns:a="http://schemas.openxmlformats.org/drawingml/2006/main"/>
           <a:p xmlns:a="http://schemas.openxmlformats.org/drawingml/2006/main">
             <a:pPr algn="l">
+              <a:buNone/>
               <a:defRPr sz="1125" b="1">
                 <a:solidFill>
                   <a:srgbClr val="0B6B57"/>
                 </a:solidFill>
-                <a:latin typeface="Nanum Gothic"/>
-                <a:ea typeface="Nanum Gothic"/>
-                <a:cs typeface="Nanum Gothic"/>
+                <a:latin typeface="NanumGothic"/>
+                <a:ea typeface="NanumGothic"/>
+                <a:cs typeface="NanumGothic"/>
               </a:defRPr>
             </a:pPr>
             <a:r>
@@ -7958,11 +8186,11 @@
                 <a:solidFill>
                   <a:srgbClr val="0B6B57"/>
                 </a:solidFill>
-                <a:latin typeface="Nanum Gothic"/>
-                <a:ea typeface="Nanum Gothic"/>
-                <a:cs typeface="Nanum Gothic"/>
-              </a:rPr>
-              <a:t>핵심 기능 2 · 금융사고 대응</a:t>
+                <a:latin typeface="NanumGothic"/>
+                <a:ea typeface="NanumGothic"/>
+                <a:cs typeface="NanumGothic"/>
+              </a:rPr>
+              <a:t>핵심 기능 2 · 골든타임 대응</a:t>
             </a:r>
           </a:p>
         </p:txBody>
@@ -8000,13 +8228,14 @@
           <a:lstStyle xmlns:a="http://schemas.openxmlformats.org/drawingml/2006/main"/>
           <a:p xmlns:a="http://schemas.openxmlformats.org/drawingml/2006/main">
             <a:pPr algn="l">
+              <a:buNone/>
               <a:defRPr sz="3525" b="1">
                 <a:solidFill>
                   <a:srgbClr val="111820"/>
                 </a:solidFill>
-                <a:latin typeface="Nanum Gothic"/>
-                <a:ea typeface="Nanum Gothic"/>
-                <a:cs typeface="Nanum Gothic"/>
+                <a:latin typeface="NanumGothic"/>
+                <a:ea typeface="NanumGothic"/>
+                <a:cs typeface="NanumGothic"/>
               </a:defRPr>
             </a:pPr>
             <a:r>
@@ -8014,18 +8243,18 @@
                 <a:solidFill>
                   <a:srgbClr val="111820"/>
                 </a:solidFill>
-                <a:latin typeface="Nanum Gothic"/>
-                <a:ea typeface="Nanum Gothic"/>
-                <a:cs typeface="Nanum Gothic"/>
-              </a:rPr>
-              <a:t>사고 직후에는 행동 순서를 먼저 줍니다</a:t>
+                <a:latin typeface="NanumGothic"/>
+                <a:ea typeface="NanumGothic"/>
+                <a:cs typeface="NanumGothic"/>
+              </a:rPr>
+              <a:t>피해 의심 순간, 분석보다 먼저 해야 할 일을 안내합니다</a:t>
             </a:r>
           </a:p>
         </p:txBody>
       </p:sp>
       <p:cxnSp>
         <p:nvCxnSpPr>
-          <p:cNvPr id="19" name="rule-6"/>
+          <p:cNvPr id="35" name="rule-6"/>
           <p:cNvCxnSpPr/>
           <p:nvPr/>
         </p:nvCxnSpPr>
@@ -8078,13 +8307,14 @@
           <a:lstStyle xmlns:a="http://schemas.openxmlformats.org/drawingml/2006/main"/>
           <a:p xmlns:a="http://schemas.openxmlformats.org/drawingml/2006/main">
             <a:pPr algn="r">
+              <a:buNone/>
               <a:defRPr sz="975" b="0">
                 <a:solidFill>
                   <a:srgbClr val="58636F"/>
                 </a:solidFill>
-                <a:latin typeface="Nanum Gothic"/>
-                <a:ea typeface="Nanum Gothic"/>
-                <a:cs typeface="Nanum Gothic"/>
+                <a:latin typeface="NanumGothic"/>
+                <a:ea typeface="NanumGothic"/>
+                <a:cs typeface="NanumGothic"/>
               </a:defRPr>
             </a:pPr>
             <a:r>
@@ -8092,9 +8322,9 @@
                 <a:solidFill>
                   <a:srgbClr val="58636F"/>
                 </a:solidFill>
-                <a:latin typeface="Nanum Gothic"/>
-                <a:ea typeface="Nanum Gothic"/>
-                <a:cs typeface="Nanum Gothic"/>
+                <a:latin typeface="NanumGothic"/>
+                <a:ea typeface="NanumGothic"/>
+                <a:cs typeface="NanumGothic"/>
               </a:rPr>
               <a:t>06</a:t>
             </a:r>
@@ -8133,23 +8363,31 @@
             <a:prstDash val="solid"/>
           </a:ln>
         </p:spPr>
+        <p:txBody>
+          <a:bodyPr xmlns:a="http://schemas.openxmlformats.org/drawingml/2006/main"/>
+          <a:lstStyle xmlns:a="http://schemas.openxmlformats.org/drawingml/2006/main"/>
+          <a:p xmlns:a="http://schemas.openxmlformats.org/drawingml/2006/main"/>
+        </p:txBody>
       </p:sp>
       <p:pic>
         <p:nvPicPr>
-          <p:cNvPr id="22" name=""/>
+          <p:cNvPr id="38" name="그림 21"/>
           <p:cNvPicPr>
             <a:picLocks xmlns:a="http://schemas.openxmlformats.org/drawingml/2006/main" noChangeAspect="1"/>
           </p:cNvPicPr>
           <p:nvPr/>
         </p:nvPicPr>
         <p:blipFill>
-          <a:blip xmlns:r="http://schemas.openxmlformats.org/officeDocument/2006/relationships" xmlns:a="http://schemas.openxmlformats.org/drawingml/2006/main" r:embed="R3fbfa4b189ce4555"/>
-          <a:stretch xmlns:a="http://schemas.openxmlformats.org/drawingml/2006/main"/>
+          <a:blip xmlns:r="http://schemas.openxmlformats.org/officeDocument/2006/relationships" xmlns:a="http://schemas.openxmlformats.org/drawingml/2006/main" r:embed="Rb4855c17b80e4fa4"/>
+          <a:srcRect xmlns:a="http://schemas.openxmlformats.org/drawingml/2006/main" l="6815" t="0" r="6815" b="0"/>
+          <a:stretch xmlns:a="http://schemas.openxmlformats.org/drawingml/2006/main">
+            <a:fillRect l="0" t="0" r="0" b="0"/>
+          </a:stretch>
         </p:blipFill>
         <p:spPr>
           <a:xfrm xmlns:a="http://schemas.openxmlformats.org/drawingml/2006/main">
-            <a:off x="1341744" y="1771650"/>
-            <a:ext cx="3183912" cy="4286250"/>
+            <a:off x="666750" y="1952625"/>
+            <a:ext cx="4533900" cy="2952750"/>
           </a:xfrm>
           <a:prstGeom xmlns:a="http://schemas.openxmlformats.org/drawingml/2006/main" prst="rect">
             <a:avLst/>
@@ -8189,13 +8427,14 @@
           <a:lstStyle xmlns:a="http://schemas.openxmlformats.org/drawingml/2006/main"/>
           <a:p xmlns:a="http://schemas.openxmlformats.org/drawingml/2006/main">
             <a:pPr algn="l">
+              <a:buNone/>
               <a:defRPr sz="1725" b="1">
                 <a:solidFill>
                   <a:srgbClr val="0B6B57"/>
                 </a:solidFill>
-                <a:latin typeface="Nanum Gothic"/>
-                <a:ea typeface="Nanum Gothic"/>
-                <a:cs typeface="Nanum Gothic"/>
+                <a:latin typeface="NanumGothic"/>
+                <a:ea typeface="NanumGothic"/>
+                <a:cs typeface="NanumGothic"/>
               </a:defRPr>
             </a:pPr>
             <a:r>
@@ -8203,9 +8442,9 @@
                 <a:solidFill>
                   <a:srgbClr val="0B6B57"/>
                 </a:solidFill>
-                <a:latin typeface="Nanum Gothic"/>
-                <a:ea typeface="Nanum Gothic"/>
-                <a:cs typeface="Nanum Gothic"/>
+                <a:latin typeface="NanumGothic"/>
+                <a:ea typeface="NanumGothic"/>
+                <a:cs typeface="NanumGothic"/>
               </a:rPr>
               <a:t>•</a:t>
             </a:r>
@@ -8245,13 +8484,14 @@
           <a:lstStyle xmlns:a="http://schemas.openxmlformats.org/drawingml/2006/main"/>
           <a:p xmlns:a="http://schemas.openxmlformats.org/drawingml/2006/main">
             <a:pPr algn="l">
+              <a:buNone/>
               <a:defRPr sz="1725" b="0">
                 <a:solidFill>
                   <a:srgbClr val="111820"/>
                 </a:solidFill>
-                <a:latin typeface="Nanum Gothic"/>
-                <a:ea typeface="Nanum Gothic"/>
-                <a:cs typeface="Nanum Gothic"/>
+                <a:latin typeface="NanumGothic"/>
+                <a:ea typeface="NanumGothic"/>
+                <a:cs typeface="NanumGothic"/>
               </a:defRPr>
             </a:pPr>
             <a:r>
@@ -8259,11 +8499,11 @@
                 <a:solidFill>
                   <a:srgbClr val="111820"/>
                 </a:solidFill>
-                <a:latin typeface="Nanum Gothic"/>
-                <a:ea typeface="Nanum Gothic"/>
-                <a:cs typeface="Nanum Gothic"/>
-              </a:rPr>
-              <a:t>착오송금·보이스피싱·현금 전달 상황 분류</a:t>
+                <a:latin typeface="NanumGothic"/>
+                <a:ea typeface="NanumGothic"/>
+                <a:cs typeface="NanumGothic"/>
+              </a:rPr>
+              <a:t>사고 유형을 빠르게 나누고 긴급도를 표시</a:t>
             </a:r>
           </a:p>
         </p:txBody>
@@ -8301,13 +8541,14 @@
           <a:lstStyle xmlns:a="http://schemas.openxmlformats.org/drawingml/2006/main"/>
           <a:p xmlns:a="http://schemas.openxmlformats.org/drawingml/2006/main">
             <a:pPr algn="l">
+              <a:buNone/>
               <a:defRPr sz="1725" b="1">
                 <a:solidFill>
                   <a:srgbClr val="0B6B57"/>
                 </a:solidFill>
-                <a:latin typeface="Nanum Gothic"/>
-                <a:ea typeface="Nanum Gothic"/>
-                <a:cs typeface="Nanum Gothic"/>
+                <a:latin typeface="NanumGothic"/>
+                <a:ea typeface="NanumGothic"/>
+                <a:cs typeface="NanumGothic"/>
               </a:defRPr>
             </a:pPr>
             <a:r>
@@ -8315,9 +8556,9 @@
                 <a:solidFill>
                   <a:srgbClr val="0B6B57"/>
                 </a:solidFill>
-                <a:latin typeface="Nanum Gothic"/>
-                <a:ea typeface="Nanum Gothic"/>
-                <a:cs typeface="Nanum Gothic"/>
+                <a:latin typeface="NanumGothic"/>
+                <a:ea typeface="NanumGothic"/>
+                <a:cs typeface="NanumGothic"/>
               </a:rPr>
               <a:t>•</a:t>
             </a:r>
@@ -8357,13 +8598,14 @@
           <a:lstStyle xmlns:a="http://schemas.openxmlformats.org/drawingml/2006/main"/>
           <a:p xmlns:a="http://schemas.openxmlformats.org/drawingml/2006/main">
             <a:pPr algn="l">
+              <a:buNone/>
               <a:defRPr sz="1725" b="0">
                 <a:solidFill>
                   <a:srgbClr val="111820"/>
                 </a:solidFill>
-                <a:latin typeface="Nanum Gothic"/>
-                <a:ea typeface="Nanum Gothic"/>
-                <a:cs typeface="Nanum Gothic"/>
+                <a:latin typeface="NanumGothic"/>
+                <a:ea typeface="NanumGothic"/>
+                <a:cs typeface="NanumGothic"/>
               </a:defRPr>
             </a:pPr>
             <a:r>
@@ -8371,11 +8613,11 @@
                 <a:solidFill>
                   <a:srgbClr val="111820"/>
                 </a:solidFill>
-                <a:latin typeface="Nanum Gothic"/>
-                <a:ea typeface="Nanum Gothic"/>
-                <a:cs typeface="Nanum Gothic"/>
-              </a:rPr>
-              <a:t>은행·112·1332로 바로 전화</a:t>
+                <a:latin typeface="NanumGothic"/>
+                <a:ea typeface="NanumGothic"/>
+                <a:cs typeface="NanumGothic"/>
+              </a:rPr>
+              <a:t>은행·112·1332에 바로 연결</a:t>
             </a:r>
           </a:p>
         </p:txBody>
@@ -8413,13 +8655,14 @@
           <a:lstStyle xmlns:a="http://schemas.openxmlformats.org/drawingml/2006/main"/>
           <a:p xmlns:a="http://schemas.openxmlformats.org/drawingml/2006/main">
             <a:pPr algn="l">
+              <a:buNone/>
               <a:defRPr sz="1725" b="1">
                 <a:solidFill>
                   <a:srgbClr val="0B6B57"/>
                 </a:solidFill>
-                <a:latin typeface="Nanum Gothic"/>
-                <a:ea typeface="Nanum Gothic"/>
-                <a:cs typeface="Nanum Gothic"/>
+                <a:latin typeface="NanumGothic"/>
+                <a:ea typeface="NanumGothic"/>
+                <a:cs typeface="NanumGothic"/>
               </a:defRPr>
             </a:pPr>
             <a:r>
@@ -8427,9 +8670,9 @@
                 <a:solidFill>
                   <a:srgbClr val="0B6B57"/>
                 </a:solidFill>
-                <a:latin typeface="Nanum Gothic"/>
-                <a:ea typeface="Nanum Gothic"/>
-                <a:cs typeface="Nanum Gothic"/>
+                <a:latin typeface="NanumGothic"/>
+                <a:ea typeface="NanumGothic"/>
+                <a:cs typeface="NanumGothic"/>
               </a:rPr>
               <a:t>•</a:t>
             </a:r>
@@ -8469,13 +8712,14 @@
           <a:lstStyle xmlns:a="http://schemas.openxmlformats.org/drawingml/2006/main"/>
           <a:p xmlns:a="http://schemas.openxmlformats.org/drawingml/2006/main">
             <a:pPr algn="l">
+              <a:buNone/>
               <a:defRPr sz="1725" b="0">
                 <a:solidFill>
                   <a:srgbClr val="111820"/>
                 </a:solidFill>
-                <a:latin typeface="Nanum Gothic"/>
-                <a:ea typeface="Nanum Gothic"/>
-                <a:cs typeface="Nanum Gothic"/>
+                <a:latin typeface="NanumGothic"/>
+                <a:ea typeface="NanumGothic"/>
+                <a:cs typeface="NanumGothic"/>
               </a:defRPr>
             </a:pPr>
             <a:r>
@@ -8483,11 +8727,11 @@
                 <a:solidFill>
                   <a:srgbClr val="111820"/>
                 </a:solidFill>
-                <a:latin typeface="Nanum Gothic"/>
-                <a:ea typeface="Nanum Gothic"/>
-                <a:cs typeface="Nanum Gothic"/>
-              </a:rPr>
-              <a:t>즉시·10분 안·오늘·추후 행동을 구분</a:t>
+                <a:latin typeface="NanumGothic"/>
+                <a:ea typeface="NanumGothic"/>
+                <a:cs typeface="NanumGothic"/>
+              </a:rPr>
+              <a:t>즉시·10분 안·오늘·이후 순서로 안내</a:t>
             </a:r>
           </a:p>
         </p:txBody>
@@ -8525,13 +8769,14 @@
           <a:lstStyle xmlns:a="http://schemas.openxmlformats.org/drawingml/2006/main"/>
           <a:p xmlns:a="http://schemas.openxmlformats.org/drawingml/2006/main">
             <a:pPr algn="l">
+              <a:buNone/>
               <a:defRPr sz="1725" b="1">
                 <a:solidFill>
                   <a:srgbClr val="0B6B57"/>
                 </a:solidFill>
-                <a:latin typeface="Nanum Gothic"/>
-                <a:ea typeface="Nanum Gothic"/>
-                <a:cs typeface="Nanum Gothic"/>
+                <a:latin typeface="NanumGothic"/>
+                <a:ea typeface="NanumGothic"/>
+                <a:cs typeface="NanumGothic"/>
               </a:defRPr>
             </a:pPr>
             <a:r>
@@ -8539,9 +8784,9 @@
                 <a:solidFill>
                   <a:srgbClr val="0B6B57"/>
                 </a:solidFill>
-                <a:latin typeface="Nanum Gothic"/>
-                <a:ea typeface="Nanum Gothic"/>
-                <a:cs typeface="Nanum Gothic"/>
+                <a:latin typeface="NanumGothic"/>
+                <a:ea typeface="NanumGothic"/>
+                <a:cs typeface="NanumGothic"/>
               </a:rPr>
               <a:t>•</a:t>
             </a:r>
@@ -8581,13 +8826,14 @@
           <a:lstStyle xmlns:a="http://schemas.openxmlformats.org/drawingml/2006/main"/>
           <a:p xmlns:a="http://schemas.openxmlformats.org/drawingml/2006/main">
             <a:pPr algn="l">
+              <a:buNone/>
               <a:defRPr sz="1725" b="0">
                 <a:solidFill>
                   <a:srgbClr val="111820"/>
                 </a:solidFill>
-                <a:latin typeface="Nanum Gothic"/>
-                <a:ea typeface="Nanum Gothic"/>
-                <a:cs typeface="Nanum Gothic"/>
+                <a:latin typeface="NanumGothic"/>
+                <a:ea typeface="NanumGothic"/>
+                <a:cs typeface="NanumGothic"/>
               </a:defRPr>
             </a:pPr>
             <a:r>
@@ -8595,11 +8841,11 @@
                 <a:solidFill>
                   <a:srgbClr val="111820"/>
                 </a:solidFill>
-                <a:latin typeface="Nanum Gothic"/>
-                <a:ea typeface="Nanum Gothic"/>
-                <a:cs typeface="Nanum Gothic"/>
-              </a:rPr>
-              <a:t>증빙 체크리스트와 민원서 초안 생성</a:t>
+                <a:latin typeface="NanumGothic"/>
+                <a:ea typeface="NanumGothic"/>
+                <a:cs typeface="NanumGothic"/>
+              </a:rPr>
+              <a:t>증빙 목록과 민원 초안을 한 번에 정리</a:t>
             </a:r>
           </a:p>
         </p:txBody>
@@ -8637,13 +8883,14 @@
           <a:lstStyle xmlns:a="http://schemas.openxmlformats.org/drawingml/2006/main"/>
           <a:p xmlns:a="http://schemas.openxmlformats.org/drawingml/2006/main">
             <a:pPr algn="l">
+              <a:buNone/>
               <a:defRPr sz="1725" b="1">
                 <a:solidFill>
                   <a:srgbClr val="0B6B57"/>
                 </a:solidFill>
-                <a:latin typeface="Nanum Gothic"/>
-                <a:ea typeface="Nanum Gothic"/>
-                <a:cs typeface="Nanum Gothic"/>
+                <a:latin typeface="NanumGothic"/>
+                <a:ea typeface="NanumGothic"/>
+                <a:cs typeface="NanumGothic"/>
               </a:defRPr>
             </a:pPr>
             <a:r>
@@ -8651,9 +8898,9 @@
                 <a:solidFill>
                   <a:srgbClr val="0B6B57"/>
                 </a:solidFill>
-                <a:latin typeface="Nanum Gothic"/>
-                <a:ea typeface="Nanum Gothic"/>
-                <a:cs typeface="Nanum Gothic"/>
+                <a:latin typeface="NanumGothic"/>
+                <a:ea typeface="NanumGothic"/>
+                <a:cs typeface="NanumGothic"/>
               </a:rPr>
               <a:t>•</a:t>
             </a:r>
@@ -8693,13 +8940,14 @@
           <a:lstStyle xmlns:a="http://schemas.openxmlformats.org/drawingml/2006/main"/>
           <a:p xmlns:a="http://schemas.openxmlformats.org/drawingml/2006/main">
             <a:pPr algn="l">
+              <a:buNone/>
               <a:defRPr sz="1725" b="0">
                 <a:solidFill>
                   <a:srgbClr val="111820"/>
                 </a:solidFill>
-                <a:latin typeface="Nanum Gothic"/>
-                <a:ea typeface="Nanum Gothic"/>
-                <a:cs typeface="Nanum Gothic"/>
+                <a:latin typeface="NanumGothic"/>
+                <a:ea typeface="NanumGothic"/>
+                <a:cs typeface="NanumGothic"/>
               </a:defRPr>
             </a:pPr>
             <a:r>
@@ -8707,11 +8955,11 @@
                 <a:solidFill>
                   <a:srgbClr val="111820"/>
                 </a:solidFill>
-                <a:latin typeface="Nanum Gothic"/>
-                <a:ea typeface="Nanum Gothic"/>
-                <a:cs typeface="Nanum Gothic"/>
-              </a:rPr>
-              <a:t>개인정보를 가린 뒤 보호자에게 공유</a:t>
+                <a:latin typeface="NanumGothic"/>
+                <a:ea typeface="NanumGothic"/>
+                <a:cs typeface="NanumGothic"/>
+              </a:rPr>
+              <a:t>개인정보를 가린 보호자 공유까지 지원</a:t>
             </a:r>
           </a:p>
         </p:txBody>
@@ -8771,13 +9019,14 @@
           <a:lstStyle xmlns:a="http://schemas.openxmlformats.org/drawingml/2006/main"/>
           <a:p xmlns:a="http://schemas.openxmlformats.org/drawingml/2006/main">
             <a:pPr algn="l">
+              <a:buNone/>
               <a:defRPr sz="1125" b="1">
                 <a:solidFill>
                   <a:srgbClr val="0B6B57"/>
                 </a:solidFill>
-                <a:latin typeface="Nanum Gothic"/>
-                <a:ea typeface="Nanum Gothic"/>
-                <a:cs typeface="Nanum Gothic"/>
+                <a:latin typeface="NanumGothic"/>
+                <a:ea typeface="NanumGothic"/>
+                <a:cs typeface="NanumGothic"/>
               </a:defRPr>
             </a:pPr>
             <a:r>
@@ -8785,9 +9034,9 @@
                 <a:solidFill>
                   <a:srgbClr val="0B6B57"/>
                 </a:solidFill>
-                <a:latin typeface="Nanum Gothic"/>
-                <a:ea typeface="Nanum Gothic"/>
-                <a:cs typeface="Nanum Gothic"/>
+                <a:latin typeface="NanumGothic"/>
+                <a:ea typeface="NanumGothic"/>
+                <a:cs typeface="NanumGothic"/>
               </a:rPr>
               <a:t>정보수집과 데이터 분석</a:t>
             </a:r>
@@ -8827,13 +9076,14 @@
           <a:lstStyle xmlns:a="http://schemas.openxmlformats.org/drawingml/2006/main"/>
           <a:p xmlns:a="http://schemas.openxmlformats.org/drawingml/2006/main">
             <a:pPr algn="l">
+              <a:buNone/>
               <a:defRPr sz="3525" b="1">
                 <a:solidFill>
                   <a:srgbClr val="111820"/>
                 </a:solidFill>
-                <a:latin typeface="Nanum Gothic"/>
-                <a:ea typeface="Nanum Gothic"/>
-                <a:cs typeface="Nanum Gothic"/>
+                <a:latin typeface="NanumGothic"/>
+                <a:ea typeface="NanumGothic"/>
+                <a:cs typeface="NanumGothic"/>
               </a:defRPr>
             </a:pPr>
             <a:r>
@@ -8841,9 +9091,9 @@
                 <a:solidFill>
                   <a:srgbClr val="111820"/>
                 </a:solidFill>
-                <a:latin typeface="Nanum Gothic"/>
-                <a:ea typeface="Nanum Gothic"/>
-                <a:cs typeface="Nanum Gothic"/>
+                <a:latin typeface="NanumGothic"/>
+                <a:ea typeface="NanumGothic"/>
+                <a:cs typeface="NanumGothic"/>
               </a:rPr>
               <a:t>판단 근거는 사용 허가된 공식 자료로 구성했습니다</a:t>
             </a:r>
@@ -8852,7 +9102,7 @@
       </p:sp>
       <p:cxnSp>
         <p:nvCxnSpPr>
-          <p:cNvPr id="34" name="rule-7"/>
+          <p:cNvPr id="86" name="rule-7"/>
           <p:cNvCxnSpPr/>
           <p:nvPr/>
         </p:nvCxnSpPr>
@@ -8905,13 +9155,14 @@
           <a:lstStyle xmlns:a="http://schemas.openxmlformats.org/drawingml/2006/main"/>
           <a:p xmlns:a="http://schemas.openxmlformats.org/drawingml/2006/main">
             <a:pPr algn="r">
+              <a:buNone/>
               <a:defRPr sz="975" b="0">
                 <a:solidFill>
                   <a:srgbClr val="58636F"/>
                 </a:solidFill>
-                <a:latin typeface="Nanum Gothic"/>
-                <a:ea typeface="Nanum Gothic"/>
-                <a:cs typeface="Nanum Gothic"/>
+                <a:latin typeface="NanumGothic"/>
+                <a:ea typeface="NanumGothic"/>
+                <a:cs typeface="NanumGothic"/>
               </a:defRPr>
             </a:pPr>
             <a:r>
@@ -8919,9 +9170,9 @@
                 <a:solidFill>
                   <a:srgbClr val="58636F"/>
                 </a:solidFill>
-                <a:latin typeface="Nanum Gothic"/>
-                <a:ea typeface="Nanum Gothic"/>
-                <a:cs typeface="Nanum Gothic"/>
+                <a:latin typeface="NanumGothic"/>
+                <a:ea typeface="NanumGothic"/>
+                <a:cs typeface="NanumGothic"/>
               </a:rPr>
               <a:t>07</a:t>
             </a:r>
@@ -8961,13 +9212,14 @@
           <a:lstStyle xmlns:a="http://schemas.openxmlformats.org/drawingml/2006/main"/>
           <a:p xmlns:a="http://schemas.openxmlformats.org/drawingml/2006/main">
             <a:pPr algn="l">
+              <a:buNone/>
               <a:defRPr sz="3450" b="1">
                 <a:solidFill>
                   <a:srgbClr val="1B4A73"/>
                 </a:solidFill>
-                <a:latin typeface="Nanum Gothic"/>
-                <a:ea typeface="Nanum Gothic"/>
-                <a:cs typeface="Nanum Gothic"/>
+                <a:latin typeface="NanumGothic"/>
+                <a:ea typeface="NanumGothic"/>
+                <a:cs typeface="NanumGothic"/>
               </a:defRPr>
             </a:pPr>
             <a:r>
@@ -8975,11 +9227,11 @@
                 <a:solidFill>
                   <a:srgbClr val="1B4A73"/>
                 </a:solidFill>
-                <a:latin typeface="Nanum Gothic"/>
-                <a:ea typeface="Nanum Gothic"/>
-                <a:cs typeface="Nanum Gothic"/>
-              </a:rPr>
-              <a:t>21개</a:t>
+                <a:latin typeface="NanumGothic"/>
+                <a:ea typeface="NanumGothic"/>
+                <a:cs typeface="NanumGothic"/>
+              </a:rPr>
+              <a:t>12종</a:t>
             </a:r>
           </a:p>
         </p:txBody>
@@ -9017,13 +9269,14 @@
           <a:lstStyle xmlns:a="http://schemas.openxmlformats.org/drawingml/2006/main"/>
           <a:p xmlns:a="http://schemas.openxmlformats.org/drawingml/2006/main">
             <a:pPr algn="l">
+              <a:buNone/>
               <a:defRPr sz="1500" b="0">
                 <a:solidFill>
                   <a:srgbClr val="58636F"/>
                 </a:solidFill>
-                <a:latin typeface="Nanum Gothic"/>
-                <a:ea typeface="Nanum Gothic"/>
-                <a:cs typeface="Nanum Gothic"/>
+                <a:latin typeface="NanumGothic"/>
+                <a:ea typeface="NanumGothic"/>
+                <a:cs typeface="NanumGothic"/>
               </a:defRPr>
             </a:pPr>
             <a:r>
@@ -9031,11 +9284,11 @@
                 <a:solidFill>
                   <a:srgbClr val="58636F"/>
                 </a:solidFill>
-                <a:latin typeface="Nanum Gothic"/>
-                <a:ea typeface="Nanum Gothic"/>
-                <a:cs typeface="Nanum Gothic"/>
-              </a:rPr>
-              <a:t>공식 원천 파일</a:t>
+                <a:latin typeface="NanumGothic"/>
+                <a:ea typeface="NanumGothic"/>
+                <a:cs typeface="NanumGothic"/>
+              </a:rPr>
+              <a:t>실행 데이터</a:t>
             </a:r>
           </a:p>
         </p:txBody>
@@ -9073,13 +9326,14 @@
           <a:lstStyle xmlns:a="http://schemas.openxmlformats.org/drawingml/2006/main"/>
           <a:p xmlns:a="http://schemas.openxmlformats.org/drawingml/2006/main">
             <a:pPr algn="l">
+              <a:buNone/>
               <a:defRPr sz="3450" b="1">
                 <a:solidFill>
                   <a:srgbClr val="1B4A73"/>
                 </a:solidFill>
-                <a:latin typeface="Nanum Gothic"/>
-                <a:ea typeface="Nanum Gothic"/>
-                <a:cs typeface="Nanum Gothic"/>
+                <a:latin typeface="NanumGothic"/>
+                <a:ea typeface="NanumGothic"/>
+                <a:cs typeface="NanumGothic"/>
               </a:defRPr>
             </a:pPr>
             <a:r>
@@ -9087,9 +9341,9 @@
                 <a:solidFill>
                   <a:srgbClr val="1B4A73"/>
                 </a:solidFill>
-                <a:latin typeface="Nanum Gothic"/>
-                <a:ea typeface="Nanum Gothic"/>
-                <a:cs typeface="Nanum Gothic"/>
+                <a:latin typeface="NanumGothic"/>
+                <a:ea typeface="NanumGothic"/>
+                <a:cs typeface="NanumGothic"/>
               </a:rPr>
               <a:t>229건</a:t>
             </a:r>
@@ -9129,13 +9383,14 @@
           <a:lstStyle xmlns:a="http://schemas.openxmlformats.org/drawingml/2006/main"/>
           <a:p xmlns:a="http://schemas.openxmlformats.org/drawingml/2006/main">
             <a:pPr algn="l">
+              <a:buNone/>
               <a:defRPr sz="1500" b="0">
                 <a:solidFill>
                   <a:srgbClr val="58636F"/>
                 </a:solidFill>
-                <a:latin typeface="Nanum Gothic"/>
-                <a:ea typeface="Nanum Gothic"/>
-                <a:cs typeface="Nanum Gothic"/>
+                <a:latin typeface="NanumGothic"/>
+                <a:ea typeface="NanumGothic"/>
+                <a:cs typeface="NanumGothic"/>
               </a:defRPr>
             </a:pPr>
             <a:r>
@@ -9143,9 +9398,9 @@
                 <a:solidFill>
                   <a:srgbClr val="58636F"/>
                 </a:solidFill>
-                <a:latin typeface="Nanum Gothic"/>
-                <a:ea typeface="Nanum Gothic"/>
-                <a:cs typeface="Nanum Gothic"/>
+                <a:latin typeface="NanumGothic"/>
+                <a:ea typeface="NanumGothic"/>
+                <a:cs typeface="NanumGothic"/>
               </a:rPr>
               <a:t>금융용어</a:t>
             </a:r>
@@ -9185,13 +9440,14 @@
           <a:lstStyle xmlns:a="http://schemas.openxmlformats.org/drawingml/2006/main"/>
           <a:p xmlns:a="http://schemas.openxmlformats.org/drawingml/2006/main">
             <a:pPr algn="l">
+              <a:buNone/>
               <a:defRPr sz="3450" b="1">
                 <a:solidFill>
                   <a:srgbClr val="1B4A73"/>
                 </a:solidFill>
-                <a:latin typeface="Nanum Gothic"/>
-                <a:ea typeface="Nanum Gothic"/>
-                <a:cs typeface="Nanum Gothic"/>
+                <a:latin typeface="NanumGothic"/>
+                <a:ea typeface="NanumGothic"/>
+                <a:cs typeface="NanumGothic"/>
               </a:defRPr>
             </a:pPr>
             <a:r>
@@ -9199,9 +9455,9 @@
                 <a:solidFill>
                   <a:srgbClr val="1B4A73"/>
                 </a:solidFill>
-                <a:latin typeface="Nanum Gothic"/>
-                <a:ea typeface="Nanum Gothic"/>
-                <a:cs typeface="Nanum Gothic"/>
+                <a:latin typeface="NanumGothic"/>
+                <a:ea typeface="NanumGothic"/>
+                <a:cs typeface="NanumGothic"/>
               </a:rPr>
               <a:t>566건</a:t>
             </a:r>
@@ -9241,13 +9497,14 @@
           <a:lstStyle xmlns:a="http://schemas.openxmlformats.org/drawingml/2006/main"/>
           <a:p xmlns:a="http://schemas.openxmlformats.org/drawingml/2006/main">
             <a:pPr algn="l">
+              <a:buNone/>
               <a:defRPr sz="1500" b="0">
                 <a:solidFill>
                   <a:srgbClr val="58636F"/>
                 </a:solidFill>
-                <a:latin typeface="Nanum Gothic"/>
-                <a:ea typeface="Nanum Gothic"/>
-                <a:cs typeface="Nanum Gothic"/>
+                <a:latin typeface="NanumGothic"/>
+                <a:ea typeface="NanumGothic"/>
+                <a:cs typeface="NanumGothic"/>
               </a:defRPr>
             </a:pPr>
             <a:r>
@@ -9255,9 +9512,9 @@
                 <a:solidFill>
                   <a:srgbClr val="58636F"/>
                 </a:solidFill>
-                <a:latin typeface="Nanum Gothic"/>
-                <a:ea typeface="Nanum Gothic"/>
-                <a:cs typeface="Nanum Gothic"/>
+                <a:latin typeface="NanumGothic"/>
+                <a:ea typeface="NanumGothic"/>
+                <a:cs typeface="NanumGothic"/>
               </a:rPr>
               <a:t>소비자 상담 사례</a:t>
             </a:r>
@@ -9297,13 +9554,14 @@
           <a:lstStyle xmlns:a="http://schemas.openxmlformats.org/drawingml/2006/main"/>
           <a:p xmlns:a="http://schemas.openxmlformats.org/drawingml/2006/main">
             <a:pPr algn="l">
+              <a:buNone/>
               <a:defRPr sz="3450" b="1">
                 <a:solidFill>
                   <a:srgbClr val="B53225"/>
                 </a:solidFill>
-                <a:latin typeface="Nanum Gothic"/>
-                <a:ea typeface="Nanum Gothic"/>
-                <a:cs typeface="Nanum Gothic"/>
+                <a:latin typeface="NanumGothic"/>
+                <a:ea typeface="NanumGothic"/>
+                <a:cs typeface="NanumGothic"/>
               </a:defRPr>
             </a:pPr>
             <a:r>
@@ -9311,11 +9569,11 @@
                 <a:solidFill>
                   <a:srgbClr val="B53225"/>
                 </a:solidFill>
-                <a:latin typeface="Nanum Gothic"/>
-                <a:ea typeface="Nanum Gothic"/>
-                <a:cs typeface="Nanum Gothic"/>
-              </a:rPr>
-              <a:t>11,968건</a:t>
+                <a:latin typeface="NanumGothic"/>
+                <a:ea typeface="NanumGothic"/>
+                <a:cs typeface="NanumGothic"/>
+              </a:rPr>
+              <a:t>0종</a:t>
             </a:r>
           </a:p>
         </p:txBody>
@@ -9353,13 +9611,14 @@
           <a:lstStyle xmlns:a="http://schemas.openxmlformats.org/drawingml/2006/main"/>
           <a:p xmlns:a="http://schemas.openxmlformats.org/drawingml/2006/main">
             <a:pPr algn="l">
+              <a:buNone/>
               <a:defRPr sz="1500" b="0">
                 <a:solidFill>
                   <a:srgbClr val="58636F"/>
                 </a:solidFill>
-                <a:latin typeface="Nanum Gothic"/>
-                <a:ea typeface="Nanum Gothic"/>
-                <a:cs typeface="Nanum Gothic"/>
+                <a:latin typeface="NanumGothic"/>
+                <a:ea typeface="NanumGothic"/>
+                <a:cs typeface="NanumGothic"/>
               </a:defRPr>
             </a:pPr>
             <a:r>
@@ -9367,18 +9626,18 @@
                 <a:solidFill>
                   <a:srgbClr val="58636F"/>
                 </a:solidFill>
-                <a:latin typeface="Nanum Gothic"/>
-                <a:ea typeface="Nanum Gothic"/>
-                <a:cs typeface="Nanum Gothic"/>
-              </a:rPr>
-              <a:t>보이스피싱 뉴스 메타데이터</a:t>
+                <a:latin typeface="NanumGothic"/>
+                <a:ea typeface="NanumGothic"/>
+                <a:cs typeface="NanumGothic"/>
+              </a:rPr>
+              <a:t>제한 자료 실행</a:t>
             </a:r>
           </a:p>
         </p:txBody>
       </p:sp>
       <p:cxnSp>
         <p:nvCxnSpPr>
-          <p:cNvPr id="44" name="data-divider"/>
+          <p:cNvPr id="96" name="data-divider"/>
           <p:cNvCxnSpPr/>
           <p:nvPr/>
         </p:nvCxnSpPr>
@@ -9431,13 +9690,14 @@
           <a:lstStyle xmlns:a="http://schemas.openxmlformats.org/drawingml/2006/main"/>
           <a:p xmlns:a="http://schemas.openxmlformats.org/drawingml/2006/main">
             <a:pPr algn="l">
+              <a:buNone/>
               <a:defRPr sz="2025" b="1">
                 <a:solidFill>
                   <a:srgbClr val="111820"/>
                 </a:solidFill>
-                <a:latin typeface="Nanum Gothic"/>
-                <a:ea typeface="Nanum Gothic"/>
-                <a:cs typeface="Nanum Gothic"/>
+                <a:latin typeface="NanumGothic"/>
+                <a:ea typeface="NanumGothic"/>
+                <a:cs typeface="NanumGothic"/>
               </a:defRPr>
             </a:pPr>
             <a:r>
@@ -9445,9 +9705,9 @@
                 <a:solidFill>
                   <a:srgbClr val="111820"/>
                 </a:solidFill>
-                <a:latin typeface="Nanum Gothic"/>
-                <a:ea typeface="Nanum Gothic"/>
-                <a:cs typeface="Nanum Gothic"/>
+                <a:latin typeface="NanumGothic"/>
+                <a:ea typeface="NanumGothic"/>
+                <a:cs typeface="NanumGothic"/>
               </a:rPr>
               <a:t>주요 출처</a:t>
             </a:r>
@@ -9487,13 +9747,14 @@
           <a:lstStyle xmlns:a="http://schemas.openxmlformats.org/drawingml/2006/main"/>
           <a:p xmlns:a="http://schemas.openxmlformats.org/drawingml/2006/main">
             <a:pPr algn="l">
+              <a:buNone/>
               <a:defRPr sz="1575" b="1">
                 <a:solidFill>
                   <a:srgbClr val="0B6B57"/>
                 </a:solidFill>
-                <a:latin typeface="Nanum Gothic"/>
-                <a:ea typeface="Nanum Gothic"/>
-                <a:cs typeface="Nanum Gothic"/>
+                <a:latin typeface="NanumGothic"/>
+                <a:ea typeface="NanumGothic"/>
+                <a:cs typeface="NanumGothic"/>
               </a:defRPr>
             </a:pPr>
             <a:r>
@@ -9501,9 +9762,9 @@
                 <a:solidFill>
                   <a:srgbClr val="0B6B57"/>
                 </a:solidFill>
-                <a:latin typeface="Nanum Gothic"/>
-                <a:ea typeface="Nanum Gothic"/>
-                <a:cs typeface="Nanum Gothic"/>
+                <a:latin typeface="NanumGothic"/>
+                <a:ea typeface="NanumGothic"/>
+                <a:cs typeface="NanumGothic"/>
               </a:rPr>
               <a:t>•</a:t>
             </a:r>
@@ -9543,13 +9804,14 @@
           <a:lstStyle xmlns:a="http://schemas.openxmlformats.org/drawingml/2006/main"/>
           <a:p xmlns:a="http://schemas.openxmlformats.org/drawingml/2006/main">
             <a:pPr algn="l">
+              <a:buNone/>
               <a:defRPr sz="1575" b="0">
                 <a:solidFill>
                   <a:srgbClr val="111820"/>
                 </a:solidFill>
-                <a:latin typeface="Nanum Gothic"/>
-                <a:ea typeface="Nanum Gothic"/>
-                <a:cs typeface="Nanum Gothic"/>
+                <a:latin typeface="NanumGothic"/>
+                <a:ea typeface="NanumGothic"/>
+                <a:cs typeface="NanumGothic"/>
               </a:defRPr>
             </a:pPr>
             <a:r>
@@ -9557,9 +9819,9 @@
                 <a:solidFill>
                   <a:srgbClr val="111820"/>
                 </a:solidFill>
-                <a:latin typeface="Nanum Gothic"/>
-                <a:ea typeface="Nanum Gothic"/>
-                <a:cs typeface="Nanum Gothic"/>
+                <a:latin typeface="NanumGothic"/>
+                <a:ea typeface="NanumGothic"/>
+                <a:cs typeface="NanumGothic"/>
               </a:rPr>
               <a:t>금융위원회·금융감독원</a:t>
             </a:r>
@@ -9599,13 +9861,14 @@
           <a:lstStyle xmlns:a="http://schemas.openxmlformats.org/drawingml/2006/main"/>
           <a:p xmlns:a="http://schemas.openxmlformats.org/drawingml/2006/main">
             <a:pPr algn="l">
+              <a:buNone/>
               <a:defRPr sz="1575" b="1">
                 <a:solidFill>
                   <a:srgbClr val="0B6B57"/>
                 </a:solidFill>
-                <a:latin typeface="Nanum Gothic"/>
-                <a:ea typeface="Nanum Gothic"/>
-                <a:cs typeface="Nanum Gothic"/>
+                <a:latin typeface="NanumGothic"/>
+                <a:ea typeface="NanumGothic"/>
+                <a:cs typeface="NanumGothic"/>
               </a:defRPr>
             </a:pPr>
             <a:r>
@@ -9613,9 +9876,9 @@
                 <a:solidFill>
                   <a:srgbClr val="0B6B57"/>
                 </a:solidFill>
-                <a:latin typeface="Nanum Gothic"/>
-                <a:ea typeface="Nanum Gothic"/>
-                <a:cs typeface="Nanum Gothic"/>
+                <a:latin typeface="NanumGothic"/>
+                <a:ea typeface="NanumGothic"/>
+                <a:cs typeface="NanumGothic"/>
               </a:rPr>
               <a:t>•</a:t>
             </a:r>
@@ -9655,13 +9918,14 @@
           <a:lstStyle xmlns:a="http://schemas.openxmlformats.org/drawingml/2006/main"/>
           <a:p xmlns:a="http://schemas.openxmlformats.org/drawingml/2006/main">
             <a:pPr algn="l">
+              <a:buNone/>
               <a:defRPr sz="1575" b="0">
                 <a:solidFill>
                   <a:srgbClr val="111820"/>
                 </a:solidFill>
-                <a:latin typeface="Nanum Gothic"/>
-                <a:ea typeface="Nanum Gothic"/>
-                <a:cs typeface="Nanum Gothic"/>
+                <a:latin typeface="NanumGothic"/>
+                <a:ea typeface="NanumGothic"/>
+                <a:cs typeface="NanumGothic"/>
               </a:defRPr>
             </a:pPr>
             <a:r>
@@ -9669,9 +9933,9 @@
                 <a:solidFill>
                   <a:srgbClr val="111820"/>
                 </a:solidFill>
-                <a:latin typeface="Nanum Gothic"/>
-                <a:ea typeface="Nanum Gothic"/>
-                <a:cs typeface="Nanum Gothic"/>
+                <a:latin typeface="NanumGothic"/>
+                <a:ea typeface="NanumGothic"/>
+                <a:cs typeface="NanumGothic"/>
               </a:rPr>
               <a:t>예금보험공사·서민금융진흥원</a:t>
             </a:r>
@@ -9711,13 +9975,14 @@
           <a:lstStyle xmlns:a="http://schemas.openxmlformats.org/drawingml/2006/main"/>
           <a:p xmlns:a="http://schemas.openxmlformats.org/drawingml/2006/main">
             <a:pPr algn="l">
+              <a:buNone/>
               <a:defRPr sz="1575" b="1">
                 <a:solidFill>
                   <a:srgbClr val="0B6B57"/>
                 </a:solidFill>
-                <a:latin typeface="Nanum Gothic"/>
-                <a:ea typeface="Nanum Gothic"/>
-                <a:cs typeface="Nanum Gothic"/>
+                <a:latin typeface="NanumGothic"/>
+                <a:ea typeface="NanumGothic"/>
+                <a:cs typeface="NanumGothic"/>
               </a:defRPr>
             </a:pPr>
             <a:r>
@@ -9725,9 +9990,9 @@
                 <a:solidFill>
                   <a:srgbClr val="0B6B57"/>
                 </a:solidFill>
-                <a:latin typeface="Nanum Gothic"/>
-                <a:ea typeface="Nanum Gothic"/>
-                <a:cs typeface="Nanum Gothic"/>
+                <a:latin typeface="NanumGothic"/>
+                <a:ea typeface="NanumGothic"/>
+                <a:cs typeface="NanumGothic"/>
               </a:rPr>
               <a:t>•</a:t>
             </a:r>
@@ -9767,13 +10032,14 @@
           <a:lstStyle xmlns:a="http://schemas.openxmlformats.org/drawingml/2006/main"/>
           <a:p xmlns:a="http://schemas.openxmlformats.org/drawingml/2006/main">
             <a:pPr algn="l">
+              <a:buNone/>
               <a:defRPr sz="1575" b="0">
                 <a:solidFill>
                   <a:srgbClr val="111820"/>
                 </a:solidFill>
-                <a:latin typeface="Nanum Gothic"/>
-                <a:ea typeface="Nanum Gothic"/>
-                <a:cs typeface="Nanum Gothic"/>
+                <a:latin typeface="NanumGothic"/>
+                <a:ea typeface="NanumGothic"/>
+                <a:cs typeface="NanumGothic"/>
               </a:defRPr>
             </a:pPr>
             <a:r>
@@ -9781,11 +10047,11 @@
                 <a:solidFill>
                   <a:srgbClr val="111820"/>
                 </a:solidFill>
-                <a:latin typeface="Nanum Gothic"/>
-                <a:ea typeface="Nanum Gothic"/>
-                <a:cs typeface="Nanum Gothic"/>
-              </a:rPr>
-              <a:t>공정거래위원회·소비자24</a:t>
+                <a:latin typeface="NanumGothic"/>
+                <a:ea typeface="NanumGothic"/>
+                <a:cs typeface="NanumGothic"/>
+              </a:rPr>
+              <a:t>공정거래위원회·서민금융진흥원</a:t>
             </a:r>
           </a:p>
         </p:txBody>
@@ -9823,13 +10089,14 @@
           <a:lstStyle xmlns:a="http://schemas.openxmlformats.org/drawingml/2006/main"/>
           <a:p xmlns:a="http://schemas.openxmlformats.org/drawingml/2006/main">
             <a:pPr algn="l">
+              <a:buNone/>
               <a:defRPr sz="1575" b="1">
                 <a:solidFill>
                   <a:srgbClr val="0B6B57"/>
                 </a:solidFill>
-                <a:latin typeface="Nanum Gothic"/>
-                <a:ea typeface="Nanum Gothic"/>
-                <a:cs typeface="Nanum Gothic"/>
+                <a:latin typeface="NanumGothic"/>
+                <a:ea typeface="NanumGothic"/>
+                <a:cs typeface="NanumGothic"/>
               </a:defRPr>
             </a:pPr>
             <a:r>
@@ -9837,9 +10104,9 @@
                 <a:solidFill>
                   <a:srgbClr val="0B6B57"/>
                 </a:solidFill>
-                <a:latin typeface="Nanum Gothic"/>
-                <a:ea typeface="Nanum Gothic"/>
-                <a:cs typeface="Nanum Gothic"/>
+                <a:latin typeface="NanumGothic"/>
+                <a:ea typeface="NanumGothic"/>
+                <a:cs typeface="NanumGothic"/>
               </a:rPr>
               <a:t>•</a:t>
             </a:r>
@@ -9879,13 +10146,14 @@
           <a:lstStyle xmlns:a="http://schemas.openxmlformats.org/drawingml/2006/main"/>
           <a:p xmlns:a="http://schemas.openxmlformats.org/drawingml/2006/main">
             <a:pPr algn="l">
+              <a:buNone/>
               <a:defRPr sz="1575" b="0">
                 <a:solidFill>
                   <a:srgbClr val="111820"/>
                 </a:solidFill>
-                <a:latin typeface="Nanum Gothic"/>
-                <a:ea typeface="Nanum Gothic"/>
-                <a:cs typeface="Nanum Gothic"/>
+                <a:latin typeface="NanumGothic"/>
+                <a:ea typeface="NanumGothic"/>
+                <a:cs typeface="NanumGothic"/>
               </a:defRPr>
             </a:pPr>
             <a:r>
@@ -9893,11 +10161,11 @@
                 <a:solidFill>
                   <a:srgbClr val="111820"/>
                 </a:solidFill>
-                <a:latin typeface="Nanum Gothic"/>
-                <a:ea typeface="Nanum Gothic"/>
-                <a:cs typeface="Nanum Gothic"/>
-              </a:rPr>
-              <a:t>경찰청·한국언론진흥재단</a:t>
+                <a:latin typeface="NanumGothic"/>
+                <a:ea typeface="NanumGothic"/>
+                <a:cs typeface="NanumGothic"/>
+              </a:rPr>
+              <a:t>경찰청·우체국금융개발원</a:t>
             </a:r>
           </a:p>
         </p:txBody>
@@ -9935,13 +10203,14 @@
           <a:lstStyle xmlns:a="http://schemas.openxmlformats.org/drawingml/2006/main"/>
           <a:p xmlns:a="http://schemas.openxmlformats.org/drawingml/2006/main">
             <a:pPr algn="l">
+              <a:buNone/>
               <a:defRPr sz="2025" b="1">
                 <a:solidFill>
                   <a:srgbClr val="111820"/>
                 </a:solidFill>
-                <a:latin typeface="Nanum Gothic"/>
-                <a:ea typeface="Nanum Gothic"/>
-                <a:cs typeface="Nanum Gothic"/>
+                <a:latin typeface="NanumGothic"/>
+                <a:ea typeface="NanumGothic"/>
+                <a:cs typeface="NanumGothic"/>
               </a:defRPr>
             </a:pPr>
             <a:r>
@@ -9949,9 +10218,9 @@
                 <a:solidFill>
                   <a:srgbClr val="111820"/>
                 </a:solidFill>
-                <a:latin typeface="Nanum Gothic"/>
-                <a:ea typeface="Nanum Gothic"/>
-                <a:cs typeface="Nanum Gothic"/>
+                <a:latin typeface="NanumGothic"/>
+                <a:ea typeface="NanumGothic"/>
+                <a:cs typeface="NanumGothic"/>
               </a:rPr>
               <a:t>분석 방식</a:t>
             </a:r>
@@ -9991,13 +10260,14 @@
           <a:lstStyle xmlns:a="http://schemas.openxmlformats.org/drawingml/2006/main"/>
           <a:p xmlns:a="http://schemas.openxmlformats.org/drawingml/2006/main">
             <a:pPr algn="l">
+              <a:buNone/>
               <a:defRPr sz="1575" b="1">
                 <a:solidFill>
                   <a:srgbClr val="0B6B57"/>
                 </a:solidFill>
-                <a:latin typeface="Nanum Gothic"/>
-                <a:ea typeface="Nanum Gothic"/>
-                <a:cs typeface="Nanum Gothic"/>
+                <a:latin typeface="NanumGothic"/>
+                <a:ea typeface="NanumGothic"/>
+                <a:cs typeface="NanumGothic"/>
               </a:defRPr>
             </a:pPr>
             <a:r>
@@ -10005,9 +10275,9 @@
                 <a:solidFill>
                   <a:srgbClr val="0B6B57"/>
                 </a:solidFill>
-                <a:latin typeface="Nanum Gothic"/>
-                <a:ea typeface="Nanum Gothic"/>
-                <a:cs typeface="Nanum Gothic"/>
+                <a:latin typeface="NanumGothic"/>
+                <a:ea typeface="NanumGothic"/>
+                <a:cs typeface="NanumGothic"/>
               </a:rPr>
               <a:t>•</a:t>
             </a:r>
@@ -10047,13 +10317,14 @@
           <a:lstStyle xmlns:a="http://schemas.openxmlformats.org/drawingml/2006/main"/>
           <a:p xmlns:a="http://schemas.openxmlformats.org/drawingml/2006/main">
             <a:pPr algn="l">
+              <a:buNone/>
               <a:defRPr sz="1575" b="0">
                 <a:solidFill>
                   <a:srgbClr val="111820"/>
                 </a:solidFill>
-                <a:latin typeface="Nanum Gothic"/>
-                <a:ea typeface="Nanum Gothic"/>
-                <a:cs typeface="Nanum Gothic"/>
+                <a:latin typeface="NanumGothic"/>
+                <a:ea typeface="NanumGothic"/>
+                <a:cs typeface="NanumGothic"/>
               </a:defRPr>
             </a:pPr>
             <a:r>
@@ -10061,9 +10332,9 @@
                 <a:solidFill>
                   <a:srgbClr val="111820"/>
                 </a:solidFill>
-                <a:latin typeface="Nanum Gothic"/>
-                <a:ea typeface="Nanum Gothic"/>
-                <a:cs typeface="Nanum Gothic"/>
+                <a:latin typeface="NanumGothic"/>
+                <a:ea typeface="NanumGothic"/>
+                <a:cs typeface="NanumGothic"/>
               </a:rPr>
               <a:t>출처·발표일·원문 링크 보존</a:t>
             </a:r>
@@ -10103,13 +10374,14 @@
           <a:lstStyle xmlns:a="http://schemas.openxmlformats.org/drawingml/2006/main"/>
           <a:p xmlns:a="http://schemas.openxmlformats.org/drawingml/2006/main">
             <a:pPr algn="l">
+              <a:buNone/>
               <a:defRPr sz="1575" b="1">
                 <a:solidFill>
                   <a:srgbClr val="0B6B57"/>
                 </a:solidFill>
-                <a:latin typeface="Nanum Gothic"/>
-                <a:ea typeface="Nanum Gothic"/>
-                <a:cs typeface="Nanum Gothic"/>
+                <a:latin typeface="NanumGothic"/>
+                <a:ea typeface="NanumGothic"/>
+                <a:cs typeface="NanumGothic"/>
               </a:defRPr>
             </a:pPr>
             <a:r>
@@ -10117,9 +10389,9 @@
                 <a:solidFill>
                   <a:srgbClr val="0B6B57"/>
                 </a:solidFill>
-                <a:latin typeface="Nanum Gothic"/>
-                <a:ea typeface="Nanum Gothic"/>
-                <a:cs typeface="Nanum Gothic"/>
+                <a:latin typeface="NanumGothic"/>
+                <a:ea typeface="NanumGothic"/>
+                <a:cs typeface="NanumGothic"/>
               </a:rPr>
               <a:t>•</a:t>
             </a:r>
@@ -10159,13 +10431,14 @@
           <a:lstStyle xmlns:a="http://schemas.openxmlformats.org/drawingml/2006/main"/>
           <a:p xmlns:a="http://schemas.openxmlformats.org/drawingml/2006/main">
             <a:pPr algn="l">
+              <a:buNone/>
               <a:defRPr sz="1575" b="0">
                 <a:solidFill>
                   <a:srgbClr val="111820"/>
                 </a:solidFill>
-                <a:latin typeface="Nanum Gothic"/>
-                <a:ea typeface="Nanum Gothic"/>
-                <a:cs typeface="Nanum Gothic"/>
+                <a:latin typeface="NanumGothic"/>
+                <a:ea typeface="NanumGothic"/>
+                <a:cs typeface="NanumGothic"/>
               </a:defRPr>
             </a:pPr>
             <a:r>
@@ -10173,11 +10446,11 @@
                 <a:solidFill>
                   <a:srgbClr val="111820"/>
                 </a:solidFill>
-                <a:latin typeface="Nanum Gothic"/>
-                <a:ea typeface="Nanum Gothic"/>
-                <a:cs typeface="Nanum Gothic"/>
-              </a:rPr>
-              <a:t>규칙·표준약관·FAQ를 역할별 분리</a:t>
+                <a:latin typeface="NanumGothic"/>
+                <a:ea typeface="NanumGothic"/>
+                <a:cs typeface="NanumGothic"/>
+              </a:rPr>
+              <a:t>규칙·공식 FAQ·통계를 역할별 분리</a:t>
             </a:r>
           </a:p>
         </p:txBody>
@@ -10215,13 +10488,14 @@
           <a:lstStyle xmlns:a="http://schemas.openxmlformats.org/drawingml/2006/main"/>
           <a:p xmlns:a="http://schemas.openxmlformats.org/drawingml/2006/main">
             <a:pPr algn="l">
+              <a:buNone/>
               <a:defRPr sz="1575" b="1">
                 <a:solidFill>
                   <a:srgbClr val="0B6B57"/>
                 </a:solidFill>
-                <a:latin typeface="Nanum Gothic"/>
-                <a:ea typeface="Nanum Gothic"/>
-                <a:cs typeface="Nanum Gothic"/>
+                <a:latin typeface="NanumGothic"/>
+                <a:ea typeface="NanumGothic"/>
+                <a:cs typeface="NanumGothic"/>
               </a:defRPr>
             </a:pPr>
             <a:r>
@@ -10229,9 +10503,9 @@
                 <a:solidFill>
                   <a:srgbClr val="0B6B57"/>
                 </a:solidFill>
-                <a:latin typeface="Nanum Gothic"/>
-                <a:ea typeface="Nanum Gothic"/>
-                <a:cs typeface="Nanum Gothic"/>
+                <a:latin typeface="NanumGothic"/>
+                <a:ea typeface="NanumGothic"/>
+                <a:cs typeface="NanumGothic"/>
               </a:rPr>
               <a:t>•</a:t>
             </a:r>
@@ -10271,13 +10545,14 @@
           <a:lstStyle xmlns:a="http://schemas.openxmlformats.org/drawingml/2006/main"/>
           <a:p xmlns:a="http://schemas.openxmlformats.org/drawingml/2006/main">
             <a:pPr algn="l">
+              <a:buNone/>
               <a:defRPr sz="1575" b="0">
                 <a:solidFill>
                   <a:srgbClr val="111820"/>
                 </a:solidFill>
-                <a:latin typeface="Nanum Gothic"/>
-                <a:ea typeface="Nanum Gothic"/>
-                <a:cs typeface="Nanum Gothic"/>
+                <a:latin typeface="NanumGothic"/>
+                <a:ea typeface="NanumGothic"/>
+                <a:cs typeface="NanumGothic"/>
               </a:defRPr>
             </a:pPr>
             <a:r>
@@ -10285,9 +10560,9 @@
                 <a:solidFill>
                   <a:srgbClr val="111820"/>
                 </a:solidFill>
-                <a:latin typeface="Nanum Gothic"/>
-                <a:ea typeface="Nanum Gothic"/>
-                <a:cs typeface="Nanum Gothic"/>
+                <a:latin typeface="NanumGothic"/>
+                <a:ea typeface="NanumGothic"/>
+                <a:cs typeface="NanumGothic"/>
               </a:rPr>
               <a:t>검색 결과를 정확히 일치·관련 용어로 구분</a:t>
             </a:r>
@@ -10327,13 +10602,14 @@
           <a:lstStyle xmlns:a="http://schemas.openxmlformats.org/drawingml/2006/main"/>
           <a:p xmlns:a="http://schemas.openxmlformats.org/drawingml/2006/main">
             <a:pPr algn="l">
+              <a:buNone/>
               <a:defRPr sz="1575" b="1">
                 <a:solidFill>
                   <a:srgbClr val="0B6B57"/>
                 </a:solidFill>
-                <a:latin typeface="Nanum Gothic"/>
-                <a:ea typeface="Nanum Gothic"/>
-                <a:cs typeface="Nanum Gothic"/>
+                <a:latin typeface="NanumGothic"/>
+                <a:ea typeface="NanumGothic"/>
+                <a:cs typeface="NanumGothic"/>
               </a:defRPr>
             </a:pPr>
             <a:r>
@@ -10341,9 +10617,9 @@
                 <a:solidFill>
                   <a:srgbClr val="0B6B57"/>
                 </a:solidFill>
-                <a:latin typeface="Nanum Gothic"/>
-                <a:ea typeface="Nanum Gothic"/>
-                <a:cs typeface="Nanum Gothic"/>
+                <a:latin typeface="NanumGothic"/>
+                <a:ea typeface="NanumGothic"/>
+                <a:cs typeface="NanumGothic"/>
               </a:rPr>
               <a:t>•</a:t>
             </a:r>
@@ -10383,13 +10659,14 @@
           <a:lstStyle xmlns:a="http://schemas.openxmlformats.org/drawingml/2006/main"/>
           <a:p xmlns:a="http://schemas.openxmlformats.org/drawingml/2006/main">
             <a:pPr algn="l">
+              <a:buNone/>
               <a:defRPr sz="1575" b="0">
                 <a:solidFill>
                   <a:srgbClr val="111820"/>
                 </a:solidFill>
-                <a:latin typeface="Nanum Gothic"/>
-                <a:ea typeface="Nanum Gothic"/>
-                <a:cs typeface="Nanum Gothic"/>
+                <a:latin typeface="NanumGothic"/>
+                <a:ea typeface="NanumGothic"/>
+                <a:cs typeface="NanumGothic"/>
               </a:defRPr>
             </a:pPr>
             <a:r>
@@ -10397,11 +10674,11 @@
                 <a:solidFill>
                   <a:srgbClr val="111820"/>
                 </a:solidFill>
-                <a:latin typeface="Nanum Gothic"/>
-                <a:ea typeface="Nanum Gothic"/>
-                <a:cs typeface="Nanum Gothic"/>
-              </a:rPr>
-              <a:t>정상 문장까지 포함해 오탐을 함께 측정</a:t>
+                <a:latin typeface="NanumGothic"/>
+                <a:ea typeface="NanumGothic"/>
+                <a:cs typeface="NanumGothic"/>
+              </a:rPr>
+              <a:t>제한·미확인 자료는 실행·배포에서 제외</a:t>
             </a:r>
           </a:p>
         </p:txBody>
@@ -10461,13 +10738,14 @@
           <a:lstStyle xmlns:a="http://schemas.openxmlformats.org/drawingml/2006/main"/>
           <a:p xmlns:a="http://schemas.openxmlformats.org/drawingml/2006/main">
             <a:pPr algn="l">
+              <a:buNone/>
               <a:defRPr sz="1125" b="1">
                 <a:solidFill>
                   <a:srgbClr val="0B6B57"/>
                 </a:solidFill>
-                <a:latin typeface="Nanum Gothic"/>
-                <a:ea typeface="Nanum Gothic"/>
-                <a:cs typeface="Nanum Gothic"/>
+                <a:latin typeface="NanumGothic"/>
+                <a:ea typeface="NanumGothic"/>
+                <a:cs typeface="NanumGothic"/>
               </a:defRPr>
             </a:pPr>
             <a:r>
@@ -10475,9 +10753,9 @@
                 <a:solidFill>
                   <a:srgbClr val="0B6B57"/>
                 </a:solidFill>
-                <a:latin typeface="Nanum Gothic"/>
-                <a:ea typeface="Nanum Gothic"/>
-                <a:cs typeface="Nanum Gothic"/>
+                <a:latin typeface="NanumGothic"/>
+                <a:ea typeface="NanumGothic"/>
+                <a:cs typeface="NanumGothic"/>
               </a:rPr>
               <a:t>시스템 아키텍처</a:t>
             </a:r>
@@ -10517,13 +10795,14 @@
           <a:lstStyle xmlns:a="http://schemas.openxmlformats.org/drawingml/2006/main"/>
           <a:p xmlns:a="http://schemas.openxmlformats.org/drawingml/2006/main">
             <a:pPr algn="l">
+              <a:buNone/>
               <a:defRPr sz="3525" b="1">
                 <a:solidFill>
                   <a:srgbClr val="111820"/>
                 </a:solidFill>
-                <a:latin typeface="Nanum Gothic"/>
-                <a:ea typeface="Nanum Gothic"/>
-                <a:cs typeface="Nanum Gothic"/>
+                <a:latin typeface="NanumGothic"/>
+                <a:ea typeface="NanumGothic"/>
+                <a:cs typeface="NanumGothic"/>
               </a:defRPr>
             </a:pPr>
             <a:r>
@@ -10531,9 +10810,9 @@
                 <a:solidFill>
                   <a:srgbClr val="111820"/>
                 </a:solidFill>
-                <a:latin typeface="Nanum Gothic"/>
-                <a:ea typeface="Nanum Gothic"/>
-                <a:cs typeface="Nanum Gothic"/>
+                <a:latin typeface="NanumGothic"/>
+                <a:ea typeface="NanumGothic"/>
+                <a:cs typeface="NanumGothic"/>
               </a:rPr>
               <a:t>규칙 기반 판단과 공식 근거 검색을 결합했습니다</a:t>
             </a:r>
@@ -10542,7 +10821,7 @@
       </p:sp>
       <p:cxnSp>
         <p:nvCxnSpPr>
-          <p:cNvPr id="28" name="rule-8"/>
+          <p:cNvPr id="60" name="rule-8"/>
           <p:cNvCxnSpPr/>
           <p:nvPr/>
         </p:nvCxnSpPr>
@@ -10595,13 +10874,14 @@
           <a:lstStyle xmlns:a="http://schemas.openxmlformats.org/drawingml/2006/main"/>
           <a:p xmlns:a="http://schemas.openxmlformats.org/drawingml/2006/main">
             <a:pPr algn="r">
+              <a:buNone/>
               <a:defRPr sz="975" b="0">
                 <a:solidFill>
                   <a:srgbClr val="58636F"/>
                 </a:solidFill>
-                <a:latin typeface="Nanum Gothic"/>
-                <a:ea typeface="Nanum Gothic"/>
-                <a:cs typeface="Nanum Gothic"/>
+                <a:latin typeface="NanumGothic"/>
+                <a:ea typeface="NanumGothic"/>
+                <a:cs typeface="NanumGothic"/>
               </a:defRPr>
             </a:pPr>
             <a:r>
@@ -10609,9 +10889,9 @@
                 <a:solidFill>
                   <a:srgbClr val="58636F"/>
                 </a:solidFill>
-                <a:latin typeface="Nanum Gothic"/>
-                <a:ea typeface="Nanum Gothic"/>
-                <a:cs typeface="Nanum Gothic"/>
+                <a:latin typeface="NanumGothic"/>
+                <a:ea typeface="NanumGothic"/>
+                <a:cs typeface="NanumGothic"/>
               </a:rPr>
               <a:t>08</a:t>
             </a:r>
@@ -10620,7 +10900,7 @@
       </p:sp>
       <p:cxnSp>
         <p:nvCxnSpPr>
-          <p:cNvPr id="30" name="arch-arrow-0"/>
+          <p:cNvPr id="62" name="arch-arrow-0"/>
           <p:cNvCxnSpPr/>
           <p:nvPr/>
         </p:nvCxnSpPr>
@@ -10642,7 +10922,7 @@
       </p:cxnSp>
       <p:cxnSp>
         <p:nvCxnSpPr>
-          <p:cNvPr id="31" name="arch-arrow-1"/>
+          <p:cNvPr id="63" name="arch-arrow-1"/>
           <p:cNvCxnSpPr/>
           <p:nvPr/>
         </p:nvCxnSpPr>
@@ -10664,7 +10944,7 @@
       </p:cxnSp>
       <p:cxnSp>
         <p:nvCxnSpPr>
-          <p:cNvPr id="32" name="arch-arrow-2"/>
+          <p:cNvPr id="64" name="arch-arrow-2"/>
           <p:cNvCxnSpPr/>
           <p:nvPr/>
         </p:nvCxnSpPr>
@@ -10686,7 +10966,7 @@
       </p:cxnSp>
       <p:cxnSp>
         <p:nvCxnSpPr>
-          <p:cNvPr id="33" name="arch-arrow-3"/>
+          <p:cNvPr id="65" name="arch-arrow-3"/>
           <p:cNvCxnSpPr/>
           <p:nvPr/>
         </p:nvCxnSpPr>
@@ -10738,6 +11018,11 @@
             <a:prstDash val="solid"/>
           </a:ln>
         </p:spPr>
+        <p:txBody>
+          <a:bodyPr xmlns:a="http://schemas.openxmlformats.org/drawingml/2006/main"/>
+          <a:lstStyle xmlns:a="http://schemas.openxmlformats.org/drawingml/2006/main"/>
+          <a:p xmlns:a="http://schemas.openxmlformats.org/drawingml/2006/main"/>
+        </p:txBody>
       </p:sp>
       <p:sp>
         <p:nvSpPr>
@@ -10772,13 +11057,14 @@
           <a:lstStyle xmlns:a="http://schemas.openxmlformats.org/drawingml/2006/main"/>
           <a:p xmlns:a="http://schemas.openxmlformats.org/drawingml/2006/main">
             <a:pPr algn="ctr">
+              <a:buNone/>
               <a:defRPr sz="2025" b="1">
                 <a:solidFill>
                   <a:srgbClr val="111820"/>
                 </a:solidFill>
-                <a:latin typeface="Nanum Gothic"/>
-                <a:ea typeface="Nanum Gothic"/>
-                <a:cs typeface="Nanum Gothic"/>
+                <a:latin typeface="NanumGothic"/>
+                <a:ea typeface="NanumGothic"/>
+                <a:cs typeface="NanumGothic"/>
               </a:defRPr>
             </a:pPr>
             <a:r>
@@ -10786,9 +11072,9 @@
                 <a:solidFill>
                   <a:srgbClr val="111820"/>
                 </a:solidFill>
-                <a:latin typeface="Nanum Gothic"/>
-                <a:ea typeface="Nanum Gothic"/>
-                <a:cs typeface="Nanum Gothic"/>
+                <a:latin typeface="NanumGothic"/>
+                <a:ea typeface="NanumGothic"/>
+                <a:cs typeface="NanumGothic"/>
               </a:rPr>
               <a:t>입력</a:t>
             </a:r>
@@ -10828,13 +11114,14 @@
           <a:lstStyle xmlns:a="http://schemas.openxmlformats.org/drawingml/2006/main"/>
           <a:p xmlns:a="http://schemas.openxmlformats.org/drawingml/2006/main">
             <a:pPr algn="ctr">
+              <a:buNone/>
               <a:defRPr sz="1500" b="0">
                 <a:solidFill>
                   <a:srgbClr val="58636F"/>
                 </a:solidFill>
-                <a:latin typeface="Nanum Gothic"/>
-                <a:ea typeface="Nanum Gothic"/>
-                <a:cs typeface="Nanum Gothic"/>
+                <a:latin typeface="NanumGothic"/>
+                <a:ea typeface="NanumGothic"/>
+                <a:cs typeface="NanumGothic"/>
               </a:defRPr>
             </a:pPr>
             <a:r>
@@ -10842,22 +11129,23 @@
                 <a:solidFill>
                   <a:srgbClr val="58636F"/>
                 </a:solidFill>
-                <a:latin typeface="Nanum Gothic"/>
-                <a:ea typeface="Nanum Gothic"/>
-                <a:cs typeface="Nanum Gothic"/>
+                <a:latin typeface="NanumGothic"/>
+                <a:ea typeface="NanumGothic"/>
+                <a:cs typeface="NanumGothic"/>
               </a:rPr>
               <a:t>텍스트</a:t>
             </a:r>
           </a:p>
           <a:p xmlns:a="http://schemas.openxmlformats.org/drawingml/2006/main">
             <a:pPr algn="ctr">
+              <a:buNone/>
               <a:defRPr sz="1500" b="0">
                 <a:solidFill>
                   <a:srgbClr val="58636F"/>
                 </a:solidFill>
-                <a:latin typeface="Nanum Gothic"/>
-                <a:ea typeface="Nanum Gothic"/>
-                <a:cs typeface="Nanum Gothic"/>
+                <a:latin typeface="NanumGothic"/>
+                <a:ea typeface="NanumGothic"/>
+                <a:cs typeface="NanumGothic"/>
               </a:defRPr>
             </a:pPr>
             <a:r>
@@ -10865,22 +11153,23 @@
                 <a:solidFill>
                   <a:srgbClr val="58636F"/>
                 </a:solidFill>
-                <a:latin typeface="Nanum Gothic"/>
-                <a:ea typeface="Nanum Gothic"/>
-                <a:cs typeface="Nanum Gothic"/>
+                <a:latin typeface="NanumGothic"/>
+                <a:ea typeface="NanumGothic"/>
+                <a:cs typeface="NanumGothic"/>
               </a:rPr>
               <a:t>사진·PDF</a:t>
             </a:r>
           </a:p>
           <a:p xmlns:a="http://schemas.openxmlformats.org/drawingml/2006/main">
             <a:pPr algn="ctr">
+              <a:buNone/>
               <a:defRPr sz="1500" b="0">
                 <a:solidFill>
                   <a:srgbClr val="58636F"/>
                 </a:solidFill>
-                <a:latin typeface="Nanum Gothic"/>
-                <a:ea typeface="Nanum Gothic"/>
-                <a:cs typeface="Nanum Gothic"/>
+                <a:latin typeface="NanumGothic"/>
+                <a:ea typeface="NanumGothic"/>
+                <a:cs typeface="NanumGothic"/>
               </a:defRPr>
             </a:pPr>
             <a:r>
@@ -10888,9 +11177,9 @@
                 <a:solidFill>
                   <a:srgbClr val="58636F"/>
                 </a:solidFill>
-                <a:latin typeface="Nanum Gothic"/>
-                <a:ea typeface="Nanum Gothic"/>
-                <a:cs typeface="Nanum Gothic"/>
+                <a:latin typeface="NanumGothic"/>
+                <a:ea typeface="NanumGothic"/>
+                <a:cs typeface="NanumGothic"/>
               </a:rPr>
               <a:t>음성</a:t>
             </a:r>
@@ -10929,6 +11218,11 @@
             <a:prstDash val="solid"/>
           </a:ln>
         </p:spPr>
+        <p:txBody>
+          <a:bodyPr xmlns:a="http://schemas.openxmlformats.org/drawingml/2006/main"/>
+          <a:lstStyle xmlns:a="http://schemas.openxmlformats.org/drawingml/2006/main"/>
+          <a:p xmlns:a="http://schemas.openxmlformats.org/drawingml/2006/main"/>
+        </p:txBody>
       </p:sp>
       <p:sp>
         <p:nvSpPr>
@@ -10963,13 +11257,14 @@
           <a:lstStyle xmlns:a="http://schemas.openxmlformats.org/drawingml/2006/main"/>
           <a:p xmlns:a="http://schemas.openxmlformats.org/drawingml/2006/main">
             <a:pPr algn="ctr">
+              <a:buNone/>
               <a:defRPr sz="2025" b="1">
                 <a:solidFill>
                   <a:srgbClr val="111820"/>
                 </a:solidFill>
-                <a:latin typeface="Nanum Gothic"/>
-                <a:ea typeface="Nanum Gothic"/>
-                <a:cs typeface="Nanum Gothic"/>
+                <a:latin typeface="NanumGothic"/>
+                <a:ea typeface="NanumGothic"/>
+                <a:cs typeface="NanumGothic"/>
               </a:defRPr>
             </a:pPr>
             <a:r>
@@ -10977,9 +11272,9 @@
                 <a:solidFill>
                   <a:srgbClr val="111820"/>
                 </a:solidFill>
-                <a:latin typeface="Nanum Gothic"/>
-                <a:ea typeface="Nanum Gothic"/>
-                <a:cs typeface="Nanum Gothic"/>
+                <a:latin typeface="NanumGothic"/>
+                <a:ea typeface="NanumGothic"/>
+                <a:cs typeface="NanumGothic"/>
               </a:rPr>
               <a:t>전처리</a:t>
             </a:r>
@@ -11019,13 +11314,14 @@
           <a:lstStyle xmlns:a="http://schemas.openxmlformats.org/drawingml/2006/main"/>
           <a:p xmlns:a="http://schemas.openxmlformats.org/drawingml/2006/main">
             <a:pPr algn="ctr">
+              <a:buNone/>
               <a:defRPr sz="1500" b="0">
                 <a:solidFill>
                   <a:srgbClr val="58636F"/>
                 </a:solidFill>
-                <a:latin typeface="Nanum Gothic"/>
-                <a:ea typeface="Nanum Gothic"/>
-                <a:cs typeface="Nanum Gothic"/>
+                <a:latin typeface="NanumGothic"/>
+                <a:ea typeface="NanumGothic"/>
+                <a:cs typeface="NanumGothic"/>
               </a:defRPr>
             </a:pPr>
             <a:r>
@@ -11033,22 +11329,23 @@
                 <a:solidFill>
                   <a:srgbClr val="58636F"/>
                 </a:solidFill>
-                <a:latin typeface="Nanum Gothic"/>
-                <a:ea typeface="Nanum Gothic"/>
-                <a:cs typeface="Nanum Gothic"/>
+                <a:latin typeface="NanumGothic"/>
+                <a:ea typeface="NanumGothic"/>
+                <a:cs typeface="NanumGothic"/>
               </a:rPr>
               <a:t>OCR</a:t>
             </a:r>
           </a:p>
           <a:p xmlns:a="http://schemas.openxmlformats.org/drawingml/2006/main">
             <a:pPr algn="ctr">
+              <a:buNone/>
               <a:defRPr sz="1500" b="0">
                 <a:solidFill>
                   <a:srgbClr val="58636F"/>
                 </a:solidFill>
-                <a:latin typeface="Nanum Gothic"/>
-                <a:ea typeface="Nanum Gothic"/>
-                <a:cs typeface="Nanum Gothic"/>
+                <a:latin typeface="NanumGothic"/>
+                <a:ea typeface="NanumGothic"/>
+                <a:cs typeface="NanumGothic"/>
               </a:defRPr>
             </a:pPr>
             <a:r>
@@ -11056,22 +11353,23 @@
                 <a:solidFill>
                   <a:srgbClr val="58636F"/>
                 </a:solidFill>
-                <a:latin typeface="Nanum Gothic"/>
-                <a:ea typeface="Nanum Gothic"/>
-                <a:cs typeface="Nanum Gothic"/>
+                <a:latin typeface="NanumGothic"/>
+                <a:ea typeface="NanumGothic"/>
+                <a:cs typeface="NanumGothic"/>
               </a:rPr>
               <a:t>문장 분리</a:t>
             </a:r>
           </a:p>
           <a:p xmlns:a="http://schemas.openxmlformats.org/drawingml/2006/main">
             <a:pPr algn="ctr">
+              <a:buNone/>
               <a:defRPr sz="1500" b="0">
                 <a:solidFill>
                   <a:srgbClr val="58636F"/>
                 </a:solidFill>
-                <a:latin typeface="Nanum Gothic"/>
-                <a:ea typeface="Nanum Gothic"/>
-                <a:cs typeface="Nanum Gothic"/>
+                <a:latin typeface="NanumGothic"/>
+                <a:ea typeface="NanumGothic"/>
+                <a:cs typeface="NanumGothic"/>
               </a:defRPr>
             </a:pPr>
             <a:r>
@@ -11079,9 +11377,9 @@
                 <a:solidFill>
                   <a:srgbClr val="58636F"/>
                 </a:solidFill>
-                <a:latin typeface="Nanum Gothic"/>
-                <a:ea typeface="Nanum Gothic"/>
-                <a:cs typeface="Nanum Gothic"/>
+                <a:latin typeface="NanumGothic"/>
+                <a:ea typeface="NanumGothic"/>
+                <a:cs typeface="NanumGothic"/>
               </a:rPr>
               <a:t>개인정보 가림</a:t>
             </a:r>
@@ -11120,6 +11418,11 @@
             <a:prstDash val="solid"/>
           </a:ln>
         </p:spPr>
+        <p:txBody>
+          <a:bodyPr xmlns:a="http://schemas.openxmlformats.org/drawingml/2006/main"/>
+          <a:lstStyle xmlns:a="http://schemas.openxmlformats.org/drawingml/2006/main"/>
+          <a:p xmlns:a="http://schemas.openxmlformats.org/drawingml/2006/main"/>
+        </p:txBody>
       </p:sp>
       <p:sp>
         <p:nvSpPr>
@@ -11154,13 +11457,14 @@
           <a:lstStyle xmlns:a="http://schemas.openxmlformats.org/drawingml/2006/main"/>
           <a:p xmlns:a="http://schemas.openxmlformats.org/drawingml/2006/main">
             <a:pPr algn="ctr">
+              <a:buNone/>
               <a:defRPr sz="2025" b="1">
                 <a:solidFill>
                   <a:srgbClr val="1B4A73"/>
                 </a:solidFill>
-                <a:latin typeface="Nanum Gothic"/>
-                <a:ea typeface="Nanum Gothic"/>
-                <a:cs typeface="Nanum Gothic"/>
+                <a:latin typeface="NanumGothic"/>
+                <a:ea typeface="NanumGothic"/>
+                <a:cs typeface="NanumGothic"/>
               </a:defRPr>
             </a:pPr>
             <a:r>
@@ -11168,9 +11472,9 @@
                 <a:solidFill>
                   <a:srgbClr val="1B4A73"/>
                 </a:solidFill>
-                <a:latin typeface="Nanum Gothic"/>
-                <a:ea typeface="Nanum Gothic"/>
-                <a:cs typeface="Nanum Gothic"/>
+                <a:latin typeface="NanumGothic"/>
+                <a:ea typeface="NanumGothic"/>
+                <a:cs typeface="NanumGothic"/>
               </a:rPr>
               <a:t>판단</a:t>
             </a:r>
@@ -11210,13 +11514,14 @@
           <a:lstStyle xmlns:a="http://schemas.openxmlformats.org/drawingml/2006/main"/>
           <a:p xmlns:a="http://schemas.openxmlformats.org/drawingml/2006/main">
             <a:pPr algn="ctr">
+              <a:buNone/>
               <a:defRPr sz="1500" b="0">
                 <a:solidFill>
                   <a:srgbClr val="58636F"/>
                 </a:solidFill>
-                <a:latin typeface="Nanum Gothic"/>
-                <a:ea typeface="Nanum Gothic"/>
-                <a:cs typeface="Nanum Gothic"/>
+                <a:latin typeface="NanumGothic"/>
+                <a:ea typeface="NanumGothic"/>
+                <a:cs typeface="NanumGothic"/>
               </a:defRPr>
             </a:pPr>
             <a:r>
@@ -11224,22 +11529,23 @@
                 <a:solidFill>
                   <a:srgbClr val="58636F"/>
                 </a:solidFill>
-                <a:latin typeface="Nanum Gothic"/>
-                <a:ea typeface="Nanum Gothic"/>
-                <a:cs typeface="Nanum Gothic"/>
+                <a:latin typeface="NanumGothic"/>
+                <a:ea typeface="NanumGothic"/>
+                <a:cs typeface="NanumGothic"/>
               </a:rPr>
               <a:t>위험 규칙</a:t>
             </a:r>
           </a:p>
           <a:p xmlns:a="http://schemas.openxmlformats.org/drawingml/2006/main">
             <a:pPr algn="ctr">
+              <a:buNone/>
               <a:defRPr sz="1500" b="0">
                 <a:solidFill>
                   <a:srgbClr val="58636F"/>
                 </a:solidFill>
-                <a:latin typeface="Nanum Gothic"/>
-                <a:ea typeface="Nanum Gothic"/>
-                <a:cs typeface="Nanum Gothic"/>
+                <a:latin typeface="NanumGothic"/>
+                <a:ea typeface="NanumGothic"/>
+                <a:cs typeface="NanumGothic"/>
               </a:defRPr>
             </a:pPr>
             <a:r>
@@ -11247,22 +11553,23 @@
                 <a:solidFill>
                   <a:srgbClr val="58636F"/>
                 </a:solidFill>
-                <a:latin typeface="Nanum Gothic"/>
-                <a:ea typeface="Nanum Gothic"/>
-                <a:cs typeface="Nanum Gothic"/>
+                <a:latin typeface="NanumGothic"/>
+                <a:ea typeface="NanumGothic"/>
+                <a:cs typeface="NanumGothic"/>
               </a:rPr>
               <a:t>사고 분류</a:t>
             </a:r>
           </a:p>
           <a:p xmlns:a="http://schemas.openxmlformats.org/drawingml/2006/main">
             <a:pPr algn="ctr">
+              <a:buNone/>
               <a:defRPr sz="1500" b="0">
                 <a:solidFill>
                   <a:srgbClr val="58636F"/>
                 </a:solidFill>
-                <a:latin typeface="Nanum Gothic"/>
-                <a:ea typeface="Nanum Gothic"/>
-                <a:cs typeface="Nanum Gothic"/>
+                <a:latin typeface="NanumGothic"/>
+                <a:ea typeface="NanumGothic"/>
+                <a:cs typeface="NanumGothic"/>
               </a:defRPr>
             </a:pPr>
             <a:r>
@@ -11270,9 +11577,9 @@
                 <a:solidFill>
                   <a:srgbClr val="58636F"/>
                 </a:solidFill>
-                <a:latin typeface="Nanum Gothic"/>
-                <a:ea typeface="Nanum Gothic"/>
-                <a:cs typeface="Nanum Gothic"/>
+                <a:latin typeface="NanumGothic"/>
+                <a:ea typeface="NanumGothic"/>
+                <a:cs typeface="NanumGothic"/>
               </a:rPr>
               <a:t>긴급도</a:t>
             </a:r>
@@ -11311,6 +11618,11 @@
             <a:prstDash val="solid"/>
           </a:ln>
         </p:spPr>
+        <p:txBody>
+          <a:bodyPr xmlns:a="http://schemas.openxmlformats.org/drawingml/2006/main"/>
+          <a:lstStyle xmlns:a="http://schemas.openxmlformats.org/drawingml/2006/main"/>
+          <a:p xmlns:a="http://schemas.openxmlformats.org/drawingml/2006/main"/>
+        </p:txBody>
       </p:sp>
       <p:sp>
         <p:nvSpPr>
@@ -11345,13 +11657,14 @@
           <a:lstStyle xmlns:a="http://schemas.openxmlformats.org/drawingml/2006/main"/>
           <a:p xmlns:a="http://schemas.openxmlformats.org/drawingml/2006/main">
             <a:pPr algn="ctr">
+              <a:buNone/>
               <a:defRPr sz="2025" b="1">
                 <a:solidFill>
                   <a:srgbClr val="111820"/>
                 </a:solidFill>
-                <a:latin typeface="Nanum Gothic"/>
-                <a:ea typeface="Nanum Gothic"/>
-                <a:cs typeface="Nanum Gothic"/>
+                <a:latin typeface="NanumGothic"/>
+                <a:ea typeface="NanumGothic"/>
+                <a:cs typeface="NanumGothic"/>
               </a:defRPr>
             </a:pPr>
             <a:r>
@@ -11359,9 +11672,9 @@
                 <a:solidFill>
                   <a:srgbClr val="111820"/>
                 </a:solidFill>
-                <a:latin typeface="Nanum Gothic"/>
-                <a:ea typeface="Nanum Gothic"/>
-                <a:cs typeface="Nanum Gothic"/>
+                <a:latin typeface="NanumGothic"/>
+                <a:ea typeface="NanumGothic"/>
+                <a:cs typeface="NanumGothic"/>
               </a:rPr>
               <a:t>근거</a:t>
             </a:r>
@@ -11401,13 +11714,14 @@
           <a:lstStyle xmlns:a="http://schemas.openxmlformats.org/drawingml/2006/main"/>
           <a:p xmlns:a="http://schemas.openxmlformats.org/drawingml/2006/main">
             <a:pPr algn="ctr">
+              <a:buNone/>
               <a:defRPr sz="1500" b="0">
                 <a:solidFill>
                   <a:srgbClr val="58636F"/>
                 </a:solidFill>
-                <a:latin typeface="Nanum Gothic"/>
-                <a:ea typeface="Nanum Gothic"/>
-                <a:cs typeface="Nanum Gothic"/>
+                <a:latin typeface="NanumGothic"/>
+                <a:ea typeface="NanumGothic"/>
+                <a:cs typeface="NanumGothic"/>
               </a:defRPr>
             </a:pPr>
             <a:r>
@@ -11415,22 +11729,23 @@
                 <a:solidFill>
                   <a:srgbClr val="58636F"/>
                 </a:solidFill>
-                <a:latin typeface="Nanum Gothic"/>
-                <a:ea typeface="Nanum Gothic"/>
-                <a:cs typeface="Nanum Gothic"/>
-              </a:rPr>
-              <a:t>표준약관</a:t>
+                <a:latin typeface="NanumGothic"/>
+                <a:ea typeface="NanumGothic"/>
+                <a:cs typeface="NanumGothic"/>
+              </a:rPr>
+              <a:t>공식 기준</a:t>
             </a:r>
           </a:p>
           <a:p xmlns:a="http://schemas.openxmlformats.org/drawingml/2006/main">
             <a:pPr algn="ctr">
+              <a:buNone/>
               <a:defRPr sz="1500" b="0">
                 <a:solidFill>
                   <a:srgbClr val="58636F"/>
                 </a:solidFill>
-                <a:latin typeface="Nanum Gothic"/>
-                <a:ea typeface="Nanum Gothic"/>
-                <a:cs typeface="Nanum Gothic"/>
+                <a:latin typeface="NanumGothic"/>
+                <a:ea typeface="NanumGothic"/>
+                <a:cs typeface="NanumGothic"/>
               </a:defRPr>
             </a:pPr>
             <a:r>
@@ -11438,22 +11753,23 @@
                 <a:solidFill>
                   <a:srgbClr val="58636F"/>
                 </a:solidFill>
-                <a:latin typeface="Nanum Gothic"/>
-                <a:ea typeface="Nanum Gothic"/>
-                <a:cs typeface="Nanum Gothic"/>
+                <a:latin typeface="NanumGothic"/>
+                <a:ea typeface="NanumGothic"/>
+                <a:cs typeface="NanumGothic"/>
               </a:rPr>
               <a:t>공식 FAQ</a:t>
             </a:r>
           </a:p>
           <a:p xmlns:a="http://schemas.openxmlformats.org/drawingml/2006/main">
             <a:pPr algn="ctr">
+              <a:buNone/>
               <a:defRPr sz="1500" b="0">
                 <a:solidFill>
                   <a:srgbClr val="58636F"/>
                 </a:solidFill>
-                <a:latin typeface="Nanum Gothic"/>
-                <a:ea typeface="Nanum Gothic"/>
-                <a:cs typeface="Nanum Gothic"/>
+                <a:latin typeface="NanumGothic"/>
+                <a:ea typeface="NanumGothic"/>
+                <a:cs typeface="NanumGothic"/>
               </a:defRPr>
             </a:pPr>
             <a:r>
@@ -11461,9 +11777,9 @@
                 <a:solidFill>
                   <a:srgbClr val="58636F"/>
                 </a:solidFill>
-                <a:latin typeface="Nanum Gothic"/>
-                <a:ea typeface="Nanum Gothic"/>
-                <a:cs typeface="Nanum Gothic"/>
+                <a:latin typeface="NanumGothic"/>
+                <a:ea typeface="NanumGothic"/>
+                <a:cs typeface="NanumGothic"/>
               </a:rPr>
               <a:t>사례 검색</a:t>
             </a:r>
@@ -11502,6 +11818,11 @@
             <a:prstDash val="solid"/>
           </a:ln>
         </p:spPr>
+        <p:txBody>
+          <a:bodyPr xmlns:a="http://schemas.openxmlformats.org/drawingml/2006/main"/>
+          <a:lstStyle xmlns:a="http://schemas.openxmlformats.org/drawingml/2006/main"/>
+          <a:p xmlns:a="http://schemas.openxmlformats.org/drawingml/2006/main"/>
+        </p:txBody>
       </p:sp>
       <p:sp>
         <p:nvSpPr>
@@ -11536,13 +11857,14 @@
           <a:lstStyle xmlns:a="http://schemas.openxmlformats.org/drawingml/2006/main"/>
           <a:p xmlns:a="http://schemas.openxmlformats.org/drawingml/2006/main">
             <a:pPr algn="ctr">
+              <a:buNone/>
               <a:defRPr sz="2025" b="1">
                 <a:solidFill>
                   <a:srgbClr val="111820"/>
                 </a:solidFill>
-                <a:latin typeface="Nanum Gothic"/>
-                <a:ea typeface="Nanum Gothic"/>
-                <a:cs typeface="Nanum Gothic"/>
+                <a:latin typeface="NanumGothic"/>
+                <a:ea typeface="NanumGothic"/>
+                <a:cs typeface="NanumGothic"/>
               </a:defRPr>
             </a:pPr>
             <a:r>
@@ -11550,9 +11872,9 @@
                 <a:solidFill>
                   <a:srgbClr val="111820"/>
                 </a:solidFill>
-                <a:latin typeface="Nanum Gothic"/>
-                <a:ea typeface="Nanum Gothic"/>
-                <a:cs typeface="Nanum Gothic"/>
+                <a:latin typeface="NanumGothic"/>
+                <a:ea typeface="NanumGothic"/>
+                <a:cs typeface="NanumGothic"/>
               </a:rPr>
               <a:t>출력</a:t>
             </a:r>
@@ -11592,13 +11914,14 @@
           <a:lstStyle xmlns:a="http://schemas.openxmlformats.org/drawingml/2006/main"/>
           <a:p xmlns:a="http://schemas.openxmlformats.org/drawingml/2006/main">
             <a:pPr algn="ctr">
+              <a:buNone/>
               <a:defRPr sz="1500" b="0">
                 <a:solidFill>
                   <a:srgbClr val="58636F"/>
                 </a:solidFill>
-                <a:latin typeface="Nanum Gothic"/>
-                <a:ea typeface="Nanum Gothic"/>
-                <a:cs typeface="Nanum Gothic"/>
+                <a:latin typeface="NanumGothic"/>
+                <a:ea typeface="NanumGothic"/>
+                <a:cs typeface="NanumGothic"/>
               </a:defRPr>
             </a:pPr>
             <a:r>
@@ -11606,22 +11929,23 @@
                 <a:solidFill>
                   <a:srgbClr val="58636F"/>
                 </a:solidFill>
-                <a:latin typeface="Nanum Gothic"/>
-                <a:ea typeface="Nanum Gothic"/>
-                <a:cs typeface="Nanum Gothic"/>
+                <a:latin typeface="NanumGothic"/>
+                <a:ea typeface="NanumGothic"/>
+                <a:cs typeface="NanumGothic"/>
               </a:rPr>
               <a:t>쉬운 설명</a:t>
             </a:r>
           </a:p>
           <a:p xmlns:a="http://schemas.openxmlformats.org/drawingml/2006/main">
             <a:pPr algn="ctr">
+              <a:buNone/>
               <a:defRPr sz="1500" b="0">
                 <a:solidFill>
                   <a:srgbClr val="58636F"/>
                 </a:solidFill>
-                <a:latin typeface="Nanum Gothic"/>
-                <a:ea typeface="Nanum Gothic"/>
-                <a:cs typeface="Nanum Gothic"/>
+                <a:latin typeface="NanumGothic"/>
+                <a:ea typeface="NanumGothic"/>
+                <a:cs typeface="NanumGothic"/>
               </a:defRPr>
             </a:pPr>
             <a:r>
@@ -11629,22 +11953,23 @@
                 <a:solidFill>
                   <a:srgbClr val="58636F"/>
                 </a:solidFill>
-                <a:latin typeface="Nanum Gothic"/>
-                <a:ea typeface="Nanum Gothic"/>
-                <a:cs typeface="Nanum Gothic"/>
+                <a:latin typeface="NanumGothic"/>
+                <a:ea typeface="NanumGothic"/>
+                <a:cs typeface="NanumGothic"/>
               </a:rPr>
               <a:t>행동 계획</a:t>
             </a:r>
           </a:p>
           <a:p xmlns:a="http://schemas.openxmlformats.org/drawingml/2006/main">
             <a:pPr algn="ctr">
+              <a:buNone/>
               <a:defRPr sz="1500" b="0">
                 <a:solidFill>
                   <a:srgbClr val="58636F"/>
                 </a:solidFill>
-                <a:latin typeface="Nanum Gothic"/>
-                <a:ea typeface="Nanum Gothic"/>
-                <a:cs typeface="Nanum Gothic"/>
+                <a:latin typeface="NanumGothic"/>
+                <a:ea typeface="NanumGothic"/>
+                <a:cs typeface="NanumGothic"/>
               </a:defRPr>
             </a:pPr>
             <a:r>
@@ -11652,9 +11977,9 @@
                 <a:solidFill>
                   <a:srgbClr val="58636F"/>
                 </a:solidFill>
-                <a:latin typeface="Nanum Gothic"/>
-                <a:ea typeface="Nanum Gothic"/>
-                <a:cs typeface="Nanum Gothic"/>
+                <a:latin typeface="NanumGothic"/>
+                <a:ea typeface="NanumGothic"/>
+                <a:cs typeface="NanumGothic"/>
               </a:rPr>
               <a:t>문서·공유</a:t>
             </a:r>
@@ -11694,13 +12019,14 @@
           <a:lstStyle xmlns:a="http://schemas.openxmlformats.org/drawingml/2006/main"/>
           <a:p xmlns:a="http://schemas.openxmlformats.org/drawingml/2006/main">
             <a:pPr algn="ctr">
+              <a:buNone/>
               <a:defRPr sz="1725" b="1">
                 <a:solidFill>
                   <a:srgbClr val="111820"/>
                 </a:solidFill>
-                <a:latin typeface="Nanum Gothic"/>
-                <a:ea typeface="Nanum Gothic"/>
-                <a:cs typeface="Nanum Gothic"/>
+                <a:latin typeface="NanumGothic"/>
+                <a:ea typeface="NanumGothic"/>
+                <a:cs typeface="NanumGothic"/>
               </a:defRPr>
             </a:pPr>
             <a:r>
@@ -11708,9 +12034,9 @@
                 <a:solidFill>
                   <a:srgbClr val="111820"/>
                 </a:solidFill>
-                <a:latin typeface="Nanum Gothic"/>
-                <a:ea typeface="Nanum Gothic"/>
-                <a:cs typeface="Nanum Gothic"/>
+                <a:latin typeface="NanumGothic"/>
+                <a:ea typeface="NanumGothic"/>
+                <a:cs typeface="NanumGothic"/>
               </a:rPr>
               <a:t>Next.js + TypeScript  |  FastAPI + Python  |  Tesseract OCR  |  Web Speech API / Whisper  |  Docker</a:t>
             </a:r>
@@ -11750,13 +12076,14 @@
           <a:lstStyle xmlns:a="http://schemas.openxmlformats.org/drawingml/2006/main"/>
           <a:p xmlns:a="http://schemas.openxmlformats.org/drawingml/2006/main">
             <a:pPr algn="ctr">
+              <a:buNone/>
               <a:defRPr sz="1500" b="0">
                 <a:solidFill>
                   <a:srgbClr val="0B6B57"/>
                 </a:solidFill>
-                <a:latin typeface="Nanum Gothic"/>
-                <a:ea typeface="Nanum Gothic"/>
-                <a:cs typeface="Nanum Gothic"/>
+                <a:latin typeface="NanumGothic"/>
+                <a:ea typeface="NanumGothic"/>
+                <a:cs typeface="NanumGothic"/>
               </a:defRPr>
             </a:pPr>
             <a:r>
@@ -11764,9 +12091,9 @@
                 <a:solidFill>
                   <a:srgbClr val="0B6B57"/>
                 </a:solidFill>
-                <a:latin typeface="Nanum Gothic"/>
-                <a:ea typeface="Nanum Gothic"/>
-                <a:cs typeface="Nanum Gothic"/>
+                <a:latin typeface="NanumGothic"/>
+                <a:ea typeface="NanumGothic"/>
+                <a:cs typeface="NanumGothic"/>
               </a:rPr>
               <a:t>프론트와 API를 단일 주소로 배포해 연결 오류를 줄였습니다.</a:t>
             </a:r>
@@ -11828,13 +12155,14 @@
           <a:lstStyle xmlns:a="http://schemas.openxmlformats.org/drawingml/2006/main"/>
           <a:p xmlns:a="http://schemas.openxmlformats.org/drawingml/2006/main">
             <a:pPr algn="l">
+              <a:buNone/>
               <a:defRPr sz="1125" b="1">
                 <a:solidFill>
                   <a:srgbClr val="0B6B57"/>
                 </a:solidFill>
-                <a:latin typeface="Nanum Gothic"/>
-                <a:ea typeface="Nanum Gothic"/>
-                <a:cs typeface="Nanum Gothic"/>
+                <a:latin typeface="NanumGothic"/>
+                <a:ea typeface="NanumGothic"/>
+                <a:cs typeface="NanumGothic"/>
               </a:defRPr>
             </a:pPr>
             <a:r>
@@ -11842,11 +12170,11 @@
                 <a:solidFill>
                   <a:srgbClr val="0B6B57"/>
                 </a:solidFill>
-                <a:latin typeface="Nanum Gothic"/>
-                <a:ea typeface="Nanum Gothic"/>
-                <a:cs typeface="Nanum Gothic"/>
-              </a:rPr>
-              <a:t>고령층 UX와 안전장치</a:t>
+                <a:latin typeface="NanumGothic"/>
+                <a:ea typeface="NanumGothic"/>
+                <a:cs typeface="NanumGothic"/>
+              </a:rPr>
+              <a:t>PC·모바일 동시 지원</a:t>
             </a:r>
           </a:p>
         </p:txBody>
@@ -11868,29 +12196,30 @@
         <p:spPr>
           <a:xfrm xmlns:a="http://schemas.openxmlformats.org/drawingml/2006/main">
             <a:off x="495300" y="628650"/>
-            <a:ext cx="10668000" cy="590550"/>
-          </a:xfrm>
-          <a:prstGeom xmlns:a="http://schemas.openxmlformats.org/drawingml/2006/main" prst="rect">
-            <a:avLst/>
-          </a:prstGeom>
-          <a:noFill xmlns:a="http://schemas.openxmlformats.org/drawingml/2006/main"/>
-          <a:ln xmlns:a="http://schemas.openxmlformats.org/drawingml/2006/main" w="0">
-            <a:noFill/>
-            <a:prstDash val="solid"/>
-          </a:ln>
-        </p:spPr>
-        <p:txBody>
-          <a:bodyPr xmlns:a="http://schemas.openxmlformats.org/drawingml/2006/main" anchor="t"/>
-          <a:lstStyle xmlns:a="http://schemas.openxmlformats.org/drawingml/2006/main"/>
-          <a:p xmlns:a="http://schemas.openxmlformats.org/drawingml/2006/main">
-            <a:pPr algn="l">
+            <a:ext cx="11914414" cy="590550"/>
+          </a:xfrm>
+          <a:prstGeom xmlns:a="http://schemas.openxmlformats.org/drawingml/2006/main" prst="rect">
+            <a:avLst/>
+          </a:prstGeom>
+          <a:noFill xmlns:a="http://schemas.openxmlformats.org/drawingml/2006/main"/>
+          <a:ln xmlns:a="http://schemas.openxmlformats.org/drawingml/2006/main" w="0">
+            <a:noFill/>
+            <a:prstDash val="solid"/>
+          </a:ln>
+        </p:spPr>
+        <p:txBody>
+          <a:bodyPr xmlns:a="http://schemas.openxmlformats.org/drawingml/2006/main" anchor="t"/>
+          <a:lstStyle xmlns:a="http://schemas.openxmlformats.org/drawingml/2006/main"/>
+          <a:p xmlns:a="http://schemas.openxmlformats.org/drawingml/2006/main">
+            <a:pPr algn="l">
+              <a:buNone/>
               <a:defRPr sz="3525" b="1">
                 <a:solidFill>
                   <a:srgbClr val="111820"/>
                 </a:solidFill>
-                <a:latin typeface="Nanum Gothic"/>
-                <a:ea typeface="Nanum Gothic"/>
-                <a:cs typeface="Nanum Gothic"/>
+                <a:latin typeface="NanumGothic"/>
+                <a:ea typeface="NanumGothic"/>
+                <a:cs typeface="NanumGothic"/>
               </a:defRPr>
             </a:pPr>
             <a:r>
@@ -11898,18 +12227,18 @@
                 <a:solidFill>
                   <a:srgbClr val="111820"/>
                 </a:solidFill>
-                <a:latin typeface="Nanum Gothic"/>
-                <a:ea typeface="Nanum Gothic"/>
-                <a:cs typeface="Nanum Gothic"/>
-              </a:rPr>
-              <a:t>고령층 접근성과 개인정보 보호를 기본값으로 두었습니다</a:t>
+                <a:latin typeface="NanumGothic"/>
+                <a:ea typeface="NanumGothic"/>
+                <a:cs typeface="NanumGothic"/>
+              </a:rPr>
+              <a:t>집에서는 PC로 확인하고, 현장에서는 휴대폰으로 바로 대응합니다</a:t>
             </a:r>
           </a:p>
         </p:txBody>
       </p:sp>
       <p:cxnSp>
         <p:nvCxnSpPr>
-          <p:cNvPr id="21" name="rule-9"/>
+          <p:cNvPr id="37" name="rule-9"/>
           <p:cNvCxnSpPr/>
           <p:nvPr/>
         </p:nvCxnSpPr>
@@ -11962,13 +12291,14 @@
           <a:lstStyle xmlns:a="http://schemas.openxmlformats.org/drawingml/2006/main"/>
           <a:p xmlns:a="http://schemas.openxmlformats.org/drawingml/2006/main">
             <a:pPr algn="r">
+              <a:buNone/>
               <a:defRPr sz="975" b="0">
                 <a:solidFill>
                   <a:srgbClr val="58636F"/>
                 </a:solidFill>
-                <a:latin typeface="Nanum Gothic"/>
-                <a:ea typeface="Nanum Gothic"/>
-                <a:cs typeface="Nanum Gothic"/>
+                <a:latin typeface="NanumGothic"/>
+                <a:ea typeface="NanumGothic"/>
+                <a:cs typeface="NanumGothic"/>
               </a:defRPr>
             </a:pPr>
             <a:r>
@@ -11976,9 +12306,9 @@
                 <a:solidFill>
                   <a:srgbClr val="58636F"/>
                 </a:solidFill>
-                <a:latin typeface="Nanum Gothic"/>
-                <a:ea typeface="Nanum Gothic"/>
-                <a:cs typeface="Nanum Gothic"/>
+                <a:latin typeface="NanumGothic"/>
+                <a:ea typeface="NanumGothic"/>
+                <a:cs typeface="NanumGothic"/>
               </a:rPr>
               <a:t>09</a:t>
             </a:r>
@@ -12017,18 +12347,26 @@
             <a:prstDash val="solid"/>
           </a:ln>
         </p:spPr>
+        <p:txBody>
+          <a:bodyPr xmlns:a="http://schemas.openxmlformats.org/drawingml/2006/main"/>
+          <a:lstStyle xmlns:a="http://schemas.openxmlformats.org/drawingml/2006/main"/>
+          <a:p xmlns:a="http://schemas.openxmlformats.org/drawingml/2006/main"/>
+        </p:txBody>
       </p:sp>
       <p:pic>
         <p:nvPicPr>
-          <p:cNvPr id="24" name=""/>
+          <p:cNvPr id="40" name="그림 23"/>
           <p:cNvPicPr>
             <a:picLocks xmlns:a="http://schemas.openxmlformats.org/drawingml/2006/main" noChangeAspect="1"/>
           </p:cNvPicPr>
           <p:nvPr/>
         </p:nvPicPr>
         <p:blipFill>
-          <a:blip xmlns:r="http://schemas.openxmlformats.org/officeDocument/2006/relationships" xmlns:a="http://schemas.openxmlformats.org/drawingml/2006/main" r:embed="R432f5aa79fec44ba"/>
-          <a:stretch xmlns:a="http://schemas.openxmlformats.org/drawingml/2006/main"/>
+          <a:blip xmlns:r="http://schemas.openxmlformats.org/officeDocument/2006/relationships" xmlns:a="http://schemas.openxmlformats.org/drawingml/2006/main" r:embed="R4cce6b75ea8649d7"/>
+          <a:srcRect xmlns:a="http://schemas.openxmlformats.org/drawingml/2006/main" l="0" t="18897" r="0" b="18897"/>
+          <a:stretch xmlns:a="http://schemas.openxmlformats.org/drawingml/2006/main">
+            <a:fillRect l="0" t="0" r="0" b="0"/>
+          </a:stretch>
         </p:blipFill>
         <p:spPr>
           <a:xfrm xmlns:a="http://schemas.openxmlformats.org/drawingml/2006/main">
@@ -12073,13 +12411,14 @@
           <a:lstStyle xmlns:a="http://schemas.openxmlformats.org/drawingml/2006/main"/>
           <a:p xmlns:a="http://schemas.openxmlformats.org/drawingml/2006/main">
             <a:pPr algn="l">
+              <a:buNone/>
               <a:defRPr sz="1650" b="1">
                 <a:solidFill>
                   <a:srgbClr val="0B6B57"/>
                 </a:solidFill>
-                <a:latin typeface="Nanum Gothic"/>
-                <a:ea typeface="Nanum Gothic"/>
-                <a:cs typeface="Nanum Gothic"/>
+                <a:latin typeface="NanumGothic"/>
+                <a:ea typeface="NanumGothic"/>
+                <a:cs typeface="NanumGothic"/>
               </a:defRPr>
             </a:pPr>
             <a:r>
@@ -12087,9 +12426,9 @@
                 <a:solidFill>
                   <a:srgbClr val="0B6B57"/>
                 </a:solidFill>
-                <a:latin typeface="Nanum Gothic"/>
-                <a:ea typeface="Nanum Gothic"/>
-                <a:cs typeface="Nanum Gothic"/>
+                <a:latin typeface="NanumGothic"/>
+                <a:ea typeface="NanumGothic"/>
+                <a:cs typeface="NanumGothic"/>
               </a:rPr>
               <a:t>•</a:t>
             </a:r>
@@ -12129,13 +12468,14 @@
           <a:lstStyle xmlns:a="http://schemas.openxmlformats.org/drawingml/2006/main"/>
           <a:p xmlns:a="http://schemas.openxmlformats.org/drawingml/2006/main">
             <a:pPr algn="l">
+              <a:buNone/>
               <a:defRPr sz="1650" b="0">
                 <a:solidFill>
                   <a:srgbClr val="111820"/>
                 </a:solidFill>
-                <a:latin typeface="Nanum Gothic"/>
-                <a:ea typeface="Nanum Gothic"/>
-                <a:cs typeface="Nanum Gothic"/>
+                <a:latin typeface="NanumGothic"/>
+                <a:ea typeface="NanumGothic"/>
+                <a:cs typeface="NanumGothic"/>
               </a:defRPr>
             </a:pPr>
             <a:r>
@@ -12143,11 +12483,11 @@
                 <a:solidFill>
                   <a:srgbClr val="111820"/>
                 </a:solidFill>
-                <a:latin typeface="Nanum Gothic"/>
-                <a:ea typeface="Nanum Gothic"/>
-                <a:cs typeface="Nanum Gothic"/>
-              </a:rPr>
-              <a:t>보통·크게·아주 크게 3단계 글자 조절</a:t>
+                <a:latin typeface="NanumGothic"/>
+                <a:ea typeface="NanumGothic"/>
+                <a:cs typeface="NanumGothic"/>
+              </a:rPr>
+              <a:t>컴퓨터: 문서·근거·질문을 넓은 화면에서 비교</a:t>
             </a:r>
           </a:p>
         </p:txBody>
@@ -12185,13 +12525,14 @@
           <a:lstStyle xmlns:a="http://schemas.openxmlformats.org/drawingml/2006/main"/>
           <a:p xmlns:a="http://schemas.openxmlformats.org/drawingml/2006/main">
             <a:pPr algn="l">
+              <a:buNone/>
               <a:defRPr sz="1650" b="1">
                 <a:solidFill>
                   <a:srgbClr val="0B6B57"/>
                 </a:solidFill>
-                <a:latin typeface="Nanum Gothic"/>
-                <a:ea typeface="Nanum Gothic"/>
-                <a:cs typeface="Nanum Gothic"/>
+                <a:latin typeface="NanumGothic"/>
+                <a:ea typeface="NanumGothic"/>
+                <a:cs typeface="NanumGothic"/>
               </a:defRPr>
             </a:pPr>
             <a:r>
@@ -12199,9 +12540,9 @@
                 <a:solidFill>
                   <a:srgbClr val="0B6B57"/>
                 </a:solidFill>
-                <a:latin typeface="Nanum Gothic"/>
-                <a:ea typeface="Nanum Gothic"/>
-                <a:cs typeface="Nanum Gothic"/>
+                <a:latin typeface="NanumGothic"/>
+                <a:ea typeface="NanumGothic"/>
+                <a:cs typeface="NanumGothic"/>
               </a:rPr>
               <a:t>•</a:t>
             </a:r>
@@ -12241,13 +12582,14 @@
           <a:lstStyle xmlns:a="http://schemas.openxmlformats.org/drawingml/2006/main"/>
           <a:p xmlns:a="http://schemas.openxmlformats.org/drawingml/2006/main">
             <a:pPr algn="l">
+              <a:buNone/>
               <a:defRPr sz="1650" b="0">
                 <a:solidFill>
                   <a:srgbClr val="111820"/>
                 </a:solidFill>
-                <a:latin typeface="Nanum Gothic"/>
-                <a:ea typeface="Nanum Gothic"/>
-                <a:cs typeface="Nanum Gothic"/>
+                <a:latin typeface="NanumGothic"/>
+                <a:ea typeface="NanumGothic"/>
+                <a:cs typeface="NanumGothic"/>
               </a:defRPr>
             </a:pPr>
             <a:r>
@@ -12255,11 +12597,11 @@
                 <a:solidFill>
                   <a:srgbClr val="111820"/>
                 </a:solidFill>
-                <a:latin typeface="Nanum Gothic"/>
-                <a:ea typeface="Nanum Gothic"/>
-                <a:cs typeface="Nanum Gothic"/>
-              </a:rPr>
-              <a:t>검정·흰색·노란색 중심의 확실한 고대비</a:t>
+                <a:latin typeface="NanumGothic"/>
+                <a:ea typeface="NanumGothic"/>
+                <a:cs typeface="NanumGothic"/>
+              </a:rPr>
+              <a:t>모바일: 받은 문자와 사고 상황을 바로 입력</a:t>
             </a:r>
           </a:p>
         </p:txBody>
@@ -12297,13 +12639,14 @@
           <a:lstStyle xmlns:a="http://schemas.openxmlformats.org/drawingml/2006/main"/>
           <a:p xmlns:a="http://schemas.openxmlformats.org/drawingml/2006/main">
             <a:pPr algn="l">
+              <a:buNone/>
               <a:defRPr sz="1650" b="1">
                 <a:solidFill>
                   <a:srgbClr val="0B6B57"/>
                 </a:solidFill>
-                <a:latin typeface="Nanum Gothic"/>
-                <a:ea typeface="Nanum Gothic"/>
-                <a:cs typeface="Nanum Gothic"/>
+                <a:latin typeface="NanumGothic"/>
+                <a:ea typeface="NanumGothic"/>
+                <a:cs typeface="NanumGothic"/>
               </a:defRPr>
             </a:pPr>
             <a:r>
@@ -12311,9 +12654,9 @@
                 <a:solidFill>
                   <a:srgbClr val="0B6B57"/>
                 </a:solidFill>
-                <a:latin typeface="Nanum Gothic"/>
-                <a:ea typeface="Nanum Gothic"/>
-                <a:cs typeface="Nanum Gothic"/>
+                <a:latin typeface="NanumGothic"/>
+                <a:ea typeface="NanumGothic"/>
+                <a:cs typeface="NanumGothic"/>
               </a:rPr>
               <a:t>•</a:t>
             </a:r>
@@ -12353,13 +12696,14 @@
           <a:lstStyle xmlns:a="http://schemas.openxmlformats.org/drawingml/2006/main"/>
           <a:p xmlns:a="http://schemas.openxmlformats.org/drawingml/2006/main">
             <a:pPr algn="l">
+              <a:buNone/>
               <a:defRPr sz="1650" b="0">
                 <a:solidFill>
                   <a:srgbClr val="111820"/>
                 </a:solidFill>
-                <a:latin typeface="Nanum Gothic"/>
-                <a:ea typeface="Nanum Gothic"/>
-                <a:cs typeface="Nanum Gothic"/>
+                <a:latin typeface="NanumGothic"/>
+                <a:ea typeface="NanumGothic"/>
+                <a:cs typeface="NanumGothic"/>
               </a:defRPr>
             </a:pPr>
             <a:r>
@@ -12367,11 +12711,11 @@
                 <a:solidFill>
                   <a:srgbClr val="111820"/>
                 </a:solidFill>
-                <a:latin typeface="Nanum Gothic"/>
-                <a:ea typeface="Nanum Gothic"/>
-                <a:cs typeface="Nanum Gothic"/>
-              </a:rPr>
-              <a:t>한 번에 한 과업, 큰 버튼, 짧은 단계</a:t>
+                <a:latin typeface="NanumGothic"/>
+                <a:ea typeface="NanumGothic"/>
+                <a:cs typeface="NanumGothic"/>
+              </a:rPr>
+              <a:t>큰 글씨·고대비·큰 버튼을 모든 화면에 적용</a:t>
             </a:r>
           </a:p>
         </p:txBody>
@@ -12409,13 +12753,14 @@
           <a:lstStyle xmlns:a="http://schemas.openxmlformats.org/drawingml/2006/main"/>
           <a:p xmlns:a="http://schemas.openxmlformats.org/drawingml/2006/main">
             <a:pPr algn="l">
+              <a:buNone/>
               <a:defRPr sz="1650" b="1">
                 <a:solidFill>
                   <a:srgbClr val="0B6B57"/>
                 </a:solidFill>
-                <a:latin typeface="Nanum Gothic"/>
-                <a:ea typeface="Nanum Gothic"/>
-                <a:cs typeface="Nanum Gothic"/>
+                <a:latin typeface="NanumGothic"/>
+                <a:ea typeface="NanumGothic"/>
+                <a:cs typeface="NanumGothic"/>
               </a:defRPr>
             </a:pPr>
             <a:r>
@@ -12423,9 +12768,9 @@
                 <a:solidFill>
                   <a:srgbClr val="0B6B57"/>
                 </a:solidFill>
-                <a:latin typeface="Nanum Gothic"/>
-                <a:ea typeface="Nanum Gothic"/>
-                <a:cs typeface="Nanum Gothic"/>
+                <a:latin typeface="NanumGothic"/>
+                <a:ea typeface="NanumGothic"/>
+                <a:cs typeface="NanumGothic"/>
               </a:rPr>
               <a:t>•</a:t>
             </a:r>
@@ -12465,13 +12810,14 @@
           <a:lstStyle xmlns:a="http://schemas.openxmlformats.org/drawingml/2006/main"/>
           <a:p xmlns:a="http://schemas.openxmlformats.org/drawingml/2006/main">
             <a:pPr algn="l">
+              <a:buNone/>
               <a:defRPr sz="1650" b="0">
                 <a:solidFill>
                   <a:srgbClr val="111820"/>
                 </a:solidFill>
-                <a:latin typeface="Nanum Gothic"/>
-                <a:ea typeface="Nanum Gothic"/>
-                <a:cs typeface="Nanum Gothic"/>
+                <a:latin typeface="NanumGothic"/>
+                <a:ea typeface="NanumGothic"/>
+                <a:cs typeface="NanumGothic"/>
               </a:defRPr>
             </a:pPr>
             <a:r>
@@ -12479,11 +12825,11 @@
                 <a:solidFill>
                   <a:srgbClr val="111820"/>
                 </a:solidFill>
-                <a:latin typeface="Nanum Gothic"/>
-                <a:ea typeface="Nanum Gothic"/>
-                <a:cs typeface="Nanum Gothic"/>
-              </a:rPr>
-              <a:t>계좌번호·주민번호·비밀번호 자동 경고 및 마스킹</a:t>
+                <a:latin typeface="NanumGothic"/>
+                <a:ea typeface="NanumGothic"/>
+                <a:cs typeface="NanumGothic"/>
+              </a:rPr>
+              <a:t>계좌번호·주민번호·비밀번호 자동 경고·마스킹</a:t>
             </a:r>
           </a:p>
         </p:txBody>
@@ -12521,13 +12867,14 @@
           <a:lstStyle xmlns:a="http://schemas.openxmlformats.org/drawingml/2006/main"/>
           <a:p xmlns:a="http://schemas.openxmlformats.org/drawingml/2006/main">
             <a:pPr algn="l">
+              <a:buNone/>
               <a:defRPr sz="1650" b="1">
                 <a:solidFill>
                   <a:srgbClr val="0B6B57"/>
                 </a:solidFill>
-                <a:latin typeface="Nanum Gothic"/>
-                <a:ea typeface="Nanum Gothic"/>
-                <a:cs typeface="Nanum Gothic"/>
+                <a:latin typeface="NanumGothic"/>
+                <a:ea typeface="NanumGothic"/>
+                <a:cs typeface="NanumGothic"/>
               </a:defRPr>
             </a:pPr>
             <a:r>
@@ -12535,9 +12882,9 @@
                 <a:solidFill>
                   <a:srgbClr val="0B6B57"/>
                 </a:solidFill>
-                <a:latin typeface="Nanum Gothic"/>
-                <a:ea typeface="Nanum Gothic"/>
-                <a:cs typeface="Nanum Gothic"/>
+                <a:latin typeface="NanumGothic"/>
+                <a:ea typeface="NanumGothic"/>
+                <a:cs typeface="NanumGothic"/>
               </a:rPr>
               <a:t>•</a:t>
             </a:r>
@@ -12577,13 +12924,14 @@
           <a:lstStyle xmlns:a="http://schemas.openxmlformats.org/drawingml/2006/main"/>
           <a:p xmlns:a="http://schemas.openxmlformats.org/drawingml/2006/main">
             <a:pPr algn="l">
+              <a:buNone/>
               <a:defRPr sz="1650" b="0">
                 <a:solidFill>
                   <a:srgbClr val="111820"/>
                 </a:solidFill>
-                <a:latin typeface="Nanum Gothic"/>
-                <a:ea typeface="Nanum Gothic"/>
-                <a:cs typeface="Nanum Gothic"/>
+                <a:latin typeface="NanumGothic"/>
+                <a:ea typeface="NanumGothic"/>
+                <a:cs typeface="NanumGothic"/>
               </a:defRPr>
             </a:pPr>
             <a:r>
@@ -12591,9 +12939,9 @@
                 <a:solidFill>
                   <a:srgbClr val="111820"/>
                 </a:solidFill>
-                <a:latin typeface="Nanum Gothic"/>
-                <a:ea typeface="Nanum Gothic"/>
-                <a:cs typeface="Nanum Gothic"/>
+                <a:latin typeface="NanumGothic"/>
+                <a:ea typeface="NanumGothic"/>
+                <a:cs typeface="NanumGothic"/>
               </a:rPr>
               <a:t>OCR·음성 인식 결과를 사용자가 직접 수정</a:t>
             </a:r>
@@ -12633,13 +12981,14 @@
           <a:lstStyle xmlns:a="http://schemas.openxmlformats.org/drawingml/2006/main"/>
           <a:p xmlns:a="http://schemas.openxmlformats.org/drawingml/2006/main">
             <a:pPr algn="l">
+              <a:buNone/>
               <a:defRPr sz="1650" b="1">
                 <a:solidFill>
                   <a:srgbClr val="0B6B57"/>
                 </a:solidFill>
-                <a:latin typeface="Nanum Gothic"/>
-                <a:ea typeface="Nanum Gothic"/>
-                <a:cs typeface="Nanum Gothic"/>
+                <a:latin typeface="NanumGothic"/>
+                <a:ea typeface="NanumGothic"/>
+                <a:cs typeface="NanumGothic"/>
               </a:defRPr>
             </a:pPr>
             <a:r>
@@ -12647,9 +12996,9 @@
                 <a:solidFill>
                   <a:srgbClr val="0B6B57"/>
                 </a:solidFill>
-                <a:latin typeface="Nanum Gothic"/>
-                <a:ea typeface="Nanum Gothic"/>
-                <a:cs typeface="Nanum Gothic"/>
+                <a:latin typeface="NanumGothic"/>
+                <a:ea typeface="NanumGothic"/>
+                <a:cs typeface="NanumGothic"/>
               </a:rPr>
               <a:t>•</a:t>
             </a:r>
@@ -12689,13 +13038,14 @@
           <a:lstStyle xmlns:a="http://schemas.openxmlformats.org/drawingml/2006/main"/>
           <a:p xmlns:a="http://schemas.openxmlformats.org/drawingml/2006/main">
             <a:pPr algn="l">
+              <a:buNone/>
               <a:defRPr sz="1650" b="0">
                 <a:solidFill>
                   <a:srgbClr val="111820"/>
                 </a:solidFill>
-                <a:latin typeface="Nanum Gothic"/>
-                <a:ea typeface="Nanum Gothic"/>
-                <a:cs typeface="Nanum Gothic"/>
+                <a:latin typeface="NanumGothic"/>
+                <a:ea typeface="NanumGothic"/>
+                <a:cs typeface="NanumGothic"/>
               </a:defRPr>
             </a:pPr>
             <a:r>
@@ -12703,9 +13053,9 @@
                 <a:solidFill>
                   <a:srgbClr val="111820"/>
                 </a:solidFill>
-                <a:latin typeface="Nanum Gothic"/>
-                <a:ea typeface="Nanum Gothic"/>
-                <a:cs typeface="Nanum Gothic"/>
+                <a:latin typeface="NanumGothic"/>
+                <a:ea typeface="NanumGothic"/>
+                <a:cs typeface="NanumGothic"/>
               </a:rPr>
               <a:t>읽어주기와 개인정보 없는 보호자 공유</a:t>
             </a:r>
